--- a/codex_output/04_moe_distribute_dispatch_v2代码分析/02_moe_distribute_dispatch_v2_A5_code_analysis_summary.pptx
+++ b/codex_output/04_moe_distribute_dispatch_v2代码分析/02_moe_distribute_dispatch_v2_A5_code_analysis_summary.pptx
@@ -2,22 +2,24 @@
 <file path=ppt/presentation.xml><?xml version="1.0" encoding="utf-8"?>
 <p:presentation xmlns:p="http://schemas.openxmlformats.org/presentationml/2006/main">
   <p:sldMasterIdLst>
-    <p:sldMasterId xmlns:r="http://schemas.openxmlformats.org/officeDocument/2006/relationships" id="2147483648" r:id="R7a4cda9b02f64f71"/>
+    <p:sldMasterId xmlns:r="http://schemas.openxmlformats.org/officeDocument/2006/relationships" id="2147483648" r:id="R3cee83c36e8f4cb2"/>
   </p:sldMasterIdLst>
   <p:notesMasterIdLst>
-    <p:notesMasterId xmlns:r="http://schemas.openxmlformats.org/officeDocument/2006/relationships" r:id="R4d6dd80bb72e4036"/>
+    <p:notesMasterId xmlns:r="http://schemas.openxmlformats.org/officeDocument/2006/relationships" r:id="R504fdd8e8ba84a46"/>
   </p:notesMasterIdLst>
   <p:sldIdLst>
-    <p:sldId xmlns:r="http://schemas.openxmlformats.org/officeDocument/2006/relationships" id="256" r:id="R9770a37deaab4f0a"/>
-    <p:sldId xmlns:r="http://schemas.openxmlformats.org/officeDocument/2006/relationships" id="257" r:id="R1fe182d79c6d4e6b"/>
-    <p:sldId xmlns:r="http://schemas.openxmlformats.org/officeDocument/2006/relationships" id="258" r:id="R974359c3214a4a9f"/>
-    <p:sldId xmlns:r="http://schemas.openxmlformats.org/officeDocument/2006/relationships" id="259" r:id="Re3366758b6e3425e"/>
-    <p:sldId xmlns:r="http://schemas.openxmlformats.org/officeDocument/2006/relationships" id="260" r:id="Re825aa328b5d4c22"/>
-    <p:sldId xmlns:r="http://schemas.openxmlformats.org/officeDocument/2006/relationships" id="261" r:id="R1fce043cb92f4055"/>
-    <p:sldId xmlns:r="http://schemas.openxmlformats.org/officeDocument/2006/relationships" id="262" r:id="R65ab47746ce54a72"/>
-    <p:sldId xmlns:r="http://schemas.openxmlformats.org/officeDocument/2006/relationships" id="263" r:id="Rf76b7ce3d4d2473b"/>
-    <p:sldId xmlns:r="http://schemas.openxmlformats.org/officeDocument/2006/relationships" id="264" r:id="Rad17c141b7e14563"/>
-    <p:sldId xmlns:r="http://schemas.openxmlformats.org/officeDocument/2006/relationships" id="265" r:id="R459ed09518a54bd0"/>
+    <p:sldId xmlns:r="http://schemas.openxmlformats.org/officeDocument/2006/relationships" id="256" r:id="Ra58e980c322c4b6b"/>
+    <p:sldId xmlns:r="http://schemas.openxmlformats.org/officeDocument/2006/relationships" id="257" r:id="R6a525641bada47f5"/>
+    <p:sldId xmlns:r="http://schemas.openxmlformats.org/officeDocument/2006/relationships" id="258" r:id="Rd0b490b86db74ab7"/>
+    <p:sldId xmlns:r="http://schemas.openxmlformats.org/officeDocument/2006/relationships" id="259" r:id="R8039371457b44fe2"/>
+    <p:sldId xmlns:r="http://schemas.openxmlformats.org/officeDocument/2006/relationships" id="260" r:id="R84a9b7f2c3e04053"/>
+    <p:sldId xmlns:r="http://schemas.openxmlformats.org/officeDocument/2006/relationships" id="261" r:id="Rb432ab190513435d"/>
+    <p:sldId xmlns:r="http://schemas.openxmlformats.org/officeDocument/2006/relationships" id="262" r:id="R6787b0469a844b95"/>
+    <p:sldId xmlns:r="http://schemas.openxmlformats.org/officeDocument/2006/relationships" id="263" r:id="R65f7ec49e71a4048"/>
+    <p:sldId xmlns:r="http://schemas.openxmlformats.org/officeDocument/2006/relationships" id="264" r:id="Rbe859feeead444fc"/>
+    <p:sldId xmlns:r="http://schemas.openxmlformats.org/officeDocument/2006/relationships" id="265" r:id="Rc216071bd9d54930"/>
+    <p:sldId xmlns:r="http://schemas.openxmlformats.org/officeDocument/2006/relationships" id="266" r:id="R5e58afa6d36e4b76"/>
+    <p:sldId xmlns:r="http://schemas.openxmlformats.org/officeDocument/2006/relationships" id="267" r:id="Rda6eebeeb0c54190"/>
   </p:sldIdLst>
   <p:sldSz cx="12192000" cy="6858000"/>
   <p:notesSz cx="6858000" cy="9144000"/>
@@ -638,6 +640,138 @@
 </p:notes>
 </file>
 
+<file path=ppt/notesSlides/notesSlide11.xml><?xml version="1.0" encoding="utf-8"?>
+<p:notes xmlns:p="http://schemas.openxmlformats.org/presentationml/2006/main">
+  <p:cSld>
+    <p:spTree>
+      <p:nvGrpSpPr>
+        <p:cNvPr id="1" name=""/>
+        <p:cNvGrpSpPr/>
+        <p:nvPr/>
+      </p:nvGrpSpPr>
+      <p:grpSpPr>
+        <a:xfrm xmlns:a="http://schemas.openxmlformats.org/drawingml/2006/main"/>
+      </p:grpSpPr>
+      <p:sp>
+        <p:nvSpPr>
+          <p:cNvPr id="2" name="Slide Image Placeholder 1"/>
+          <p:cNvSpPr>
+            <a:spLocks xmlns:a="http://schemas.openxmlformats.org/drawingml/2006/main" noGrp="1"/>
+          </p:cNvSpPr>
+          <p:nvPr>
+            <p:ph type="sldImg" idx="0"/>
+          </p:nvPr>
+        </p:nvSpPr>
+        <p:spPr/>
+      </p:sp>
+      <p:sp>
+        <p:nvSpPr>
+          <p:cNvPr id="3" name="Notes Placeholder 2"/>
+          <p:cNvSpPr>
+            <a:spLocks xmlns:a="http://schemas.openxmlformats.org/drawingml/2006/main" noGrp="1"/>
+          </p:cNvSpPr>
+          <p:nvPr>
+            <p:ph type="body" idx="1"/>
+          </p:nvPr>
+        </p:nvSpPr>
+        <p:spPr/>
+        <p:txBody>
+          <a:bodyPr xmlns:a="http://schemas.openxmlformats.org/drawingml/2006/main"/>
+          <a:lstStyle xmlns:a="http://schemas.openxmlformats.org/drawingml/2006/main"/>
+          <a:p xmlns:a="http://schemas.openxmlformats.org/drawingml/2006/main"/>
+        </p:txBody>
+      </p:sp>
+      <p:sp>
+        <p:nvSpPr>
+          <p:cNvPr id="4" name="Slide Number Placeholder 3"/>
+          <p:cNvSpPr>
+            <a:spLocks xmlns:a="http://schemas.openxmlformats.org/drawingml/2006/main" noGrp="1"/>
+          </p:cNvSpPr>
+          <p:nvPr>
+            <p:ph type="sldNum" idx="5"/>
+          </p:nvPr>
+        </p:nvSpPr>
+        <p:spPr/>
+        <p:txBody>
+          <a:bodyPr xmlns:a="http://schemas.openxmlformats.org/drawingml/2006/main"/>
+          <a:lstStyle xmlns:a="http://schemas.openxmlformats.org/drawingml/2006/main"/>
+          <a:p xmlns:a="http://schemas.openxmlformats.org/drawingml/2006/main"/>
+        </p:txBody>
+      </p:sp>
+    </p:spTree>
+  </p:cSld>
+  <p:clrMapOvr>
+    <a:masterClrMapping xmlns:a="http://schemas.openxmlformats.org/drawingml/2006/main"/>
+  </p:clrMapOvr>
+</p:notes>
+</file>
+
+<file path=ppt/notesSlides/notesSlide12.xml><?xml version="1.0" encoding="utf-8"?>
+<p:notes xmlns:p="http://schemas.openxmlformats.org/presentationml/2006/main">
+  <p:cSld>
+    <p:spTree>
+      <p:nvGrpSpPr>
+        <p:cNvPr id="1" name=""/>
+        <p:cNvGrpSpPr/>
+        <p:nvPr/>
+      </p:nvGrpSpPr>
+      <p:grpSpPr>
+        <a:xfrm xmlns:a="http://schemas.openxmlformats.org/drawingml/2006/main"/>
+      </p:grpSpPr>
+      <p:sp>
+        <p:nvSpPr>
+          <p:cNvPr id="2" name="Slide Image Placeholder 1"/>
+          <p:cNvSpPr>
+            <a:spLocks xmlns:a="http://schemas.openxmlformats.org/drawingml/2006/main" noGrp="1"/>
+          </p:cNvSpPr>
+          <p:nvPr>
+            <p:ph type="sldImg" idx="0"/>
+          </p:nvPr>
+        </p:nvSpPr>
+        <p:spPr/>
+      </p:sp>
+      <p:sp>
+        <p:nvSpPr>
+          <p:cNvPr id="3" name="Notes Placeholder 2"/>
+          <p:cNvSpPr>
+            <a:spLocks xmlns:a="http://schemas.openxmlformats.org/drawingml/2006/main" noGrp="1"/>
+          </p:cNvSpPr>
+          <p:nvPr>
+            <p:ph type="body" idx="1"/>
+          </p:nvPr>
+        </p:nvSpPr>
+        <p:spPr/>
+        <p:txBody>
+          <a:bodyPr xmlns:a="http://schemas.openxmlformats.org/drawingml/2006/main"/>
+          <a:lstStyle xmlns:a="http://schemas.openxmlformats.org/drawingml/2006/main"/>
+          <a:p xmlns:a="http://schemas.openxmlformats.org/drawingml/2006/main"/>
+        </p:txBody>
+      </p:sp>
+      <p:sp>
+        <p:nvSpPr>
+          <p:cNvPr id="4" name="Slide Number Placeholder 3"/>
+          <p:cNvSpPr>
+            <a:spLocks xmlns:a="http://schemas.openxmlformats.org/drawingml/2006/main" noGrp="1"/>
+          </p:cNvSpPr>
+          <p:nvPr>
+            <p:ph type="sldNum" idx="5"/>
+          </p:nvPr>
+        </p:nvSpPr>
+        <p:spPr/>
+        <p:txBody>
+          <a:bodyPr xmlns:a="http://schemas.openxmlformats.org/drawingml/2006/main"/>
+          <a:lstStyle xmlns:a="http://schemas.openxmlformats.org/drawingml/2006/main"/>
+          <a:p xmlns:a="http://schemas.openxmlformats.org/drawingml/2006/main"/>
+        </p:txBody>
+      </p:sp>
+    </p:spTree>
+  </p:cSld>
+  <p:clrMapOvr>
+    <a:masterClrMapping xmlns:a="http://schemas.openxmlformats.org/drawingml/2006/main"/>
+  </p:clrMapOvr>
+</p:notes>
+</file>
+
 <file path=ppt/notesSlides/notesSlide2.xml><?xml version="1.0" encoding="utf-8"?>
 <p:notes xmlns:p="http://schemas.openxmlformats.org/presentationml/2006/main">
   <p:cSld>
@@ -1204,7 +1338,7 @@
   </p:cSld>
   <p:clrMap bg1="lt1" tx1="dk1" bg2="lt2" tx2="dk2" accent1="accent1" accent2="accent2" accent3="accent3" accent4="accent4" accent5="accent5" accent6="accent6" hlink="hlink" folHlink="folHlink"/>
   <p:sldLayoutIdLst>
-    <p:sldLayoutId xmlns:r="http://schemas.openxmlformats.org/officeDocument/2006/relationships" id="2147483649" r:id="R65e523d109484b9d"/>
+    <p:sldLayoutId xmlns:r="http://schemas.openxmlformats.org/officeDocument/2006/relationships" id="2147483649" r:id="R5b79c83862d74909"/>
   </p:sldLayoutIdLst>
   <p:txStyles>
     <p:titleStyle>
@@ -1783,6 +1917,7 @@
           <a:lstStyle xmlns:a="http://schemas.openxmlformats.org/drawingml/2006/main"/>
           <a:p xmlns:a="http://schemas.openxmlformats.org/drawingml/2006/main">
             <a:pPr algn="l">
+              <a:buNone/>
               <a:defRPr sz="3300" b="1">
                 <a:solidFill>
                   <a:srgbClr val="111827"/>
@@ -1839,6 +1974,7 @@
           <a:lstStyle xmlns:a="http://schemas.openxmlformats.org/drawingml/2006/main"/>
           <a:p xmlns:a="http://schemas.openxmlformats.org/drawingml/2006/main">
             <a:pPr algn="l">
+              <a:buNone/>
               <a:defRPr sz="1950" b="1">
                 <a:solidFill>
                   <a:srgbClr val="0F766E"/>
@@ -1895,6 +2031,7 @@
           <a:lstStyle xmlns:a="http://schemas.openxmlformats.org/drawingml/2006/main"/>
           <a:p xmlns:a="http://schemas.openxmlformats.org/drawingml/2006/main">
             <a:pPr algn="l">
+              <a:buNone/>
               <a:defRPr sz="1650" b="0">
                 <a:solidFill>
                   <a:srgbClr val="111827"/>
@@ -1918,6 +2055,7 @@
           </a:p>
           <a:p xmlns:a="http://schemas.openxmlformats.org/drawingml/2006/main">
             <a:pPr algn="l">
+              <a:buNone/>
               <a:defRPr sz="1650" b="0">
                 <a:solidFill>
                   <a:srgbClr val="111827"/>
@@ -1941,6 +2079,7 @@
           </a:p>
           <a:p xmlns:a="http://schemas.openxmlformats.org/drawingml/2006/main">
             <a:pPr algn="l">
+              <a:buNone/>
               <a:defRPr sz="1650" b="0">
                 <a:solidFill>
                   <a:srgbClr val="111827"/>
@@ -2032,6 +2171,7 @@
           <a:lstStyle xmlns:a="http://schemas.openxmlformats.org/drawingml/2006/main"/>
           <a:p xmlns:a="http://schemas.openxmlformats.org/drawingml/2006/main">
             <a:pPr algn="l">
+              <a:buNone/>
               <a:defRPr sz="1800" b="1">
                 <a:solidFill>
                   <a:srgbClr val="FFFFFF"/>
@@ -2123,6 +2263,7 @@
           <a:lstStyle xmlns:a="http://schemas.openxmlformats.org/drawingml/2006/main"/>
           <a:p xmlns:a="http://schemas.openxmlformats.org/drawingml/2006/main">
             <a:pPr algn="ctr">
+              <a:buNone/>
               <a:defRPr sz="1050" b="1">
                 <a:solidFill>
                   <a:srgbClr val="FFFFFF"/>
@@ -2179,6 +2320,7 @@
           <a:lstStyle xmlns:a="http://schemas.openxmlformats.org/drawingml/2006/main"/>
           <a:p xmlns:a="http://schemas.openxmlformats.org/drawingml/2006/main">
             <a:pPr algn="l">
+              <a:buNone/>
               <a:defRPr sz="1425" b="0">
                 <a:solidFill>
                   <a:srgbClr val="FFFFFF"/>
@@ -2202,6 +2344,7 @@
           </a:p>
           <a:p xmlns:a="http://schemas.openxmlformats.org/drawingml/2006/main">
             <a:pPr algn="l">
+              <a:buNone/>
               <a:defRPr sz="1425" b="0">
                 <a:solidFill>
                   <a:srgbClr val="FFFFFF"/>
@@ -2225,6 +2368,7 @@
           </a:p>
           <a:p xmlns:a="http://schemas.openxmlformats.org/drawingml/2006/main">
             <a:pPr algn="l">
+              <a:buNone/>
               <a:defRPr sz="1425" b="0">
                 <a:solidFill>
                   <a:srgbClr val="FFFFFF"/>
@@ -2316,6 +2460,7 @@
           <a:lstStyle xmlns:a="http://schemas.openxmlformats.org/drawingml/2006/main"/>
           <a:p xmlns:a="http://schemas.openxmlformats.org/drawingml/2006/main">
             <a:pPr algn="ctr">
+              <a:buNone/>
               <a:defRPr sz="1050" b="1">
                 <a:solidFill>
                   <a:srgbClr val="FFFFFF"/>
@@ -2372,6 +2517,7 @@
           <a:lstStyle xmlns:a="http://schemas.openxmlformats.org/drawingml/2006/main"/>
           <a:p xmlns:a="http://schemas.openxmlformats.org/drawingml/2006/main">
             <a:pPr algn="l">
+              <a:buNone/>
               <a:defRPr sz="1350" b="0">
                 <a:solidFill>
                   <a:srgbClr val="FFFFFF"/>
@@ -2395,6 +2541,7 @@
           </a:p>
           <a:p xmlns:a="http://schemas.openxmlformats.org/drawingml/2006/main">
             <a:pPr algn="l">
+              <a:buNone/>
               <a:defRPr sz="1350" b="0">
                 <a:solidFill>
                   <a:srgbClr val="FFFFFF"/>
@@ -2451,6 +2598,7 @@
           <a:lstStyle xmlns:a="http://schemas.openxmlformats.org/drawingml/2006/main"/>
           <a:p xmlns:a="http://schemas.openxmlformats.org/drawingml/2006/main">
             <a:pPr algn="r">
+              <a:buNone/>
               <a:defRPr sz="900" b="0">
                 <a:solidFill>
                   <a:srgbClr val="5B6472"/>
@@ -2536,6 +2684,7 @@
           <a:lstStyle xmlns:a="http://schemas.openxmlformats.org/drawingml/2006/main"/>
           <a:p xmlns:a="http://schemas.openxmlformats.org/drawingml/2006/main">
             <a:pPr algn="l">
+              <a:buNone/>
               <a:defRPr sz="2550" b="1">
                 <a:solidFill>
                   <a:srgbClr val="111827"/>
@@ -2592,6 +2741,7 @@
           <a:lstStyle xmlns:a="http://schemas.openxmlformats.org/drawingml/2006/main"/>
           <a:p xmlns:a="http://schemas.openxmlformats.org/drawingml/2006/main">
             <a:pPr algn="l">
+              <a:buNone/>
               <a:defRPr sz="1050" b="0">
                 <a:solidFill>
                   <a:srgbClr val="5B6472"/>
@@ -2648,6 +2798,7 @@
           <a:lstStyle xmlns:a="http://schemas.openxmlformats.org/drawingml/2006/main"/>
           <a:p xmlns:a="http://schemas.openxmlformats.org/drawingml/2006/main">
             <a:pPr algn="r">
+              <a:buNone/>
               <a:defRPr sz="900" b="0">
                 <a:solidFill>
                   <a:srgbClr val="5B6472"/>
@@ -2774,6 +2925,7 @@
           <a:lstStyle xmlns:a="http://schemas.openxmlformats.org/drawingml/2006/main"/>
           <a:p xmlns:a="http://schemas.openxmlformats.org/drawingml/2006/main">
             <a:pPr algn="ctr">
+              <a:buNone/>
               <a:defRPr sz="1050" b="1">
                 <a:solidFill>
                   <a:srgbClr val="FFFFFF"/>
@@ -2830,6 +2982,7 @@
           <a:lstStyle xmlns:a="http://schemas.openxmlformats.org/drawingml/2006/main"/>
           <a:p xmlns:a="http://schemas.openxmlformats.org/drawingml/2006/main">
             <a:pPr algn="l">
+              <a:buNone/>
               <a:defRPr sz="1575" b="0">
                 <a:solidFill>
                   <a:srgbClr val="111827"/>
@@ -2956,6 +3109,7 @@
           <a:lstStyle xmlns:a="http://schemas.openxmlformats.org/drawingml/2006/main"/>
           <a:p xmlns:a="http://schemas.openxmlformats.org/drawingml/2006/main">
             <a:pPr algn="ctr">
+              <a:buNone/>
               <a:defRPr sz="1050" b="1">
                 <a:solidFill>
                   <a:srgbClr val="FFFFFF"/>
@@ -3012,6 +3166,7 @@
           <a:lstStyle xmlns:a="http://schemas.openxmlformats.org/drawingml/2006/main"/>
           <a:p xmlns:a="http://schemas.openxmlformats.org/drawingml/2006/main">
             <a:pPr algn="l">
+              <a:buNone/>
               <a:defRPr sz="1575" b="0">
                 <a:solidFill>
                   <a:srgbClr val="111827"/>
@@ -3138,6 +3293,7 @@
           <a:lstStyle xmlns:a="http://schemas.openxmlformats.org/drawingml/2006/main"/>
           <a:p xmlns:a="http://schemas.openxmlformats.org/drawingml/2006/main">
             <a:pPr algn="ctr">
+              <a:buNone/>
               <a:defRPr sz="1050" b="1">
                 <a:solidFill>
                   <a:srgbClr val="FFFFFF"/>
@@ -3194,6 +3350,7 @@
           <a:lstStyle xmlns:a="http://schemas.openxmlformats.org/drawingml/2006/main"/>
           <a:p xmlns:a="http://schemas.openxmlformats.org/drawingml/2006/main">
             <a:pPr algn="l">
+              <a:buNone/>
               <a:defRPr sz="1575" b="0">
                 <a:solidFill>
                   <a:srgbClr val="111827"/>
@@ -3320,6 +3477,7 @@
           <a:lstStyle xmlns:a="http://schemas.openxmlformats.org/drawingml/2006/main"/>
           <a:p xmlns:a="http://schemas.openxmlformats.org/drawingml/2006/main">
             <a:pPr algn="ctr">
+              <a:buNone/>
               <a:defRPr sz="1050" b="1">
                 <a:solidFill>
                   <a:srgbClr val="FFFFFF"/>
@@ -3376,6 +3534,7 @@
           <a:lstStyle xmlns:a="http://schemas.openxmlformats.org/drawingml/2006/main"/>
           <a:p xmlns:a="http://schemas.openxmlformats.org/drawingml/2006/main">
             <a:pPr algn="l">
+              <a:buNone/>
               <a:defRPr sz="1575" b="0">
                 <a:solidFill>
                   <a:srgbClr val="111827"/>
@@ -3432,6 +3591,7 @@
           <a:lstStyle xmlns:a="http://schemas.openxmlformats.org/drawingml/2006/main"/>
           <a:p xmlns:a="http://schemas.openxmlformats.org/drawingml/2006/main">
             <a:pPr algn="r">
+              <a:buNone/>
               <a:defRPr sz="900" b="0">
                 <a:solidFill>
                   <a:srgbClr val="5B6472"/>
@@ -3459,6 +3619,3410 @@
     <p:extLst>
       <p:ext uri="{BB962C8B-B14F-4D97-AF65-F5344CB8AC3E}">
         <p14:creationId xmlns:p14="http://schemas.microsoft.com/office/powerpoint/2010/main" val="483616976"/>
+      </p:ext>
+    </p:extLst>
+  </p:cSld>
+</p:sld>
+</file>
+
+<file path=ppt/slides/slide11.xml><?xml version="1.0" encoding="utf-8"?>
+<p:sld xmlns:p="http://schemas.openxmlformats.org/presentationml/2006/main">
+  <p:cSld>
+    <p:bg>
+      <p:bgPr>
+        <a:solidFill xmlns:a="http://schemas.openxmlformats.org/drawingml/2006/main">
+          <a:srgbClr val="F8FAFC"/>
+        </a:solidFill>
+      </p:bgPr>
+    </p:bg>
+    <p:spTree>
+      <p:nvGrpSpPr>
+        <p:cNvPr id="1" name=""/>
+        <p:cNvGrpSpPr/>
+        <p:nvPr/>
+      </p:nvGrpSpPr>
+      <p:grpSpPr>
+        <a:xfrm xmlns:a="http://schemas.openxmlformats.org/drawingml/2006/main"/>
+      </p:grpSpPr>
+      <p:sp>
+        <p:nvSpPr>
+          <p:cNvPr id="1" name="">
+            <a:extLst xmlns:a="http://schemas.openxmlformats.org/drawingml/2006/main">
+              <a:ext uri="{FF2B5EF4-FFF2-40B4-BE49-F238E27FC236}">
+                <a16:creationId xmlns:a16="http://schemas.microsoft.com/office/drawing/2014/main" id="{D5A3C67D-25D2-4370-A551-B621410D22A2}"/>
+              </a:ext>
+            </a:extLst>
+          </p:cNvPr>
+          <p:cNvSpPr>
+            <a:spLocks xmlns:a="http://schemas.openxmlformats.org/drawingml/2006/main" noGrp="1"/>
+          </p:cNvSpPr>
+          <p:nvPr/>
+        </p:nvSpPr>
+        <p:spPr>
+          <a:xfrm xmlns:a="http://schemas.openxmlformats.org/drawingml/2006/main">
+            <a:off x="704850" y="438150"/>
+            <a:ext cx="2190750" cy="247650"/>
+          </a:xfrm>
+          <a:prstGeom xmlns:a="http://schemas.openxmlformats.org/drawingml/2006/main" prst="rect">
+            <a:avLst/>
+          </a:prstGeom>
+          <a:noFill xmlns:a="http://schemas.openxmlformats.org/drawingml/2006/main"/>
+          <a:ln xmlns:a="http://schemas.openxmlformats.org/drawingml/2006/main" w="0">
+            <a:noFill/>
+            <a:prstDash val="solid"/>
+          </a:ln>
+        </p:spPr>
+        <p:txBody>
+          <a:bodyPr xmlns:a="http://schemas.openxmlformats.org/drawingml/2006/main"/>
+          <a:lstStyle xmlns:a="http://schemas.openxmlformats.org/drawingml/2006/main"/>
+          <a:p xmlns:a="http://schemas.openxmlformats.org/drawingml/2006/main">
+            <a:pPr algn="l">
+              <a:buNone/>
+              <a:defRPr sz="1200" b="1">
+                <a:solidFill>
+                  <a:srgbClr val="2563EB"/>
+                </a:solidFill>
+              </a:defRPr>
+            </a:pPr>
+            <a:r>
+              <a:rPr sz="1200" b="1">
+                <a:solidFill>
+                  <a:srgbClr val="2563EB"/>
+                </a:solidFill>
+              </a:rPr>
+              <a:t>A5 CCU kernel</a:t>
+            </a:r>
+          </a:p>
+        </p:txBody>
+      </p:sp>
+      <p:sp>
+        <p:nvSpPr>
+          <p:cNvPr id="2" name="">
+            <a:extLst xmlns:a="http://schemas.openxmlformats.org/drawingml/2006/main">
+              <a:ext uri="{FF2B5EF4-FFF2-40B4-BE49-F238E27FC236}">
+                <a16:creationId xmlns:a16="http://schemas.microsoft.com/office/drawing/2014/main" id="{2EC76CA7-D951-4788-959D-5185916D0F42}"/>
+              </a:ext>
+            </a:extLst>
+          </p:cNvPr>
+          <p:cNvSpPr>
+            <a:spLocks xmlns:a="http://schemas.openxmlformats.org/drawingml/2006/main" noGrp="1"/>
+          </p:cNvSpPr>
+          <p:nvPr/>
+        </p:nvSpPr>
+        <p:spPr>
+          <a:xfrm xmlns:a="http://schemas.openxmlformats.org/drawingml/2006/main">
+            <a:off x="704850" y="819150"/>
+            <a:ext cx="8001000" cy="457200"/>
+          </a:xfrm>
+          <a:prstGeom xmlns:a="http://schemas.openxmlformats.org/drawingml/2006/main" prst="rect">
+            <a:avLst/>
+          </a:prstGeom>
+          <a:noFill xmlns:a="http://schemas.openxmlformats.org/drawingml/2006/main"/>
+          <a:ln xmlns:a="http://schemas.openxmlformats.org/drawingml/2006/main" w="0">
+            <a:noFill/>
+            <a:prstDash val="solid"/>
+          </a:ln>
+        </p:spPr>
+        <p:txBody>
+          <a:bodyPr xmlns:a="http://schemas.openxmlformats.org/drawingml/2006/main"/>
+          <a:lstStyle xmlns:a="http://schemas.openxmlformats.org/drawingml/2006/main"/>
+          <a:p xmlns:a="http://schemas.openxmlformats.org/drawingml/2006/main">
+            <a:pPr algn="l">
+              <a:buNone/>
+              <a:defRPr sz="2850" b="1">
+                <a:solidFill>
+                  <a:srgbClr val="020618"/>
+                </a:solidFill>
+              </a:defRPr>
+            </a:pPr>
+            <a:r>
+              <a:rPr sz="2850" b="1">
+                <a:solidFill>
+                  <a:srgbClr val="020618"/>
+                </a:solidFill>
+              </a:rPr>
+              <a:t>MoeDistributeDispatchA5::Init</a:t>
+            </a:r>
+          </a:p>
+        </p:txBody>
+      </p:sp>
+      <p:sp>
+        <p:nvSpPr>
+          <p:cNvPr id="3" name="">
+            <a:extLst xmlns:a="http://schemas.openxmlformats.org/drawingml/2006/main">
+              <a:ext uri="{FF2B5EF4-FFF2-40B4-BE49-F238E27FC236}">
+                <a16:creationId xmlns:a16="http://schemas.microsoft.com/office/drawing/2014/main" id="{12A631CC-E0FA-4017-875F-9115356C24CC}"/>
+              </a:ext>
+            </a:extLst>
+          </p:cNvPr>
+          <p:cNvSpPr>
+            <a:spLocks xmlns:a="http://schemas.openxmlformats.org/drawingml/2006/main" noGrp="1"/>
+          </p:cNvSpPr>
+          <p:nvPr/>
+        </p:nvSpPr>
+        <p:spPr>
+          <a:xfrm xmlns:a="http://schemas.openxmlformats.org/drawingml/2006/main">
+            <a:off x="704850" y="1314450"/>
+            <a:ext cx="8572500" cy="247650"/>
+          </a:xfrm>
+          <a:prstGeom xmlns:a="http://schemas.openxmlformats.org/drawingml/2006/main" prst="rect">
+            <a:avLst/>
+          </a:prstGeom>
+          <a:noFill xmlns:a="http://schemas.openxmlformats.org/drawingml/2006/main"/>
+          <a:ln xmlns:a="http://schemas.openxmlformats.org/drawingml/2006/main" w="0">
+            <a:noFill/>
+            <a:prstDash val="solid"/>
+          </a:ln>
+        </p:spPr>
+        <p:txBody>
+          <a:bodyPr xmlns:a="http://schemas.openxmlformats.org/drawingml/2006/main"/>
+          <a:lstStyle xmlns:a="http://schemas.openxmlformats.org/drawingml/2006/main"/>
+          <a:p xmlns:a="http://schemas.openxmlformats.org/drawingml/2006/main">
+            <a:pPr algn="l">
+              <a:buNone/>
+              <a:defRPr sz="1350" b="0">
+                <a:solidFill>
+                  <a:srgbClr val="45556C"/>
+                </a:solidFill>
+              </a:defRPr>
+            </a:pPr>
+            <a:r>
+              <a:rPr sz="1350" b="0">
+                <a:solidFill>
+                  <a:srgbClr val="45556C"/>
+                </a:solidFill>
+              </a:rPr>
+              <a:t>建立运行上下文：tiling、GM/UB、量化 payload、CCU 双缓冲</a:t>
+            </a:r>
+          </a:p>
+        </p:txBody>
+      </p:sp>
+      <p:sp>
+        <p:nvSpPr>
+          <p:cNvPr id="4" name="">
+            <a:extLst xmlns:a="http://schemas.openxmlformats.org/drawingml/2006/main">
+              <a:ext uri="{FF2B5EF4-FFF2-40B4-BE49-F238E27FC236}">
+                <a16:creationId xmlns:a16="http://schemas.microsoft.com/office/drawing/2014/main" id="{BDD2C82C-DA01-45AF-9976-0B0ED29CAF92}"/>
+              </a:ext>
+            </a:extLst>
+          </p:cNvPr>
+          <p:cNvSpPr>
+            <a:spLocks xmlns:a="http://schemas.openxmlformats.org/drawingml/2006/main" noGrp="1"/>
+          </p:cNvSpPr>
+          <p:nvPr/>
+        </p:nvSpPr>
+        <p:spPr>
+          <a:xfrm xmlns:a="http://schemas.openxmlformats.org/drawingml/2006/main">
+            <a:off x="11049000" y="438150"/>
+            <a:ext cx="457200" cy="228600"/>
+          </a:xfrm>
+          <a:prstGeom xmlns:a="http://schemas.openxmlformats.org/drawingml/2006/main" prst="rect">
+            <a:avLst/>
+          </a:prstGeom>
+          <a:noFill xmlns:a="http://schemas.openxmlformats.org/drawingml/2006/main"/>
+          <a:ln xmlns:a="http://schemas.openxmlformats.org/drawingml/2006/main" w="0">
+            <a:noFill/>
+            <a:prstDash val="solid"/>
+          </a:ln>
+        </p:spPr>
+        <p:txBody>
+          <a:bodyPr xmlns:a="http://schemas.openxmlformats.org/drawingml/2006/main"/>
+          <a:lstStyle xmlns:a="http://schemas.openxmlformats.org/drawingml/2006/main"/>
+          <a:p xmlns:a="http://schemas.openxmlformats.org/drawingml/2006/main">
+            <a:pPr algn="r">
+              <a:buNone/>
+              <a:defRPr sz="1200" b="1">
+                <a:solidFill>
+                  <a:srgbClr val="90A1B9"/>
+                </a:solidFill>
+              </a:defRPr>
+            </a:pPr>
+            <a:r>
+              <a:rPr sz="1200" b="1">
+                <a:solidFill>
+                  <a:srgbClr val="90A1B9"/>
+                </a:solidFill>
+              </a:rPr>
+              <a:t>11</a:t>
+            </a:r>
+          </a:p>
+        </p:txBody>
+      </p:sp>
+      <p:sp>
+        <p:nvSpPr>
+          <p:cNvPr id="5" name="">
+            <a:extLst xmlns:a="http://schemas.openxmlformats.org/drawingml/2006/main">
+              <a:ext uri="{FF2B5EF4-FFF2-40B4-BE49-F238E27FC236}">
+                <a16:creationId xmlns:a16="http://schemas.microsoft.com/office/drawing/2014/main" id="{A2032561-D347-4C3B-B13E-79B7C0D81714}"/>
+              </a:ext>
+            </a:extLst>
+          </p:cNvPr>
+          <p:cNvSpPr>
+            <a:spLocks xmlns:a="http://schemas.openxmlformats.org/drawingml/2006/main" noGrp="1"/>
+          </p:cNvSpPr>
+          <p:nvPr/>
+        </p:nvSpPr>
+        <p:spPr>
+          <a:xfrm xmlns:a="http://schemas.openxmlformats.org/drawingml/2006/main">
+            <a:off x="704850" y="1866900"/>
+            <a:ext cx="2381250" cy="1352550"/>
+          </a:xfrm>
+          <a:prstGeom xmlns:a="http://schemas.openxmlformats.org/drawingml/2006/main" prst="roundRect">
+            <a:avLst>
+              <a:gd name="adj" fmla="val 5634"/>
+            </a:avLst>
+          </a:prstGeom>
+          <a:solidFill xmlns:a="http://schemas.openxmlformats.org/drawingml/2006/main">
+            <a:srgbClr val="FFFFFF"/>
+          </a:solidFill>
+          <a:ln xmlns:a="http://schemas.openxmlformats.org/drawingml/2006/main" w="9525">
+            <a:solidFill>
+              <a:srgbClr val="E2E8F0"/>
+            </a:solidFill>
+            <a:prstDash val="solid"/>
+          </a:ln>
+        </p:spPr>
+      </p:sp>
+      <p:sp>
+        <p:nvSpPr>
+          <p:cNvPr id="6" name="">
+            <a:extLst xmlns:a="http://schemas.openxmlformats.org/drawingml/2006/main">
+              <a:ext uri="{FF2B5EF4-FFF2-40B4-BE49-F238E27FC236}">
+                <a16:creationId xmlns:a16="http://schemas.microsoft.com/office/drawing/2014/main" id="{13D94ADA-D226-47B7-BC25-F554F8780057}"/>
+              </a:ext>
+            </a:extLst>
+          </p:cNvPr>
+          <p:cNvSpPr>
+            <a:spLocks xmlns:a="http://schemas.openxmlformats.org/drawingml/2006/main" noGrp="1"/>
+          </p:cNvSpPr>
+          <p:nvPr/>
+        </p:nvSpPr>
+        <p:spPr>
+          <a:xfrm xmlns:a="http://schemas.openxmlformats.org/drawingml/2006/main">
+            <a:off x="876300" y="2038350"/>
+            <a:ext cx="819150" cy="285750"/>
+          </a:xfrm>
+          <a:prstGeom xmlns:a="http://schemas.openxmlformats.org/drawingml/2006/main" prst="roundRect">
+            <a:avLst>
+              <a:gd name="adj" fmla="val 26667"/>
+            </a:avLst>
+          </a:prstGeom>
+          <a:solidFill xmlns:a="http://schemas.openxmlformats.org/drawingml/2006/main">
+            <a:srgbClr val="2563EB"/>
+          </a:solidFill>
+          <a:ln xmlns:a="http://schemas.openxmlformats.org/drawingml/2006/main" w="0">
+            <a:solidFill>
+              <a:srgbClr val="2563EB"/>
+            </a:solidFill>
+            <a:prstDash val="solid"/>
+          </a:ln>
+        </p:spPr>
+      </p:sp>
+      <p:sp>
+        <p:nvSpPr>
+          <p:cNvPr id="7" name="">
+            <a:extLst xmlns:a="http://schemas.openxmlformats.org/drawingml/2006/main">
+              <a:ext uri="{FF2B5EF4-FFF2-40B4-BE49-F238E27FC236}">
+                <a16:creationId xmlns:a16="http://schemas.microsoft.com/office/drawing/2014/main" id="{3F72FF70-0BD6-457B-BB82-1D7ACB67D924}"/>
+              </a:ext>
+            </a:extLst>
+          </p:cNvPr>
+          <p:cNvSpPr>
+            <a:spLocks xmlns:a="http://schemas.openxmlformats.org/drawingml/2006/main" noGrp="1"/>
+          </p:cNvSpPr>
+          <p:nvPr/>
+        </p:nvSpPr>
+        <p:spPr>
+          <a:xfrm xmlns:a="http://schemas.openxmlformats.org/drawingml/2006/main">
+            <a:off x="952500" y="2085975"/>
+            <a:ext cx="666750" cy="228600"/>
+          </a:xfrm>
+          <a:prstGeom xmlns:a="http://schemas.openxmlformats.org/drawingml/2006/main" prst="rect">
+            <a:avLst/>
+          </a:prstGeom>
+          <a:noFill xmlns:a="http://schemas.openxmlformats.org/drawingml/2006/main"/>
+          <a:ln xmlns:a="http://schemas.openxmlformats.org/drawingml/2006/main" w="0">
+            <a:noFill/>
+            <a:prstDash val="solid"/>
+          </a:ln>
+        </p:spPr>
+        <p:txBody>
+          <a:bodyPr xmlns:a="http://schemas.openxmlformats.org/drawingml/2006/main"/>
+          <a:lstStyle xmlns:a="http://schemas.openxmlformats.org/drawingml/2006/main"/>
+          <a:p xmlns:a="http://schemas.openxmlformats.org/drawingml/2006/main">
+            <a:pPr algn="ctr">
+              <a:buNone/>
+              <a:defRPr sz="1200" b="1">
+                <a:solidFill>
+                  <a:srgbClr val="FFFFFF"/>
+                </a:solidFill>
+              </a:defRPr>
+            </a:pPr>
+            <a:r>
+              <a:rPr sz="1200" b="1">
+                <a:solidFill>
+                  <a:srgbClr val="FFFFFF"/>
+                </a:solidFill>
+              </a:rPr>
+              <a:t>Attrs</a:t>
+            </a:r>
+          </a:p>
+        </p:txBody>
+      </p:sp>
+      <p:sp>
+        <p:nvSpPr>
+          <p:cNvPr id="8" name="">
+            <a:extLst xmlns:a="http://schemas.openxmlformats.org/drawingml/2006/main">
+              <a:ext uri="{FF2B5EF4-FFF2-40B4-BE49-F238E27FC236}">
+                <a16:creationId xmlns:a16="http://schemas.microsoft.com/office/drawing/2014/main" id="{CA71BB61-B222-4891-8B4D-9E30DEED46D0}"/>
+              </a:ext>
+            </a:extLst>
+          </p:cNvPr>
+          <p:cNvSpPr>
+            <a:spLocks xmlns:a="http://schemas.openxmlformats.org/drawingml/2006/main" noGrp="1"/>
+          </p:cNvSpPr>
+          <p:nvPr/>
+        </p:nvSpPr>
+        <p:spPr>
+          <a:xfrm xmlns:a="http://schemas.openxmlformats.org/drawingml/2006/main">
+            <a:off x="876300" y="2419350"/>
+            <a:ext cx="2000250" cy="247650"/>
+          </a:xfrm>
+          <a:prstGeom xmlns:a="http://schemas.openxmlformats.org/drawingml/2006/main" prst="rect">
+            <a:avLst/>
+          </a:prstGeom>
+          <a:noFill xmlns:a="http://schemas.openxmlformats.org/drawingml/2006/main"/>
+          <a:ln xmlns:a="http://schemas.openxmlformats.org/drawingml/2006/main" w="0">
+            <a:noFill/>
+            <a:prstDash val="solid"/>
+          </a:ln>
+        </p:spPr>
+        <p:txBody>
+          <a:bodyPr xmlns:a="http://schemas.openxmlformats.org/drawingml/2006/main"/>
+          <a:lstStyle xmlns:a="http://schemas.openxmlformats.org/drawingml/2006/main"/>
+          <a:p xmlns:a="http://schemas.openxmlformats.org/drawingml/2006/main">
+            <a:pPr algn="l">
+              <a:buNone/>
+              <a:defRPr sz="1650" b="1">
+                <a:solidFill>
+                  <a:srgbClr val="020618"/>
+                </a:solidFill>
+              </a:defRPr>
+            </a:pPr>
+            <a:r>
+              <a:rPr sz="1650" b="1">
+                <a:solidFill>
+                  <a:srgbClr val="020618"/>
+                </a:solidFill>
+              </a:rPr>
+              <a:t>拓扑与规模</a:t>
+            </a:r>
+          </a:p>
+        </p:txBody>
+      </p:sp>
+      <p:sp>
+        <p:nvSpPr>
+          <p:cNvPr id="9" name="">
+            <a:extLst xmlns:a="http://schemas.openxmlformats.org/drawingml/2006/main">
+              <a:ext uri="{FF2B5EF4-FFF2-40B4-BE49-F238E27FC236}">
+                <a16:creationId xmlns:a16="http://schemas.microsoft.com/office/drawing/2014/main" id="{BFCFD283-B0E8-4EF9-9A84-1D506AAD375C}"/>
+              </a:ext>
+            </a:extLst>
+          </p:cNvPr>
+          <p:cNvSpPr>
+            <a:spLocks xmlns:a="http://schemas.openxmlformats.org/drawingml/2006/main" noGrp="1"/>
+          </p:cNvSpPr>
+          <p:nvPr/>
+        </p:nvSpPr>
+        <p:spPr>
+          <a:xfrm xmlns:a="http://schemas.openxmlformats.org/drawingml/2006/main">
+            <a:off x="876300" y="2762250"/>
+            <a:ext cx="2000250" cy="361950"/>
+          </a:xfrm>
+          <a:prstGeom xmlns:a="http://schemas.openxmlformats.org/drawingml/2006/main" prst="rect">
+            <a:avLst/>
+          </a:prstGeom>
+          <a:noFill xmlns:a="http://schemas.openxmlformats.org/drawingml/2006/main"/>
+          <a:ln xmlns:a="http://schemas.openxmlformats.org/drawingml/2006/main" w="0">
+            <a:noFill/>
+            <a:prstDash val="solid"/>
+          </a:ln>
+        </p:spPr>
+        <p:txBody>
+          <a:bodyPr xmlns:a="http://schemas.openxmlformats.org/drawingml/2006/main"/>
+          <a:lstStyle xmlns:a="http://schemas.openxmlformats.org/drawingml/2006/main"/>
+          <a:p xmlns:a="http://schemas.openxmlformats.org/drawingml/2006/main">
+            <a:pPr algn="l">
+              <a:buNone/>
+              <a:defRPr sz="1200" b="0">
+                <a:solidFill>
+                  <a:srgbClr val="45556C"/>
+                </a:solidFill>
+              </a:defRPr>
+            </a:pPr>
+            <a:r>
+              <a:rPr sz="1200" b="0">
+                <a:solidFill>
+                  <a:srgbClr val="45556C"/>
+                </a:solidFill>
+              </a:rPr>
+              <a:t>bs/h/k、EP、expert</a:t>
+            </a:r>
+          </a:p>
+          <a:p xmlns:a="http://schemas.openxmlformats.org/drawingml/2006/main">
+            <a:pPr algn="l">
+              <a:buNone/>
+              <a:defRPr sz="1200" b="0">
+                <a:solidFill>
+                  <a:srgbClr val="45556C"/>
+                </a:solidFill>
+              </a:defRPr>
+            </a:pPr>
+            <a:r>
+              <a:rPr sz="1200" b="0">
+                <a:solidFill>
+                  <a:srgbClr val="45556C"/>
+                </a:solidFill>
+              </a:rPr>
+              <a:t>localExpertNum</a:t>
+            </a:r>
+          </a:p>
+          <a:p xmlns:a="http://schemas.openxmlformats.org/drawingml/2006/main">
+            <a:pPr algn="l">
+              <a:buNone/>
+              <a:defRPr sz="1200" b="0">
+                <a:solidFill>
+                  <a:srgbClr val="45556C"/>
+                </a:solidFill>
+              </a:defRPr>
+            </a:pPr>
+            <a:r>
+              <a:rPr sz="1200" b="0">
+                <a:solidFill>
+                  <a:srgbClr val="45556C"/>
+                </a:solidFill>
+              </a:rPr>
+              <a:t>AIV 分工</a:t>
+            </a:r>
+          </a:p>
+        </p:txBody>
+      </p:sp>
+      <p:sp>
+        <p:nvSpPr>
+          <p:cNvPr id="10" name="">
+            <a:extLst xmlns:a="http://schemas.openxmlformats.org/drawingml/2006/main">
+              <a:ext uri="{FF2B5EF4-FFF2-40B4-BE49-F238E27FC236}">
+                <a16:creationId xmlns:a16="http://schemas.microsoft.com/office/drawing/2014/main" id="{53D6E89F-E2CF-4601-82A6-C68C3BA3A974}"/>
+              </a:ext>
+            </a:extLst>
+          </p:cNvPr>
+          <p:cNvSpPr>
+            <a:spLocks xmlns:a="http://schemas.openxmlformats.org/drawingml/2006/main" noGrp="1"/>
+          </p:cNvSpPr>
+          <p:nvPr/>
+        </p:nvSpPr>
+        <p:spPr>
+          <a:xfrm xmlns:a="http://schemas.openxmlformats.org/drawingml/2006/main">
+            <a:off x="3209925" y="2438400"/>
+            <a:ext cx="400050" cy="247650"/>
+          </a:xfrm>
+          <a:prstGeom xmlns:a="http://schemas.openxmlformats.org/drawingml/2006/main" prst="rightArrow">
+            <a:avLst/>
+          </a:prstGeom>
+          <a:solidFill xmlns:a="http://schemas.openxmlformats.org/drawingml/2006/main">
+            <a:srgbClr val="CAD5E2"/>
+          </a:solidFill>
+          <a:ln xmlns:a="http://schemas.openxmlformats.org/drawingml/2006/main" w="0">
+            <a:solidFill>
+              <a:srgbClr val="CAD5E2"/>
+            </a:solidFill>
+            <a:prstDash val="solid"/>
+          </a:ln>
+        </p:spPr>
+      </p:sp>
+      <p:sp>
+        <p:nvSpPr>
+          <p:cNvPr id="11" name="">
+            <a:extLst xmlns:a="http://schemas.openxmlformats.org/drawingml/2006/main">
+              <a:ext uri="{FF2B5EF4-FFF2-40B4-BE49-F238E27FC236}">
+                <a16:creationId xmlns:a16="http://schemas.microsoft.com/office/drawing/2014/main" id="{56E07B78-1EF9-4F98-81A7-E49E0C3C8FD3}"/>
+              </a:ext>
+            </a:extLst>
+          </p:cNvPr>
+          <p:cNvSpPr>
+            <a:spLocks xmlns:a="http://schemas.openxmlformats.org/drawingml/2006/main" noGrp="1"/>
+          </p:cNvSpPr>
+          <p:nvPr/>
+        </p:nvSpPr>
+        <p:spPr>
+          <a:xfrm xmlns:a="http://schemas.openxmlformats.org/drawingml/2006/main">
+            <a:off x="3733800" y="1866900"/>
+            <a:ext cx="2381250" cy="1352550"/>
+          </a:xfrm>
+          <a:prstGeom xmlns:a="http://schemas.openxmlformats.org/drawingml/2006/main" prst="roundRect">
+            <a:avLst>
+              <a:gd name="adj" fmla="val 5634"/>
+            </a:avLst>
+          </a:prstGeom>
+          <a:solidFill xmlns:a="http://schemas.openxmlformats.org/drawingml/2006/main">
+            <a:srgbClr val="FFFFFF"/>
+          </a:solidFill>
+          <a:ln xmlns:a="http://schemas.openxmlformats.org/drawingml/2006/main" w="9525">
+            <a:solidFill>
+              <a:srgbClr val="E2E8F0"/>
+            </a:solidFill>
+            <a:prstDash val="solid"/>
+          </a:ln>
+        </p:spPr>
+      </p:sp>
+      <p:sp>
+        <p:nvSpPr>
+          <p:cNvPr id="12" name="">
+            <a:extLst xmlns:a="http://schemas.openxmlformats.org/drawingml/2006/main">
+              <a:ext uri="{FF2B5EF4-FFF2-40B4-BE49-F238E27FC236}">
+                <a16:creationId xmlns:a16="http://schemas.microsoft.com/office/drawing/2014/main" id="{BDC51EBA-7812-4DA5-BB9C-0B3B559DEEB9}"/>
+              </a:ext>
+            </a:extLst>
+          </p:cNvPr>
+          <p:cNvSpPr>
+            <a:spLocks xmlns:a="http://schemas.openxmlformats.org/drawingml/2006/main" noGrp="1"/>
+          </p:cNvSpPr>
+          <p:nvPr/>
+        </p:nvSpPr>
+        <p:spPr>
+          <a:xfrm xmlns:a="http://schemas.openxmlformats.org/drawingml/2006/main">
+            <a:off x="3905250" y="2038350"/>
+            <a:ext cx="819150" cy="285750"/>
+          </a:xfrm>
+          <a:prstGeom xmlns:a="http://schemas.openxmlformats.org/drawingml/2006/main" prst="roundRect">
+            <a:avLst>
+              <a:gd name="adj" fmla="val 26667"/>
+            </a:avLst>
+          </a:prstGeom>
+          <a:solidFill xmlns:a="http://schemas.openxmlformats.org/drawingml/2006/main">
+            <a:srgbClr val="0891B2"/>
+          </a:solidFill>
+          <a:ln xmlns:a="http://schemas.openxmlformats.org/drawingml/2006/main" w="0">
+            <a:solidFill>
+              <a:srgbClr val="0891B2"/>
+            </a:solidFill>
+            <a:prstDash val="solid"/>
+          </a:ln>
+        </p:spPr>
+      </p:sp>
+      <p:sp>
+        <p:nvSpPr>
+          <p:cNvPr id="13" name="">
+            <a:extLst xmlns:a="http://schemas.openxmlformats.org/drawingml/2006/main">
+              <a:ext uri="{FF2B5EF4-FFF2-40B4-BE49-F238E27FC236}">
+                <a16:creationId xmlns:a16="http://schemas.microsoft.com/office/drawing/2014/main" id="{65D2D298-09AC-47DF-B231-BB3AE5D73292}"/>
+              </a:ext>
+            </a:extLst>
+          </p:cNvPr>
+          <p:cNvSpPr>
+            <a:spLocks xmlns:a="http://schemas.openxmlformats.org/drawingml/2006/main" noGrp="1"/>
+          </p:cNvSpPr>
+          <p:nvPr/>
+        </p:nvSpPr>
+        <p:spPr>
+          <a:xfrm xmlns:a="http://schemas.openxmlformats.org/drawingml/2006/main">
+            <a:off x="3981450" y="2085975"/>
+            <a:ext cx="666750" cy="228600"/>
+          </a:xfrm>
+          <a:prstGeom xmlns:a="http://schemas.openxmlformats.org/drawingml/2006/main" prst="rect">
+            <a:avLst/>
+          </a:prstGeom>
+          <a:noFill xmlns:a="http://schemas.openxmlformats.org/drawingml/2006/main"/>
+          <a:ln xmlns:a="http://schemas.openxmlformats.org/drawingml/2006/main" w="0">
+            <a:noFill/>
+            <a:prstDash val="solid"/>
+          </a:ln>
+        </p:spPr>
+        <p:txBody>
+          <a:bodyPr xmlns:a="http://schemas.openxmlformats.org/drawingml/2006/main"/>
+          <a:lstStyle xmlns:a="http://schemas.openxmlformats.org/drawingml/2006/main"/>
+          <a:p xmlns:a="http://schemas.openxmlformats.org/drawingml/2006/main">
+            <a:pPr algn="ctr">
+              <a:buNone/>
+              <a:defRPr sz="1200" b="1">
+                <a:solidFill>
+                  <a:srgbClr val="FFFFFF"/>
+                </a:solidFill>
+              </a:defRPr>
+            </a:pPr>
+            <a:r>
+              <a:rPr sz="1200" b="1">
+                <a:solidFill>
+                  <a:srgbClr val="FFFFFF"/>
+                </a:solidFill>
+              </a:rPr>
+              <a:t>GM/UB</a:t>
+            </a:r>
+          </a:p>
+        </p:txBody>
+      </p:sp>
+      <p:sp>
+        <p:nvSpPr>
+          <p:cNvPr id="14" name="">
+            <a:extLst xmlns:a="http://schemas.openxmlformats.org/drawingml/2006/main">
+              <a:ext uri="{FF2B5EF4-FFF2-40B4-BE49-F238E27FC236}">
+                <a16:creationId xmlns:a16="http://schemas.microsoft.com/office/drawing/2014/main" id="{873928D3-DF4A-447F-A7E9-3947BC95BB69}"/>
+              </a:ext>
+            </a:extLst>
+          </p:cNvPr>
+          <p:cNvSpPr>
+            <a:spLocks xmlns:a="http://schemas.openxmlformats.org/drawingml/2006/main" noGrp="1"/>
+          </p:cNvSpPr>
+          <p:nvPr/>
+        </p:nvSpPr>
+        <p:spPr>
+          <a:xfrm xmlns:a="http://schemas.openxmlformats.org/drawingml/2006/main">
+            <a:off x="3905250" y="2419350"/>
+            <a:ext cx="2000250" cy="247650"/>
+          </a:xfrm>
+          <a:prstGeom xmlns:a="http://schemas.openxmlformats.org/drawingml/2006/main" prst="rect">
+            <a:avLst/>
+          </a:prstGeom>
+          <a:noFill xmlns:a="http://schemas.openxmlformats.org/drawingml/2006/main"/>
+          <a:ln xmlns:a="http://schemas.openxmlformats.org/drawingml/2006/main" w="0">
+            <a:noFill/>
+            <a:prstDash val="solid"/>
+          </a:ln>
+        </p:spPr>
+        <p:txBody>
+          <a:bodyPr xmlns:a="http://schemas.openxmlformats.org/drawingml/2006/main"/>
+          <a:lstStyle xmlns:a="http://schemas.openxmlformats.org/drawingml/2006/main"/>
+          <a:p xmlns:a="http://schemas.openxmlformats.org/drawingml/2006/main">
+            <a:pPr algn="l">
+              <a:buNone/>
+              <a:defRPr sz="1650" b="1">
+                <a:solidFill>
+                  <a:srgbClr val="020618"/>
+                </a:solidFill>
+              </a:defRPr>
+            </a:pPr>
+            <a:r>
+              <a:rPr sz="1650" b="1">
+                <a:solidFill>
+                  <a:srgbClr val="020618"/>
+                </a:solidFill>
+              </a:rPr>
+              <a:t>Tensor 绑定</a:t>
+            </a:r>
+          </a:p>
+        </p:txBody>
+      </p:sp>
+      <p:sp>
+        <p:nvSpPr>
+          <p:cNvPr id="15" name="">
+            <a:extLst xmlns:a="http://schemas.openxmlformats.org/drawingml/2006/main">
+              <a:ext uri="{FF2B5EF4-FFF2-40B4-BE49-F238E27FC236}">
+                <a16:creationId xmlns:a16="http://schemas.microsoft.com/office/drawing/2014/main" id="{635DC4C1-4B5B-4401-A53F-1C1C1B88581B}"/>
+              </a:ext>
+            </a:extLst>
+          </p:cNvPr>
+          <p:cNvSpPr>
+            <a:spLocks xmlns:a="http://schemas.openxmlformats.org/drawingml/2006/main" noGrp="1"/>
+          </p:cNvSpPr>
+          <p:nvPr/>
+        </p:nvSpPr>
+        <p:spPr>
+          <a:xfrm xmlns:a="http://schemas.openxmlformats.org/drawingml/2006/main">
+            <a:off x="3905250" y="2762250"/>
+            <a:ext cx="2000250" cy="361950"/>
+          </a:xfrm>
+          <a:prstGeom xmlns:a="http://schemas.openxmlformats.org/drawingml/2006/main" prst="rect">
+            <a:avLst/>
+          </a:prstGeom>
+          <a:noFill xmlns:a="http://schemas.openxmlformats.org/drawingml/2006/main"/>
+          <a:ln xmlns:a="http://schemas.openxmlformats.org/drawingml/2006/main" w="0">
+            <a:noFill/>
+            <a:prstDash val="solid"/>
+          </a:ln>
+        </p:spPr>
+        <p:txBody>
+          <a:bodyPr xmlns:a="http://schemas.openxmlformats.org/drawingml/2006/main"/>
+          <a:lstStyle xmlns:a="http://schemas.openxmlformats.org/drawingml/2006/main"/>
+          <a:p xmlns:a="http://schemas.openxmlformats.org/drawingml/2006/main">
+            <a:pPr algn="l">
+              <a:buNone/>
+              <a:defRPr sz="1200" b="0">
+                <a:solidFill>
+                  <a:srgbClr val="45556C"/>
+                </a:solidFill>
+              </a:defRPr>
+            </a:pPr>
+            <a:r>
+              <a:rPr sz="1200" b="0">
+                <a:solidFill>
+                  <a:srgbClr val="45556C"/>
+                </a:solidFill>
+              </a:rPr>
+              <a:t>x / expert_ids</a:t>
+            </a:r>
+          </a:p>
+          <a:p xmlns:a="http://schemas.openxmlformats.org/drawingml/2006/main">
+            <a:pPr algn="l">
+              <a:buNone/>
+              <a:defRPr sz="1200" b="0">
+                <a:solidFill>
+                  <a:srgbClr val="45556C"/>
+                </a:solidFill>
+              </a:defRPr>
+            </a:pPr>
+            <a:r>
+              <a:rPr sz="1200" b="0">
+                <a:solidFill>
+                  <a:srgbClr val="45556C"/>
+                </a:solidFill>
+              </a:rPr>
+              <a:t>expand_x / assist_info</a:t>
+            </a:r>
+          </a:p>
+          <a:p xmlns:a="http://schemas.openxmlformats.org/drawingml/2006/main">
+            <a:pPr algn="l">
+              <a:buNone/>
+              <a:defRPr sz="1200" b="0">
+                <a:solidFill>
+                  <a:srgbClr val="45556C"/>
+                </a:solidFill>
+              </a:defRPr>
+            </a:pPr>
+            <a:r>
+              <a:rPr sz="1200" b="0">
+                <a:solidFill>
+                  <a:srgbClr val="45556C"/>
+                </a:solidFill>
+              </a:rPr>
+              <a:t>sort / hist / cumsum</a:t>
+            </a:r>
+          </a:p>
+        </p:txBody>
+      </p:sp>
+      <p:sp>
+        <p:nvSpPr>
+          <p:cNvPr id="16" name="">
+            <a:extLst xmlns:a="http://schemas.openxmlformats.org/drawingml/2006/main">
+              <a:ext uri="{FF2B5EF4-FFF2-40B4-BE49-F238E27FC236}">
+                <a16:creationId xmlns:a16="http://schemas.microsoft.com/office/drawing/2014/main" id="{23E377E4-85CB-4824-AE68-8AC861269E52}"/>
+              </a:ext>
+            </a:extLst>
+          </p:cNvPr>
+          <p:cNvSpPr>
+            <a:spLocks xmlns:a="http://schemas.openxmlformats.org/drawingml/2006/main" noGrp="1"/>
+          </p:cNvSpPr>
+          <p:nvPr/>
+        </p:nvSpPr>
+        <p:spPr>
+          <a:xfrm xmlns:a="http://schemas.openxmlformats.org/drawingml/2006/main">
+            <a:off x="6238875" y="2438400"/>
+            <a:ext cx="400050" cy="247650"/>
+          </a:xfrm>
+          <a:prstGeom xmlns:a="http://schemas.openxmlformats.org/drawingml/2006/main" prst="rightArrow">
+            <a:avLst/>
+          </a:prstGeom>
+          <a:solidFill xmlns:a="http://schemas.openxmlformats.org/drawingml/2006/main">
+            <a:srgbClr val="CAD5E2"/>
+          </a:solidFill>
+          <a:ln xmlns:a="http://schemas.openxmlformats.org/drawingml/2006/main" w="0">
+            <a:solidFill>
+              <a:srgbClr val="CAD5E2"/>
+            </a:solidFill>
+            <a:prstDash val="solid"/>
+          </a:ln>
+        </p:spPr>
+      </p:sp>
+      <p:sp>
+        <p:nvSpPr>
+          <p:cNvPr id="17" name="">
+            <a:extLst xmlns:a="http://schemas.openxmlformats.org/drawingml/2006/main">
+              <a:ext uri="{FF2B5EF4-FFF2-40B4-BE49-F238E27FC236}">
+                <a16:creationId xmlns:a16="http://schemas.microsoft.com/office/drawing/2014/main" id="{4BC85870-7724-4D6B-A18F-1445A963A619}"/>
+              </a:ext>
+            </a:extLst>
+          </p:cNvPr>
+          <p:cNvSpPr>
+            <a:spLocks xmlns:a="http://schemas.openxmlformats.org/drawingml/2006/main" noGrp="1"/>
+          </p:cNvSpPr>
+          <p:nvPr/>
+        </p:nvSpPr>
+        <p:spPr>
+          <a:xfrm xmlns:a="http://schemas.openxmlformats.org/drawingml/2006/main">
+            <a:off x="6762750" y="1866900"/>
+            <a:ext cx="2381250" cy="1352550"/>
+          </a:xfrm>
+          <a:prstGeom xmlns:a="http://schemas.openxmlformats.org/drawingml/2006/main" prst="roundRect">
+            <a:avLst>
+              <a:gd name="adj" fmla="val 5634"/>
+            </a:avLst>
+          </a:prstGeom>
+          <a:solidFill xmlns:a="http://schemas.openxmlformats.org/drawingml/2006/main">
+            <a:srgbClr val="FFFFFF"/>
+          </a:solidFill>
+          <a:ln xmlns:a="http://schemas.openxmlformats.org/drawingml/2006/main" w="9525">
+            <a:solidFill>
+              <a:srgbClr val="E2E8F0"/>
+            </a:solidFill>
+            <a:prstDash val="solid"/>
+          </a:ln>
+        </p:spPr>
+      </p:sp>
+      <p:sp>
+        <p:nvSpPr>
+          <p:cNvPr id="18" name="">
+            <a:extLst xmlns:a="http://schemas.openxmlformats.org/drawingml/2006/main">
+              <a:ext uri="{FF2B5EF4-FFF2-40B4-BE49-F238E27FC236}">
+                <a16:creationId xmlns:a16="http://schemas.microsoft.com/office/drawing/2014/main" id="{45D92D78-0C29-4505-9CFE-6C816AEB47E9}"/>
+              </a:ext>
+            </a:extLst>
+          </p:cNvPr>
+          <p:cNvSpPr>
+            <a:spLocks xmlns:a="http://schemas.openxmlformats.org/drawingml/2006/main" noGrp="1"/>
+          </p:cNvSpPr>
+          <p:nvPr/>
+        </p:nvSpPr>
+        <p:spPr>
+          <a:xfrm xmlns:a="http://schemas.openxmlformats.org/drawingml/2006/main">
+            <a:off x="6934200" y="2038350"/>
+            <a:ext cx="819150" cy="285750"/>
+          </a:xfrm>
+          <a:prstGeom xmlns:a="http://schemas.openxmlformats.org/drawingml/2006/main" prst="roundRect">
+            <a:avLst>
+              <a:gd name="adj" fmla="val 26667"/>
+            </a:avLst>
+          </a:prstGeom>
+          <a:solidFill xmlns:a="http://schemas.openxmlformats.org/drawingml/2006/main">
+            <a:srgbClr val="059669"/>
+          </a:solidFill>
+          <a:ln xmlns:a="http://schemas.openxmlformats.org/drawingml/2006/main" w="0">
+            <a:solidFill>
+              <a:srgbClr val="059669"/>
+            </a:solidFill>
+            <a:prstDash val="solid"/>
+          </a:ln>
+        </p:spPr>
+      </p:sp>
+      <p:sp>
+        <p:nvSpPr>
+          <p:cNvPr id="19" name="">
+            <a:extLst xmlns:a="http://schemas.openxmlformats.org/drawingml/2006/main">
+              <a:ext uri="{FF2B5EF4-FFF2-40B4-BE49-F238E27FC236}">
+                <a16:creationId xmlns:a16="http://schemas.microsoft.com/office/drawing/2014/main" id="{6780476C-6045-4786-91E4-4A68BDF363A1}"/>
+              </a:ext>
+            </a:extLst>
+          </p:cNvPr>
+          <p:cNvSpPr>
+            <a:spLocks xmlns:a="http://schemas.openxmlformats.org/drawingml/2006/main" noGrp="1"/>
+          </p:cNvSpPr>
+          <p:nvPr/>
+        </p:nvSpPr>
+        <p:spPr>
+          <a:xfrm xmlns:a="http://schemas.openxmlformats.org/drawingml/2006/main">
+            <a:off x="7010400" y="2085975"/>
+            <a:ext cx="666750" cy="228600"/>
+          </a:xfrm>
+          <a:prstGeom xmlns:a="http://schemas.openxmlformats.org/drawingml/2006/main" prst="rect">
+            <a:avLst/>
+          </a:prstGeom>
+          <a:noFill xmlns:a="http://schemas.openxmlformats.org/drawingml/2006/main"/>
+          <a:ln xmlns:a="http://schemas.openxmlformats.org/drawingml/2006/main" w="0">
+            <a:noFill/>
+            <a:prstDash val="solid"/>
+          </a:ln>
+        </p:spPr>
+        <p:txBody>
+          <a:bodyPr xmlns:a="http://schemas.openxmlformats.org/drawingml/2006/main"/>
+          <a:lstStyle xmlns:a="http://schemas.openxmlformats.org/drawingml/2006/main"/>
+          <a:p xmlns:a="http://schemas.openxmlformats.org/drawingml/2006/main">
+            <a:pPr algn="ctr">
+              <a:buNone/>
+              <a:defRPr sz="1200" b="1">
+                <a:solidFill>
+                  <a:srgbClr val="FFFFFF"/>
+                </a:solidFill>
+              </a:defRPr>
+            </a:pPr>
+            <a:r>
+              <a:rPr sz="1200" b="1">
+                <a:solidFill>
+                  <a:srgbClr val="FFFFFF"/>
+                </a:solidFill>
+              </a:rPr>
+              <a:t>Quant</a:t>
+            </a:r>
+          </a:p>
+        </p:txBody>
+      </p:sp>
+      <p:sp>
+        <p:nvSpPr>
+          <p:cNvPr id="20" name="">
+            <a:extLst xmlns:a="http://schemas.openxmlformats.org/drawingml/2006/main">
+              <a:ext uri="{FF2B5EF4-FFF2-40B4-BE49-F238E27FC236}">
+                <a16:creationId xmlns:a16="http://schemas.microsoft.com/office/drawing/2014/main" id="{B79C110B-8FA7-4C67-AEAC-6F0264F5B06F}"/>
+              </a:ext>
+            </a:extLst>
+          </p:cNvPr>
+          <p:cNvSpPr>
+            <a:spLocks xmlns:a="http://schemas.openxmlformats.org/drawingml/2006/main" noGrp="1"/>
+          </p:cNvSpPr>
+          <p:nvPr/>
+        </p:nvSpPr>
+        <p:spPr>
+          <a:xfrm xmlns:a="http://schemas.openxmlformats.org/drawingml/2006/main">
+            <a:off x="6934200" y="2419350"/>
+            <a:ext cx="2000250" cy="247650"/>
+          </a:xfrm>
+          <a:prstGeom xmlns:a="http://schemas.openxmlformats.org/drawingml/2006/main" prst="rect">
+            <a:avLst/>
+          </a:prstGeom>
+          <a:noFill xmlns:a="http://schemas.openxmlformats.org/drawingml/2006/main"/>
+          <a:ln xmlns:a="http://schemas.openxmlformats.org/drawingml/2006/main" w="0">
+            <a:noFill/>
+            <a:prstDash val="solid"/>
+          </a:ln>
+        </p:spPr>
+        <p:txBody>
+          <a:bodyPr xmlns:a="http://schemas.openxmlformats.org/drawingml/2006/main"/>
+          <a:lstStyle xmlns:a="http://schemas.openxmlformats.org/drawingml/2006/main"/>
+          <a:p xmlns:a="http://schemas.openxmlformats.org/drawingml/2006/main">
+            <a:pPr algn="l">
+              <a:buNone/>
+              <a:defRPr sz="1650" b="1">
+                <a:solidFill>
+                  <a:srgbClr val="020618"/>
+                </a:solidFill>
+              </a:defRPr>
+            </a:pPr>
+            <a:r>
+              <a:rPr sz="1650" b="1">
+                <a:solidFill>
+                  <a:srgbClr val="020618"/>
+                </a:solidFill>
+              </a:rPr>
+              <a:t>payload 布局</a:t>
+            </a:r>
+          </a:p>
+        </p:txBody>
+      </p:sp>
+      <p:sp>
+        <p:nvSpPr>
+          <p:cNvPr id="21" name="">
+            <a:extLst xmlns:a="http://schemas.openxmlformats.org/drawingml/2006/main">
+              <a:ext uri="{FF2B5EF4-FFF2-40B4-BE49-F238E27FC236}">
+                <a16:creationId xmlns:a16="http://schemas.microsoft.com/office/drawing/2014/main" id="{4A743005-8C95-4223-84D8-CBC2862E3D18}"/>
+              </a:ext>
+            </a:extLst>
+          </p:cNvPr>
+          <p:cNvSpPr>
+            <a:spLocks xmlns:a="http://schemas.openxmlformats.org/drawingml/2006/main" noGrp="1"/>
+          </p:cNvSpPr>
+          <p:nvPr/>
+        </p:nvSpPr>
+        <p:spPr>
+          <a:xfrm xmlns:a="http://schemas.openxmlformats.org/drawingml/2006/main">
+            <a:off x="6934200" y="2762250"/>
+            <a:ext cx="2000250" cy="361950"/>
+          </a:xfrm>
+          <a:prstGeom xmlns:a="http://schemas.openxmlformats.org/drawingml/2006/main" prst="rect">
+            <a:avLst/>
+          </a:prstGeom>
+          <a:noFill xmlns:a="http://schemas.openxmlformats.org/drawingml/2006/main"/>
+          <a:ln xmlns:a="http://schemas.openxmlformats.org/drawingml/2006/main" w="0">
+            <a:noFill/>
+            <a:prstDash val="solid"/>
+          </a:ln>
+        </p:spPr>
+        <p:txBody>
+          <a:bodyPr xmlns:a="http://schemas.openxmlformats.org/drawingml/2006/main"/>
+          <a:lstStyle xmlns:a="http://schemas.openxmlformats.org/drawingml/2006/main"/>
+          <a:p xmlns:a="http://schemas.openxmlformats.org/drawingml/2006/main">
+            <a:pPr algn="l">
+              <a:buNone/>
+              <a:defRPr sz="1200" b="0">
+                <a:solidFill>
+                  <a:srgbClr val="45556C"/>
+                </a:solidFill>
+              </a:defRPr>
+            </a:pPr>
+            <a:r>
+              <a:rPr sz="1200" b="0">
+                <a:solidFill>
+                  <a:srgbClr val="45556C"/>
+                </a:solidFill>
+              </a:rPr>
+              <a:t>data + scale tail</a:t>
+            </a:r>
+          </a:p>
+          <a:p xmlns:a="http://schemas.openxmlformats.org/drawingml/2006/main">
+            <a:pPr algn="l">
+              <a:buNone/>
+              <a:defRPr sz="1200" b="0">
+                <a:solidFill>
+                  <a:srgbClr val="45556C"/>
+                </a:solidFill>
+              </a:defRPr>
+            </a:pPr>
+            <a:r>
+              <a:rPr sz="1200" b="0">
+                <a:solidFill>
+                  <a:srgbClr val="45556C"/>
+                </a:solidFill>
+              </a:rPr>
+              <a:t>Align512 通信步长</a:t>
+            </a:r>
+          </a:p>
+          <a:p xmlns:a="http://schemas.openxmlformats.org/drawingml/2006/main">
+            <a:pPr algn="l">
+              <a:buNone/>
+              <a:defRPr sz="1200" b="0">
+                <a:solidFill>
+                  <a:srgbClr val="45556C"/>
+                </a:solidFill>
+              </a:defRPr>
+            </a:pPr>
+            <a:r>
+              <a:rPr sz="1200" b="0">
+                <a:solidFill>
+                  <a:srgbClr val="45556C"/>
+                </a:solidFill>
+              </a:rPr>
+              <a:t>perRankDataSize</a:t>
+            </a:r>
+          </a:p>
+        </p:txBody>
+      </p:sp>
+      <p:sp>
+        <p:nvSpPr>
+          <p:cNvPr id="22" name="">
+            <a:extLst xmlns:a="http://schemas.openxmlformats.org/drawingml/2006/main">
+              <a:ext uri="{FF2B5EF4-FFF2-40B4-BE49-F238E27FC236}">
+                <a16:creationId xmlns:a16="http://schemas.microsoft.com/office/drawing/2014/main" id="{E2102AF7-68BE-4B58-94C3-25F6BF9070A0}"/>
+              </a:ext>
+            </a:extLst>
+          </p:cNvPr>
+          <p:cNvSpPr>
+            <a:spLocks xmlns:a="http://schemas.openxmlformats.org/drawingml/2006/main" noGrp="1"/>
+          </p:cNvSpPr>
+          <p:nvPr/>
+        </p:nvSpPr>
+        <p:spPr>
+          <a:xfrm xmlns:a="http://schemas.openxmlformats.org/drawingml/2006/main">
+            <a:off x="9267825" y="2438400"/>
+            <a:ext cx="400050" cy="247650"/>
+          </a:xfrm>
+          <a:prstGeom xmlns:a="http://schemas.openxmlformats.org/drawingml/2006/main" prst="rightArrow">
+            <a:avLst/>
+          </a:prstGeom>
+          <a:solidFill xmlns:a="http://schemas.openxmlformats.org/drawingml/2006/main">
+            <a:srgbClr val="CAD5E2"/>
+          </a:solidFill>
+          <a:ln xmlns:a="http://schemas.openxmlformats.org/drawingml/2006/main" w="0">
+            <a:solidFill>
+              <a:srgbClr val="CAD5E2"/>
+            </a:solidFill>
+            <a:prstDash val="solid"/>
+          </a:ln>
+        </p:spPr>
+      </p:sp>
+      <p:sp>
+        <p:nvSpPr>
+          <p:cNvPr id="23" name="">
+            <a:extLst xmlns:a="http://schemas.openxmlformats.org/drawingml/2006/main">
+              <a:ext uri="{FF2B5EF4-FFF2-40B4-BE49-F238E27FC236}">
+                <a16:creationId xmlns:a16="http://schemas.microsoft.com/office/drawing/2014/main" id="{8CB0EB0A-E65D-4E25-9449-FC6EB7293803}"/>
+              </a:ext>
+            </a:extLst>
+          </p:cNvPr>
+          <p:cNvSpPr>
+            <a:spLocks xmlns:a="http://schemas.openxmlformats.org/drawingml/2006/main" noGrp="1"/>
+          </p:cNvSpPr>
+          <p:nvPr/>
+        </p:nvSpPr>
+        <p:spPr>
+          <a:xfrm xmlns:a="http://schemas.openxmlformats.org/drawingml/2006/main">
+            <a:off x="9791700" y="1866900"/>
+            <a:ext cx="2381250" cy="1352550"/>
+          </a:xfrm>
+          <a:prstGeom xmlns:a="http://schemas.openxmlformats.org/drawingml/2006/main" prst="roundRect">
+            <a:avLst>
+              <a:gd name="adj" fmla="val 5634"/>
+            </a:avLst>
+          </a:prstGeom>
+          <a:solidFill xmlns:a="http://schemas.openxmlformats.org/drawingml/2006/main">
+            <a:srgbClr val="FFFFFF"/>
+          </a:solidFill>
+          <a:ln xmlns:a="http://schemas.openxmlformats.org/drawingml/2006/main" w="9525">
+            <a:solidFill>
+              <a:srgbClr val="E2E8F0"/>
+            </a:solidFill>
+            <a:prstDash val="solid"/>
+          </a:ln>
+        </p:spPr>
+      </p:sp>
+      <p:sp>
+        <p:nvSpPr>
+          <p:cNvPr id="24" name="">
+            <a:extLst xmlns:a="http://schemas.openxmlformats.org/drawingml/2006/main">
+              <a:ext uri="{FF2B5EF4-FFF2-40B4-BE49-F238E27FC236}">
+                <a16:creationId xmlns:a16="http://schemas.microsoft.com/office/drawing/2014/main" id="{80DB8122-DC00-4575-AD12-94E3875C3B82}"/>
+              </a:ext>
+            </a:extLst>
+          </p:cNvPr>
+          <p:cNvSpPr>
+            <a:spLocks xmlns:a="http://schemas.openxmlformats.org/drawingml/2006/main" noGrp="1"/>
+          </p:cNvSpPr>
+          <p:nvPr/>
+        </p:nvSpPr>
+        <p:spPr>
+          <a:xfrm xmlns:a="http://schemas.openxmlformats.org/drawingml/2006/main">
+            <a:off x="9963150" y="2038350"/>
+            <a:ext cx="819150" cy="285750"/>
+          </a:xfrm>
+          <a:prstGeom xmlns:a="http://schemas.openxmlformats.org/drawingml/2006/main" prst="roundRect">
+            <a:avLst>
+              <a:gd name="adj" fmla="val 26667"/>
+            </a:avLst>
+          </a:prstGeom>
+          <a:solidFill xmlns:a="http://schemas.openxmlformats.org/drawingml/2006/main">
+            <a:srgbClr val="D97706"/>
+          </a:solidFill>
+          <a:ln xmlns:a="http://schemas.openxmlformats.org/drawingml/2006/main" w="0">
+            <a:solidFill>
+              <a:srgbClr val="D97706"/>
+            </a:solidFill>
+            <a:prstDash val="solid"/>
+          </a:ln>
+        </p:spPr>
+      </p:sp>
+      <p:sp>
+        <p:nvSpPr>
+          <p:cNvPr id="25" name="">
+            <a:extLst xmlns:a="http://schemas.openxmlformats.org/drawingml/2006/main">
+              <a:ext uri="{FF2B5EF4-FFF2-40B4-BE49-F238E27FC236}">
+                <a16:creationId xmlns:a16="http://schemas.microsoft.com/office/drawing/2014/main" id="{FDA3866B-E9D7-413D-9A64-345B28C1C718}"/>
+              </a:ext>
+            </a:extLst>
+          </p:cNvPr>
+          <p:cNvSpPr>
+            <a:spLocks xmlns:a="http://schemas.openxmlformats.org/drawingml/2006/main" noGrp="1"/>
+          </p:cNvSpPr>
+          <p:nvPr/>
+        </p:nvSpPr>
+        <p:spPr>
+          <a:xfrm xmlns:a="http://schemas.openxmlformats.org/drawingml/2006/main">
+            <a:off x="10039350" y="2085975"/>
+            <a:ext cx="666750" cy="228600"/>
+          </a:xfrm>
+          <a:prstGeom xmlns:a="http://schemas.openxmlformats.org/drawingml/2006/main" prst="rect">
+            <a:avLst/>
+          </a:prstGeom>
+          <a:noFill xmlns:a="http://schemas.openxmlformats.org/drawingml/2006/main"/>
+          <a:ln xmlns:a="http://schemas.openxmlformats.org/drawingml/2006/main" w="0">
+            <a:noFill/>
+            <a:prstDash val="solid"/>
+          </a:ln>
+        </p:spPr>
+        <p:txBody>
+          <a:bodyPr xmlns:a="http://schemas.openxmlformats.org/drawingml/2006/main"/>
+          <a:lstStyle xmlns:a="http://schemas.openxmlformats.org/drawingml/2006/main"/>
+          <a:p xmlns:a="http://schemas.openxmlformats.org/drawingml/2006/main">
+            <a:pPr algn="ctr">
+              <a:buNone/>
+              <a:defRPr sz="1200" b="1">
+                <a:solidFill>
+                  <a:srgbClr val="FFFFFF"/>
+                </a:solidFill>
+              </a:defRPr>
+            </a:pPr>
+            <a:r>
+              <a:rPr sz="1200" b="1">
+                <a:solidFill>
+                  <a:srgbClr val="FFFFFF"/>
+                </a:solidFill>
+              </a:rPr>
+              <a:t>CCU</a:t>
+            </a:r>
+          </a:p>
+        </p:txBody>
+      </p:sp>
+      <p:sp>
+        <p:nvSpPr>
+          <p:cNvPr id="26" name="">
+            <a:extLst xmlns:a="http://schemas.openxmlformats.org/drawingml/2006/main">
+              <a:ext uri="{FF2B5EF4-FFF2-40B4-BE49-F238E27FC236}">
+                <a16:creationId xmlns:a16="http://schemas.microsoft.com/office/drawing/2014/main" id="{61BBF0BC-A5B5-43F4-B421-B67F744FF41F}"/>
+              </a:ext>
+            </a:extLst>
+          </p:cNvPr>
+          <p:cNvSpPr>
+            <a:spLocks xmlns:a="http://schemas.openxmlformats.org/drawingml/2006/main" noGrp="1"/>
+          </p:cNvSpPr>
+          <p:nvPr/>
+        </p:nvSpPr>
+        <p:spPr>
+          <a:xfrm xmlns:a="http://schemas.openxmlformats.org/drawingml/2006/main">
+            <a:off x="9963150" y="2419350"/>
+            <a:ext cx="2000250" cy="247650"/>
+          </a:xfrm>
+          <a:prstGeom xmlns:a="http://schemas.openxmlformats.org/drawingml/2006/main" prst="rect">
+            <a:avLst/>
+          </a:prstGeom>
+          <a:noFill xmlns:a="http://schemas.openxmlformats.org/drawingml/2006/main"/>
+          <a:ln xmlns:a="http://schemas.openxmlformats.org/drawingml/2006/main" w="0">
+            <a:noFill/>
+            <a:prstDash val="solid"/>
+          </a:ln>
+        </p:spPr>
+        <p:txBody>
+          <a:bodyPr xmlns:a="http://schemas.openxmlformats.org/drawingml/2006/main"/>
+          <a:lstStyle xmlns:a="http://schemas.openxmlformats.org/drawingml/2006/main"/>
+          <a:p xmlns:a="http://schemas.openxmlformats.org/drawingml/2006/main">
+            <a:pPr algn="l">
+              <a:buNone/>
+              <a:defRPr sz="1650" b="1">
+                <a:solidFill>
+                  <a:srgbClr val="020618"/>
+                </a:solidFill>
+              </a:defRPr>
+            </a:pPr>
+            <a:r>
+              <a:rPr sz="1650" b="1">
+                <a:solidFill>
+                  <a:srgbClr val="020618"/>
+                </a:solidFill>
+              </a:rPr>
+              <a:t>通信窗口</a:t>
+            </a:r>
+          </a:p>
+        </p:txBody>
+      </p:sp>
+      <p:sp>
+        <p:nvSpPr>
+          <p:cNvPr id="27" name="">
+            <a:extLst xmlns:a="http://schemas.openxmlformats.org/drawingml/2006/main">
+              <a:ext uri="{FF2B5EF4-FFF2-40B4-BE49-F238E27FC236}">
+                <a16:creationId xmlns:a16="http://schemas.microsoft.com/office/drawing/2014/main" id="{648103B1-9F9A-4C35-AD7A-FA619808CF1A}"/>
+              </a:ext>
+            </a:extLst>
+          </p:cNvPr>
+          <p:cNvSpPr>
+            <a:spLocks xmlns:a="http://schemas.openxmlformats.org/drawingml/2006/main" noGrp="1"/>
+          </p:cNvSpPr>
+          <p:nvPr/>
+        </p:nvSpPr>
+        <p:spPr>
+          <a:xfrm xmlns:a="http://schemas.openxmlformats.org/drawingml/2006/main">
+            <a:off x="9963150" y="2762250"/>
+            <a:ext cx="2000250" cy="361950"/>
+          </a:xfrm>
+          <a:prstGeom xmlns:a="http://schemas.openxmlformats.org/drawingml/2006/main" prst="rect">
+            <a:avLst/>
+          </a:prstGeom>
+          <a:noFill xmlns:a="http://schemas.openxmlformats.org/drawingml/2006/main"/>
+          <a:ln xmlns:a="http://schemas.openxmlformats.org/drawingml/2006/main" w="0">
+            <a:noFill/>
+            <a:prstDash val="solid"/>
+          </a:ln>
+        </p:spPr>
+        <p:txBody>
+          <a:bodyPr xmlns:a="http://schemas.openxmlformats.org/drawingml/2006/main"/>
+          <a:lstStyle xmlns:a="http://schemas.openxmlformats.org/drawingml/2006/main"/>
+          <a:p xmlns:a="http://schemas.openxmlformats.org/drawingml/2006/main">
+            <a:pPr algn="l">
+              <a:buNone/>
+              <a:defRPr sz="1200" b="0">
+                <a:solidFill>
+                  <a:srgbClr val="45556C"/>
+                </a:solidFill>
+              </a:defRPr>
+            </a:pPr>
+            <a:r>
+              <a:rPr sz="1200" b="0">
+                <a:solidFill>
+                  <a:srgbClr val="45556C"/>
+                </a:solidFill>
+              </a:rPr>
+              <a:t>sendBuf / size / offset</a:t>
+            </a:r>
+          </a:p>
+          <a:p xmlns:a="http://schemas.openxmlformats.org/drawingml/2006/main">
+            <a:pPr algn="l">
+              <a:buNone/>
+              <a:defRPr sz="1200" b="0">
+                <a:solidFill>
+                  <a:srgbClr val="45556C"/>
+                </a:solidFill>
+              </a:defRPr>
+            </a:pPr>
+            <a:r>
+              <a:rPr sz="1200" b="0">
+                <a:solidFill>
+                  <a:srgbClr val="45556C"/>
+                </a:solidFill>
+              </a:rPr>
+              <a:t>windowsOut 双缓冲</a:t>
+            </a:r>
+          </a:p>
+          <a:p xmlns:a="http://schemas.openxmlformats.org/drawingml/2006/main">
+            <a:pPr algn="l">
+              <a:buNone/>
+              <a:defRPr sz="1200" b="0">
+                <a:solidFill>
+                  <a:srgbClr val="45556C"/>
+                </a:solidFill>
+              </a:defRPr>
+            </a:pPr>
+            <a:r>
+              <a:rPr sz="1200" b="0">
+                <a:solidFill>
+                  <a:srgbClr val="45556C"/>
+                </a:solidFill>
+              </a:rPr>
+              <a:t>status 0/1 翻转</a:t>
+            </a:r>
+          </a:p>
+        </p:txBody>
+      </p:sp>
+      <p:sp>
+        <p:nvSpPr>
+          <p:cNvPr id="28" name="">
+            <a:extLst xmlns:a="http://schemas.openxmlformats.org/drawingml/2006/main">
+              <a:ext uri="{FF2B5EF4-FFF2-40B4-BE49-F238E27FC236}">
+                <a16:creationId xmlns:a16="http://schemas.microsoft.com/office/drawing/2014/main" id="{127859A3-9065-4586-AC8C-59A39C5A573F}"/>
+              </a:ext>
+            </a:extLst>
+          </p:cNvPr>
+          <p:cNvSpPr>
+            <a:spLocks xmlns:a="http://schemas.openxmlformats.org/drawingml/2006/main" noGrp="1"/>
+          </p:cNvSpPr>
+          <p:nvPr/>
+        </p:nvSpPr>
+        <p:spPr>
+          <a:xfrm xmlns:a="http://schemas.openxmlformats.org/drawingml/2006/main">
+            <a:off x="895350" y="3886200"/>
+            <a:ext cx="4857750" cy="1333500"/>
+          </a:xfrm>
+          <a:prstGeom xmlns:a="http://schemas.openxmlformats.org/drawingml/2006/main" prst="roundRect">
+            <a:avLst>
+              <a:gd name="adj" fmla="val 5714"/>
+            </a:avLst>
+          </a:prstGeom>
+          <a:solidFill xmlns:a="http://schemas.openxmlformats.org/drawingml/2006/main">
+            <a:srgbClr val="FFFFFF"/>
+          </a:solidFill>
+          <a:ln xmlns:a="http://schemas.openxmlformats.org/drawingml/2006/main" w="9525">
+            <a:solidFill>
+              <a:srgbClr val="E2E8F0"/>
+            </a:solidFill>
+            <a:prstDash val="solid"/>
+          </a:ln>
+        </p:spPr>
+      </p:sp>
+      <p:sp>
+        <p:nvSpPr>
+          <p:cNvPr id="29" name="">
+            <a:extLst xmlns:a="http://schemas.openxmlformats.org/drawingml/2006/main">
+              <a:ext uri="{FF2B5EF4-FFF2-40B4-BE49-F238E27FC236}">
+                <a16:creationId xmlns:a16="http://schemas.microsoft.com/office/drawing/2014/main" id="{E36499B5-418D-4C66-B34C-71DAC13E717F}"/>
+              </a:ext>
+            </a:extLst>
+          </p:cNvPr>
+          <p:cNvSpPr>
+            <a:spLocks xmlns:a="http://schemas.openxmlformats.org/drawingml/2006/main" noGrp="1"/>
+          </p:cNvSpPr>
+          <p:nvPr/>
+        </p:nvSpPr>
+        <p:spPr>
+          <a:xfrm xmlns:a="http://schemas.openxmlformats.org/drawingml/2006/main">
+            <a:off x="1162050" y="4133850"/>
+            <a:ext cx="1905000" cy="266700"/>
+          </a:xfrm>
+          <a:prstGeom xmlns:a="http://schemas.openxmlformats.org/drawingml/2006/main" prst="rect">
+            <a:avLst/>
+          </a:prstGeom>
+          <a:noFill xmlns:a="http://schemas.openxmlformats.org/drawingml/2006/main"/>
+          <a:ln xmlns:a="http://schemas.openxmlformats.org/drawingml/2006/main" w="0">
+            <a:noFill/>
+            <a:prstDash val="solid"/>
+          </a:ln>
+        </p:spPr>
+        <p:txBody>
+          <a:bodyPr xmlns:a="http://schemas.openxmlformats.org/drawingml/2006/main"/>
+          <a:lstStyle xmlns:a="http://schemas.openxmlformats.org/drawingml/2006/main"/>
+          <a:p xmlns:a="http://schemas.openxmlformats.org/drawingml/2006/main">
+            <a:pPr algn="l">
+              <a:buNone/>
+              <a:defRPr sz="1650" b="1">
+                <a:solidFill>
+                  <a:srgbClr val="020618"/>
+                </a:solidFill>
+              </a:defRPr>
+            </a:pPr>
+            <a:r>
+              <a:rPr sz="1650" b="1">
+                <a:solidFill>
+                  <a:srgbClr val="020618"/>
+                </a:solidFill>
+              </a:rPr>
+              <a:t>Init 调用链</a:t>
+            </a:r>
+          </a:p>
+        </p:txBody>
+      </p:sp>
+      <p:sp>
+        <p:nvSpPr>
+          <p:cNvPr id="30" name="">
+            <a:extLst xmlns:a="http://schemas.openxmlformats.org/drawingml/2006/main">
+              <a:ext uri="{FF2B5EF4-FFF2-40B4-BE49-F238E27FC236}">
+                <a16:creationId xmlns:a16="http://schemas.microsoft.com/office/drawing/2014/main" id="{7F4D7979-D4C1-4634-85A3-69B53494D421}"/>
+              </a:ext>
+            </a:extLst>
+          </p:cNvPr>
+          <p:cNvSpPr>
+            <a:spLocks xmlns:a="http://schemas.openxmlformats.org/drawingml/2006/main" noGrp="1"/>
+          </p:cNvSpPr>
+          <p:nvPr/>
+        </p:nvSpPr>
+        <p:spPr>
+          <a:xfrm xmlns:a="http://schemas.openxmlformats.org/drawingml/2006/main">
+            <a:off x="1162050" y="4610100"/>
+            <a:ext cx="4095750" cy="266700"/>
+          </a:xfrm>
+          <a:prstGeom xmlns:a="http://schemas.openxmlformats.org/drawingml/2006/main" prst="rect">
+            <a:avLst/>
+          </a:prstGeom>
+          <a:noFill xmlns:a="http://schemas.openxmlformats.org/drawingml/2006/main"/>
+          <a:ln xmlns:a="http://schemas.openxmlformats.org/drawingml/2006/main" w="0">
+            <a:noFill/>
+            <a:prstDash val="solid"/>
+          </a:ln>
+        </p:spPr>
+        <p:txBody>
+          <a:bodyPr xmlns:a="http://schemas.openxmlformats.org/drawingml/2006/main"/>
+          <a:lstStyle xmlns:a="http://schemas.openxmlformats.org/drawingml/2006/main"/>
+          <a:p xmlns:a="http://schemas.openxmlformats.org/drawingml/2006/main">
+            <a:pPr algn="l">
+              <a:buNone/>
+              <a:defRPr sz="1350" b="0">
+                <a:solidFill>
+                  <a:srgbClr val="45556C"/>
+                </a:solidFill>
+              </a:defRPr>
+            </a:pPr>
+            <a:r>
+              <a:rPr sz="1350" b="0">
+                <a:solidFill>
+                  <a:srgbClr val="45556C"/>
+                </a:solidFill>
+              </a:rPr>
+              <a:t>InitGlobalAttrs -&gt; InitBuf -&gt; QuantInit -&gt; InitCommAndStatus</a:t>
+            </a:r>
+          </a:p>
+        </p:txBody>
+      </p:sp>
+      <p:sp>
+        <p:nvSpPr>
+          <p:cNvPr id="31" name="">
+            <a:extLst xmlns:a="http://schemas.openxmlformats.org/drawingml/2006/main">
+              <a:ext uri="{FF2B5EF4-FFF2-40B4-BE49-F238E27FC236}">
+                <a16:creationId xmlns:a16="http://schemas.microsoft.com/office/drawing/2014/main" id="{20AB2C50-5E54-4780-BFA0-674D59D32B38}"/>
+              </a:ext>
+            </a:extLst>
+          </p:cNvPr>
+          <p:cNvSpPr>
+            <a:spLocks xmlns:a="http://schemas.openxmlformats.org/drawingml/2006/main" noGrp="1"/>
+          </p:cNvSpPr>
+          <p:nvPr/>
+        </p:nvSpPr>
+        <p:spPr>
+          <a:xfrm xmlns:a="http://schemas.openxmlformats.org/drawingml/2006/main">
+            <a:off x="6419850" y="3886200"/>
+            <a:ext cx="4857750" cy="1333500"/>
+          </a:xfrm>
+          <a:prstGeom xmlns:a="http://schemas.openxmlformats.org/drawingml/2006/main" prst="roundRect">
+            <a:avLst>
+              <a:gd name="adj" fmla="val 5714"/>
+            </a:avLst>
+          </a:prstGeom>
+          <a:solidFill xmlns:a="http://schemas.openxmlformats.org/drawingml/2006/main">
+            <a:srgbClr val="FFFFFF"/>
+          </a:solidFill>
+          <a:ln xmlns:a="http://schemas.openxmlformats.org/drawingml/2006/main" w="9525">
+            <a:solidFill>
+              <a:srgbClr val="E2E8F0"/>
+            </a:solidFill>
+            <a:prstDash val="solid"/>
+          </a:ln>
+        </p:spPr>
+      </p:sp>
+      <p:sp>
+        <p:nvSpPr>
+          <p:cNvPr id="32" name="">
+            <a:extLst xmlns:a="http://schemas.openxmlformats.org/drawingml/2006/main">
+              <a:ext uri="{FF2B5EF4-FFF2-40B4-BE49-F238E27FC236}">
+                <a16:creationId xmlns:a16="http://schemas.microsoft.com/office/drawing/2014/main" id="{31BF7F15-433C-4C22-A491-573ED87577C1}"/>
+              </a:ext>
+            </a:extLst>
+          </p:cNvPr>
+          <p:cNvSpPr>
+            <a:spLocks xmlns:a="http://schemas.openxmlformats.org/drawingml/2006/main" noGrp="1"/>
+          </p:cNvSpPr>
+          <p:nvPr/>
+        </p:nvSpPr>
+        <p:spPr>
+          <a:xfrm xmlns:a="http://schemas.openxmlformats.org/drawingml/2006/main">
+            <a:off x="6686550" y="4133850"/>
+            <a:ext cx="1905000" cy="266700"/>
+          </a:xfrm>
+          <a:prstGeom xmlns:a="http://schemas.openxmlformats.org/drawingml/2006/main" prst="rect">
+            <a:avLst/>
+          </a:prstGeom>
+          <a:noFill xmlns:a="http://schemas.openxmlformats.org/drawingml/2006/main"/>
+          <a:ln xmlns:a="http://schemas.openxmlformats.org/drawingml/2006/main" w="0">
+            <a:noFill/>
+            <a:prstDash val="solid"/>
+          </a:ln>
+        </p:spPr>
+        <p:txBody>
+          <a:bodyPr xmlns:a="http://schemas.openxmlformats.org/drawingml/2006/main"/>
+          <a:lstStyle xmlns:a="http://schemas.openxmlformats.org/drawingml/2006/main"/>
+          <a:p xmlns:a="http://schemas.openxmlformats.org/drawingml/2006/main">
+            <a:pPr algn="l">
+              <a:buNone/>
+              <a:defRPr sz="1650" b="1">
+                <a:solidFill>
+                  <a:srgbClr val="020618"/>
+                </a:solidFill>
+              </a:defRPr>
+            </a:pPr>
+            <a:r>
+              <a:rPr sz="1650" b="1">
+                <a:solidFill>
+                  <a:srgbClr val="020618"/>
+                </a:solidFill>
+              </a:rPr>
+              <a:t>维护注意</a:t>
+            </a:r>
+          </a:p>
+        </p:txBody>
+      </p:sp>
+      <p:sp>
+        <p:nvSpPr>
+          <p:cNvPr id="33" name="">
+            <a:extLst xmlns:a="http://schemas.openxmlformats.org/drawingml/2006/main">
+              <a:ext uri="{FF2B5EF4-FFF2-40B4-BE49-F238E27FC236}">
+                <a16:creationId xmlns:a16="http://schemas.microsoft.com/office/drawing/2014/main" id="{3D04BD50-F978-41FC-9194-9CCE694FB4A0}"/>
+              </a:ext>
+            </a:extLst>
+          </p:cNvPr>
+          <p:cNvSpPr>
+            <a:spLocks xmlns:a="http://schemas.openxmlformats.org/drawingml/2006/main" noGrp="1"/>
+          </p:cNvSpPr>
+          <p:nvPr/>
+        </p:nvSpPr>
+        <p:spPr>
+          <a:xfrm xmlns:a="http://schemas.openxmlformats.org/drawingml/2006/main">
+            <a:off x="6686550" y="4552950"/>
+            <a:ext cx="4000500" cy="495300"/>
+          </a:xfrm>
+          <a:prstGeom xmlns:a="http://schemas.openxmlformats.org/drawingml/2006/main" prst="rect">
+            <a:avLst/>
+          </a:prstGeom>
+          <a:noFill xmlns:a="http://schemas.openxmlformats.org/drawingml/2006/main"/>
+          <a:ln xmlns:a="http://schemas.openxmlformats.org/drawingml/2006/main" w="0">
+            <a:noFill/>
+            <a:prstDash val="solid"/>
+          </a:ln>
+        </p:spPr>
+        <p:txBody>
+          <a:bodyPr xmlns:a="http://schemas.openxmlformats.org/drawingml/2006/main"/>
+          <a:lstStyle xmlns:a="http://schemas.openxmlformats.org/drawingml/2006/main"/>
+          <a:p xmlns:a="http://schemas.openxmlformats.org/drawingml/2006/main">
+            <a:pPr algn="l">
+              <a:buNone/>
+              <a:defRPr sz="1275" b="0">
+                <a:solidFill>
+                  <a:srgbClr val="45556C"/>
+                </a:solidFill>
+              </a:defRPr>
+            </a:pPr>
+            <a:r>
+              <a:rPr sz="1275" b="0">
+                <a:solidFill>
+                  <a:srgbClr val="45556C"/>
+                </a:solidFill>
+              </a:rPr>
+              <a:t>声明参数名顺序与定义/调用点不一致。</a:t>
+            </a:r>
+          </a:p>
+          <a:p xmlns:a="http://schemas.openxmlformats.org/drawingml/2006/main">
+            <a:pPr algn="l">
+              <a:buNone/>
+              <a:defRPr sz="1275" b="0">
+                <a:solidFill>
+                  <a:srgbClr val="45556C"/>
+                </a:solidFill>
+              </a:defRPr>
+            </a:pPr>
+            <a:r>
+              <a:rPr sz="1275" b="0">
+                <a:solidFill>
+                  <a:srgbClr val="45556C"/>
+                </a:solidFill>
+              </a:rPr>
+              <a:t>由于均为 GM_ADDR，维护时以定义和调用点为准。</a:t>
+            </a:r>
+          </a:p>
+        </p:txBody>
+      </p:sp>
+    </p:spTree>
+    <p:extLst>
+      <p:ext uri="{BB962C8B-B14F-4D97-AF65-F5344CB8AC3E}">
+        <p14:creationId xmlns:p14="http://schemas.microsoft.com/office/powerpoint/2010/main" val="1170407857"/>
+      </p:ext>
+    </p:extLst>
+  </p:cSld>
+</p:sld>
+</file>
+
+<file path=ppt/slides/slide12.xml><?xml version="1.0" encoding="utf-8"?>
+<p:sld xmlns:p="http://schemas.openxmlformats.org/presentationml/2006/main">
+  <p:cSld>
+    <p:bg>
+      <p:bgPr>
+        <a:solidFill xmlns:a="http://schemas.openxmlformats.org/drawingml/2006/main">
+          <a:srgbClr val="F8FAFC"/>
+        </a:solidFill>
+      </p:bgPr>
+    </p:bg>
+    <p:spTree>
+      <p:nvGrpSpPr>
+        <p:cNvPr id="1" name=""/>
+        <p:cNvGrpSpPr/>
+        <p:nvPr/>
+      </p:nvGrpSpPr>
+      <p:grpSpPr>
+        <a:xfrm xmlns:a="http://schemas.openxmlformats.org/drawingml/2006/main"/>
+      </p:grpSpPr>
+      <p:sp>
+        <p:nvSpPr>
+          <p:cNvPr id="1" name="">
+            <a:extLst xmlns:a="http://schemas.openxmlformats.org/drawingml/2006/main">
+              <a:ext uri="{FF2B5EF4-FFF2-40B4-BE49-F238E27FC236}">
+                <a16:creationId xmlns:a16="http://schemas.microsoft.com/office/drawing/2014/main" id="{D9D1C2E4-6469-4503-9419-F3AE8A8B94C0}"/>
+              </a:ext>
+            </a:extLst>
+          </p:cNvPr>
+          <p:cNvSpPr>
+            <a:spLocks xmlns:a="http://schemas.openxmlformats.org/drawingml/2006/main" noGrp="1"/>
+          </p:cNvSpPr>
+          <p:nvPr/>
+        </p:nvSpPr>
+        <p:spPr>
+          <a:xfrm xmlns:a="http://schemas.openxmlformats.org/drawingml/2006/main">
+            <a:off x="704850" y="438150"/>
+            <a:ext cx="2190750" cy="247650"/>
+          </a:xfrm>
+          <a:prstGeom xmlns:a="http://schemas.openxmlformats.org/drawingml/2006/main" prst="rect">
+            <a:avLst/>
+          </a:prstGeom>
+          <a:noFill xmlns:a="http://schemas.openxmlformats.org/drawingml/2006/main"/>
+          <a:ln xmlns:a="http://schemas.openxmlformats.org/drawingml/2006/main" w="0">
+            <a:noFill/>
+            <a:prstDash val="solid"/>
+          </a:ln>
+        </p:spPr>
+        <p:txBody>
+          <a:bodyPr xmlns:a="http://schemas.openxmlformats.org/drawingml/2006/main"/>
+          <a:lstStyle xmlns:a="http://schemas.openxmlformats.org/drawingml/2006/main"/>
+          <a:p xmlns:a="http://schemas.openxmlformats.org/drawingml/2006/main">
+            <a:pPr algn="l">
+              <a:buNone/>
+              <a:defRPr sz="1200" b="1">
+                <a:solidFill>
+                  <a:srgbClr val="2563EB"/>
+                </a:solidFill>
+              </a:defRPr>
+            </a:pPr>
+            <a:r>
+              <a:rPr sz="1200" b="1">
+                <a:solidFill>
+                  <a:srgbClr val="2563EB"/>
+                </a:solidFill>
+              </a:rPr>
+              <a:t>A5 CCU kernel</a:t>
+            </a:r>
+          </a:p>
+        </p:txBody>
+      </p:sp>
+      <p:sp>
+        <p:nvSpPr>
+          <p:cNvPr id="2" name="">
+            <a:extLst xmlns:a="http://schemas.openxmlformats.org/drawingml/2006/main">
+              <a:ext uri="{FF2B5EF4-FFF2-40B4-BE49-F238E27FC236}">
+                <a16:creationId xmlns:a16="http://schemas.microsoft.com/office/drawing/2014/main" id="{A75F0B12-C05E-479D-AE21-B17A97FBCD17}"/>
+              </a:ext>
+            </a:extLst>
+          </p:cNvPr>
+          <p:cNvSpPr>
+            <a:spLocks xmlns:a="http://schemas.openxmlformats.org/drawingml/2006/main" noGrp="1"/>
+          </p:cNvSpPr>
+          <p:nvPr/>
+        </p:nvSpPr>
+        <p:spPr>
+          <a:xfrm xmlns:a="http://schemas.openxmlformats.org/drawingml/2006/main">
+            <a:off x="704850" y="819150"/>
+            <a:ext cx="8001000" cy="457200"/>
+          </a:xfrm>
+          <a:prstGeom xmlns:a="http://schemas.openxmlformats.org/drawingml/2006/main" prst="rect">
+            <a:avLst/>
+          </a:prstGeom>
+          <a:noFill xmlns:a="http://schemas.openxmlformats.org/drawingml/2006/main"/>
+          <a:ln xmlns:a="http://schemas.openxmlformats.org/drawingml/2006/main" w="0">
+            <a:noFill/>
+            <a:prstDash val="solid"/>
+          </a:ln>
+        </p:spPr>
+        <p:txBody>
+          <a:bodyPr xmlns:a="http://schemas.openxmlformats.org/drawingml/2006/main"/>
+          <a:lstStyle xmlns:a="http://schemas.openxmlformats.org/drawingml/2006/main"/>
+          <a:p xmlns:a="http://schemas.openxmlformats.org/drawingml/2006/main">
+            <a:pPr algn="l">
+              <a:buNone/>
+              <a:defRPr sz="2850" b="1">
+                <a:solidFill>
+                  <a:srgbClr val="020618"/>
+                </a:solidFill>
+              </a:defRPr>
+            </a:pPr>
+            <a:r>
+              <a:rPr sz="2850" b="1">
+                <a:solidFill>
+                  <a:srgbClr val="020618"/>
+                </a:solidFill>
+              </a:rPr>
+              <a:t>MoeDistributeDispatchA5::Process</a:t>
+            </a:r>
+          </a:p>
+        </p:txBody>
+      </p:sp>
+      <p:sp>
+        <p:nvSpPr>
+          <p:cNvPr id="3" name="">
+            <a:extLst xmlns:a="http://schemas.openxmlformats.org/drawingml/2006/main">
+              <a:ext uri="{FF2B5EF4-FFF2-40B4-BE49-F238E27FC236}">
+                <a16:creationId xmlns:a16="http://schemas.microsoft.com/office/drawing/2014/main" id="{4B6F33B7-C1F1-4EE7-AA00-A3095422C605}"/>
+              </a:ext>
+            </a:extLst>
+          </p:cNvPr>
+          <p:cNvSpPr>
+            <a:spLocks xmlns:a="http://schemas.openxmlformats.org/drawingml/2006/main" noGrp="1"/>
+          </p:cNvSpPr>
+          <p:nvPr/>
+        </p:nvSpPr>
+        <p:spPr>
+          <a:xfrm xmlns:a="http://schemas.openxmlformats.org/drawingml/2006/main">
+            <a:off x="704850" y="1314450"/>
+            <a:ext cx="8572500" cy="247650"/>
+          </a:xfrm>
+          <a:prstGeom xmlns:a="http://schemas.openxmlformats.org/drawingml/2006/main" prst="rect">
+            <a:avLst/>
+          </a:prstGeom>
+          <a:noFill xmlns:a="http://schemas.openxmlformats.org/drawingml/2006/main"/>
+          <a:ln xmlns:a="http://schemas.openxmlformats.org/drawingml/2006/main" w="0">
+            <a:noFill/>
+            <a:prstDash val="solid"/>
+          </a:ln>
+        </p:spPr>
+        <p:txBody>
+          <a:bodyPr xmlns:a="http://schemas.openxmlformats.org/drawingml/2006/main"/>
+          <a:lstStyle xmlns:a="http://schemas.openxmlformats.org/drawingml/2006/main"/>
+          <a:p xmlns:a="http://schemas.openxmlformats.org/drawingml/2006/main">
+            <a:pPr algn="l">
+              <a:buNone/>
+              <a:defRPr sz="1350" b="0">
+                <a:solidFill>
+                  <a:srgbClr val="45556C"/>
+                </a:solidFill>
+              </a:defRPr>
+            </a:pPr>
+            <a:r>
+              <a:rPr sz="1350" b="0">
+                <a:solidFill>
+                  <a:srgbClr val="45556C"/>
+                </a:solidFill>
+              </a:rPr>
+              <a:t>执行链：mask -&gt; scatter -&gt; CCU AlltoAllvWrite -&gt; gather -&gt; finalize</a:t>
+            </a:r>
+          </a:p>
+        </p:txBody>
+      </p:sp>
+      <p:sp>
+        <p:nvSpPr>
+          <p:cNvPr id="4" name="">
+            <a:extLst xmlns:a="http://schemas.openxmlformats.org/drawingml/2006/main">
+              <a:ext uri="{FF2B5EF4-FFF2-40B4-BE49-F238E27FC236}">
+                <a16:creationId xmlns:a16="http://schemas.microsoft.com/office/drawing/2014/main" id="{4BCD4376-1A80-4E0D-BDFC-6432CBAD2F92}"/>
+              </a:ext>
+            </a:extLst>
+          </p:cNvPr>
+          <p:cNvSpPr>
+            <a:spLocks xmlns:a="http://schemas.openxmlformats.org/drawingml/2006/main" noGrp="1"/>
+          </p:cNvSpPr>
+          <p:nvPr/>
+        </p:nvSpPr>
+        <p:spPr>
+          <a:xfrm xmlns:a="http://schemas.openxmlformats.org/drawingml/2006/main">
+            <a:off x="11049000" y="438150"/>
+            <a:ext cx="457200" cy="228600"/>
+          </a:xfrm>
+          <a:prstGeom xmlns:a="http://schemas.openxmlformats.org/drawingml/2006/main" prst="rect">
+            <a:avLst/>
+          </a:prstGeom>
+          <a:noFill xmlns:a="http://schemas.openxmlformats.org/drawingml/2006/main"/>
+          <a:ln xmlns:a="http://schemas.openxmlformats.org/drawingml/2006/main" w="0">
+            <a:noFill/>
+            <a:prstDash val="solid"/>
+          </a:ln>
+        </p:spPr>
+        <p:txBody>
+          <a:bodyPr xmlns:a="http://schemas.openxmlformats.org/drawingml/2006/main"/>
+          <a:lstStyle xmlns:a="http://schemas.openxmlformats.org/drawingml/2006/main"/>
+          <a:p xmlns:a="http://schemas.openxmlformats.org/drawingml/2006/main">
+            <a:pPr algn="r">
+              <a:buNone/>
+              <a:defRPr sz="1200" b="1">
+                <a:solidFill>
+                  <a:srgbClr val="90A1B9"/>
+                </a:solidFill>
+              </a:defRPr>
+            </a:pPr>
+            <a:r>
+              <a:rPr sz="1200" b="1">
+                <a:solidFill>
+                  <a:srgbClr val="90A1B9"/>
+                </a:solidFill>
+              </a:rPr>
+              <a:t>12</a:t>
+            </a:r>
+          </a:p>
+        </p:txBody>
+      </p:sp>
+      <p:sp>
+        <p:nvSpPr>
+          <p:cNvPr id="5" name="">
+            <a:extLst xmlns:a="http://schemas.openxmlformats.org/drawingml/2006/main">
+              <a:ext uri="{FF2B5EF4-FFF2-40B4-BE49-F238E27FC236}">
+                <a16:creationId xmlns:a16="http://schemas.microsoft.com/office/drawing/2014/main" id="{46550352-2315-4CAA-8A33-B9C4DC06F8D8}"/>
+              </a:ext>
+            </a:extLst>
+          </p:cNvPr>
+          <p:cNvSpPr>
+            <a:spLocks xmlns:a="http://schemas.openxmlformats.org/drawingml/2006/main" noGrp="1"/>
+          </p:cNvSpPr>
+          <p:nvPr/>
+        </p:nvSpPr>
+        <p:spPr>
+          <a:xfrm xmlns:a="http://schemas.openxmlformats.org/drawingml/2006/main">
+            <a:off x="914400" y="1981200"/>
+            <a:ext cx="1600200" cy="1066800"/>
+          </a:xfrm>
+          <a:prstGeom xmlns:a="http://schemas.openxmlformats.org/drawingml/2006/main" prst="roundRect">
+            <a:avLst>
+              <a:gd name="adj" fmla="val 7143"/>
+            </a:avLst>
+          </a:prstGeom>
+          <a:solidFill xmlns:a="http://schemas.openxmlformats.org/drawingml/2006/main">
+            <a:srgbClr val="FFFFFF"/>
+          </a:solidFill>
+          <a:ln xmlns:a="http://schemas.openxmlformats.org/drawingml/2006/main" w="9525">
+            <a:solidFill>
+              <a:srgbClr val="E2E8F0"/>
+            </a:solidFill>
+            <a:prstDash val="solid"/>
+          </a:ln>
+        </p:spPr>
+      </p:sp>
+      <p:sp>
+        <p:nvSpPr>
+          <p:cNvPr id="6" name="">
+            <a:extLst xmlns:a="http://schemas.openxmlformats.org/drawingml/2006/main">
+              <a:ext uri="{FF2B5EF4-FFF2-40B4-BE49-F238E27FC236}">
+                <a16:creationId xmlns:a16="http://schemas.microsoft.com/office/drawing/2014/main" id="{BFC39599-1798-4A06-AF84-4956FCDEEC7F}"/>
+              </a:ext>
+            </a:extLst>
+          </p:cNvPr>
+          <p:cNvSpPr>
+            <a:spLocks xmlns:a="http://schemas.openxmlformats.org/drawingml/2006/main" noGrp="1"/>
+          </p:cNvSpPr>
+          <p:nvPr/>
+        </p:nvSpPr>
+        <p:spPr>
+          <a:xfrm xmlns:a="http://schemas.openxmlformats.org/drawingml/2006/main">
+            <a:off x="1143000" y="2171700"/>
+            <a:ext cx="914400" cy="304800"/>
+          </a:xfrm>
+          <a:prstGeom xmlns:a="http://schemas.openxmlformats.org/drawingml/2006/main" prst="roundRect">
+            <a:avLst>
+              <a:gd name="adj" fmla="val 25000"/>
+            </a:avLst>
+          </a:prstGeom>
+          <a:solidFill xmlns:a="http://schemas.openxmlformats.org/drawingml/2006/main">
+            <a:srgbClr val="7C3AED"/>
+          </a:solidFill>
+          <a:ln xmlns:a="http://schemas.openxmlformats.org/drawingml/2006/main" w="0">
+            <a:solidFill>
+              <a:srgbClr val="7C3AED"/>
+            </a:solidFill>
+            <a:prstDash val="solid"/>
+          </a:ln>
+        </p:spPr>
+      </p:sp>
+      <p:sp>
+        <p:nvSpPr>
+          <p:cNvPr id="7" name="">
+            <a:extLst xmlns:a="http://schemas.openxmlformats.org/drawingml/2006/main">
+              <a:ext uri="{FF2B5EF4-FFF2-40B4-BE49-F238E27FC236}">
+                <a16:creationId xmlns:a16="http://schemas.microsoft.com/office/drawing/2014/main" id="{F75B880E-2BD1-4932-8428-B7DDF5B42FA7}"/>
+              </a:ext>
+            </a:extLst>
+          </p:cNvPr>
+          <p:cNvSpPr>
+            <a:spLocks xmlns:a="http://schemas.openxmlformats.org/drawingml/2006/main" noGrp="1"/>
+          </p:cNvSpPr>
+          <p:nvPr/>
+        </p:nvSpPr>
+        <p:spPr>
+          <a:xfrm xmlns:a="http://schemas.openxmlformats.org/drawingml/2006/main">
+            <a:off x="1219200" y="2219325"/>
+            <a:ext cx="762000" cy="228600"/>
+          </a:xfrm>
+          <a:prstGeom xmlns:a="http://schemas.openxmlformats.org/drawingml/2006/main" prst="rect">
+            <a:avLst/>
+          </a:prstGeom>
+          <a:noFill xmlns:a="http://schemas.openxmlformats.org/drawingml/2006/main"/>
+          <a:ln xmlns:a="http://schemas.openxmlformats.org/drawingml/2006/main" w="0">
+            <a:noFill/>
+            <a:prstDash val="solid"/>
+          </a:ln>
+        </p:spPr>
+        <p:txBody>
+          <a:bodyPr xmlns:a="http://schemas.openxmlformats.org/drawingml/2006/main"/>
+          <a:lstStyle xmlns:a="http://schemas.openxmlformats.org/drawingml/2006/main"/>
+          <a:p xmlns:a="http://schemas.openxmlformats.org/drawingml/2006/main">
+            <a:pPr algn="ctr">
+              <a:buNone/>
+              <a:defRPr sz="1200" b="1">
+                <a:solidFill>
+                  <a:srgbClr val="FFFFFF"/>
+                </a:solidFill>
+              </a:defRPr>
+            </a:pPr>
+            <a:r>
+              <a:rPr sz="1200" b="1">
+                <a:solidFill>
+                  <a:srgbClr val="FFFFFF"/>
+                </a:solidFill>
+              </a:rPr>
+              <a:t>Mask</a:t>
+            </a:r>
+          </a:p>
+        </p:txBody>
+      </p:sp>
+      <p:sp>
+        <p:nvSpPr>
+          <p:cNvPr id="8" name="">
+            <a:extLst xmlns:a="http://schemas.openxmlformats.org/drawingml/2006/main">
+              <a:ext uri="{FF2B5EF4-FFF2-40B4-BE49-F238E27FC236}">
+                <a16:creationId xmlns:a16="http://schemas.microsoft.com/office/drawing/2014/main" id="{6FAB498D-2306-4325-BCDB-58D7BC646FE7}"/>
+              </a:ext>
+            </a:extLst>
+          </p:cNvPr>
+          <p:cNvSpPr>
+            <a:spLocks xmlns:a="http://schemas.openxmlformats.org/drawingml/2006/main" noGrp="1"/>
+          </p:cNvSpPr>
+          <p:nvPr/>
+        </p:nvSpPr>
+        <p:spPr>
+          <a:xfrm xmlns:a="http://schemas.openxmlformats.org/drawingml/2006/main">
+            <a:off x="1104900" y="2609850"/>
+            <a:ext cx="1219200" cy="266700"/>
+          </a:xfrm>
+          <a:prstGeom xmlns:a="http://schemas.openxmlformats.org/drawingml/2006/main" prst="rect">
+            <a:avLst/>
+          </a:prstGeom>
+          <a:noFill xmlns:a="http://schemas.openxmlformats.org/drawingml/2006/main"/>
+          <a:ln xmlns:a="http://schemas.openxmlformats.org/drawingml/2006/main" w="0">
+            <a:noFill/>
+            <a:prstDash val="solid"/>
+          </a:ln>
+        </p:spPr>
+        <p:txBody>
+          <a:bodyPr xmlns:a="http://schemas.openxmlformats.org/drawingml/2006/main"/>
+          <a:lstStyle xmlns:a="http://schemas.openxmlformats.org/drawingml/2006/main"/>
+          <a:p xmlns:a="http://schemas.openxmlformats.org/drawingml/2006/main">
+            <a:pPr algn="ctr">
+              <a:buNone/>
+              <a:defRPr sz="1500" b="1">
+                <a:solidFill>
+                  <a:srgbClr val="020618"/>
+                </a:solidFill>
+              </a:defRPr>
+            </a:pPr>
+            <a:r>
+              <a:rPr sz="1500" b="1">
+                <a:solidFill>
+                  <a:srgbClr val="020618"/>
+                </a:solidFill>
+              </a:rPr>
+              <a:t>activeBs</a:t>
+            </a:r>
+          </a:p>
+        </p:txBody>
+      </p:sp>
+      <p:sp>
+        <p:nvSpPr>
+          <p:cNvPr id="9" name="">
+            <a:extLst xmlns:a="http://schemas.openxmlformats.org/drawingml/2006/main">
+              <a:ext uri="{FF2B5EF4-FFF2-40B4-BE49-F238E27FC236}">
+                <a16:creationId xmlns:a16="http://schemas.microsoft.com/office/drawing/2014/main" id="{2150449B-72A2-45EC-AF5E-D8DD3061CD8F}"/>
+              </a:ext>
+            </a:extLst>
+          </p:cNvPr>
+          <p:cNvSpPr>
+            <a:spLocks xmlns:a="http://schemas.openxmlformats.org/drawingml/2006/main" noGrp="1"/>
+          </p:cNvSpPr>
+          <p:nvPr/>
+        </p:nvSpPr>
+        <p:spPr>
+          <a:xfrm xmlns:a="http://schemas.openxmlformats.org/drawingml/2006/main">
+            <a:off x="2609850" y="2381250"/>
+            <a:ext cx="400050" cy="247650"/>
+          </a:xfrm>
+          <a:prstGeom xmlns:a="http://schemas.openxmlformats.org/drawingml/2006/main" prst="rightArrow">
+            <a:avLst/>
+          </a:prstGeom>
+          <a:solidFill xmlns:a="http://schemas.openxmlformats.org/drawingml/2006/main">
+            <a:srgbClr val="CAD5E2"/>
+          </a:solidFill>
+          <a:ln xmlns:a="http://schemas.openxmlformats.org/drawingml/2006/main" w="0">
+            <a:solidFill>
+              <a:srgbClr val="CAD5E2"/>
+            </a:solidFill>
+            <a:prstDash val="solid"/>
+          </a:ln>
+        </p:spPr>
+      </p:sp>
+      <p:sp>
+        <p:nvSpPr>
+          <p:cNvPr id="10" name="">
+            <a:extLst xmlns:a="http://schemas.openxmlformats.org/drawingml/2006/main">
+              <a:ext uri="{FF2B5EF4-FFF2-40B4-BE49-F238E27FC236}">
+                <a16:creationId xmlns:a16="http://schemas.microsoft.com/office/drawing/2014/main" id="{EFDBDCF1-9D52-4D45-879C-3B86AECF0A38}"/>
+              </a:ext>
+            </a:extLst>
+          </p:cNvPr>
+          <p:cNvSpPr>
+            <a:spLocks xmlns:a="http://schemas.openxmlformats.org/drawingml/2006/main" noGrp="1"/>
+          </p:cNvSpPr>
+          <p:nvPr/>
+        </p:nvSpPr>
+        <p:spPr>
+          <a:xfrm xmlns:a="http://schemas.openxmlformats.org/drawingml/2006/main">
+            <a:off x="3105150" y="1981200"/>
+            <a:ext cx="1600200" cy="1066800"/>
+          </a:xfrm>
+          <a:prstGeom xmlns:a="http://schemas.openxmlformats.org/drawingml/2006/main" prst="roundRect">
+            <a:avLst>
+              <a:gd name="adj" fmla="val 7143"/>
+            </a:avLst>
+          </a:prstGeom>
+          <a:solidFill xmlns:a="http://schemas.openxmlformats.org/drawingml/2006/main">
+            <a:srgbClr val="FFFFFF"/>
+          </a:solidFill>
+          <a:ln xmlns:a="http://schemas.openxmlformats.org/drawingml/2006/main" w="9525">
+            <a:solidFill>
+              <a:srgbClr val="E2E8F0"/>
+            </a:solidFill>
+            <a:prstDash val="solid"/>
+          </a:ln>
+        </p:spPr>
+      </p:sp>
+      <p:sp>
+        <p:nvSpPr>
+          <p:cNvPr id="11" name="">
+            <a:extLst xmlns:a="http://schemas.openxmlformats.org/drawingml/2006/main">
+              <a:ext uri="{FF2B5EF4-FFF2-40B4-BE49-F238E27FC236}">
+                <a16:creationId xmlns:a16="http://schemas.microsoft.com/office/drawing/2014/main" id="{7363D715-A258-40B7-AC53-96D6098891A8}"/>
+              </a:ext>
+            </a:extLst>
+          </p:cNvPr>
+          <p:cNvSpPr>
+            <a:spLocks xmlns:a="http://schemas.openxmlformats.org/drawingml/2006/main" noGrp="1"/>
+          </p:cNvSpPr>
+          <p:nvPr/>
+        </p:nvSpPr>
+        <p:spPr>
+          <a:xfrm xmlns:a="http://schemas.openxmlformats.org/drawingml/2006/main">
+            <a:off x="3333750" y="2171700"/>
+            <a:ext cx="914400" cy="304800"/>
+          </a:xfrm>
+          <a:prstGeom xmlns:a="http://schemas.openxmlformats.org/drawingml/2006/main" prst="roundRect">
+            <a:avLst>
+              <a:gd name="adj" fmla="val 25000"/>
+            </a:avLst>
+          </a:prstGeom>
+          <a:solidFill xmlns:a="http://schemas.openxmlformats.org/drawingml/2006/main">
+            <a:srgbClr val="2563EB"/>
+          </a:solidFill>
+          <a:ln xmlns:a="http://schemas.openxmlformats.org/drawingml/2006/main" w="0">
+            <a:solidFill>
+              <a:srgbClr val="2563EB"/>
+            </a:solidFill>
+            <a:prstDash val="solid"/>
+          </a:ln>
+        </p:spPr>
+      </p:sp>
+      <p:sp>
+        <p:nvSpPr>
+          <p:cNvPr id="12" name="">
+            <a:extLst xmlns:a="http://schemas.openxmlformats.org/drawingml/2006/main">
+              <a:ext uri="{FF2B5EF4-FFF2-40B4-BE49-F238E27FC236}">
+                <a16:creationId xmlns:a16="http://schemas.microsoft.com/office/drawing/2014/main" id="{7ED56CE7-D2A7-4DF6-B825-C81E7A203944}"/>
+              </a:ext>
+            </a:extLst>
+          </p:cNvPr>
+          <p:cNvSpPr>
+            <a:spLocks xmlns:a="http://schemas.openxmlformats.org/drawingml/2006/main" noGrp="1"/>
+          </p:cNvSpPr>
+          <p:nvPr/>
+        </p:nvSpPr>
+        <p:spPr>
+          <a:xfrm xmlns:a="http://schemas.openxmlformats.org/drawingml/2006/main">
+            <a:off x="3409950" y="2219325"/>
+            <a:ext cx="762000" cy="228600"/>
+          </a:xfrm>
+          <a:prstGeom xmlns:a="http://schemas.openxmlformats.org/drawingml/2006/main" prst="rect">
+            <a:avLst/>
+          </a:prstGeom>
+          <a:noFill xmlns:a="http://schemas.openxmlformats.org/drawingml/2006/main"/>
+          <a:ln xmlns:a="http://schemas.openxmlformats.org/drawingml/2006/main" w="0">
+            <a:noFill/>
+            <a:prstDash val="solid"/>
+          </a:ln>
+        </p:spPr>
+        <p:txBody>
+          <a:bodyPr xmlns:a="http://schemas.openxmlformats.org/drawingml/2006/main"/>
+          <a:lstStyle xmlns:a="http://schemas.openxmlformats.org/drawingml/2006/main"/>
+          <a:p xmlns:a="http://schemas.openxmlformats.org/drawingml/2006/main">
+            <a:pPr algn="ctr">
+              <a:buNone/>
+              <a:defRPr sz="1200" b="1">
+                <a:solidFill>
+                  <a:srgbClr val="FFFFFF"/>
+                </a:solidFill>
+              </a:defRPr>
+            </a:pPr>
+            <a:r>
+              <a:rPr sz="1200" b="1">
+                <a:solidFill>
+                  <a:srgbClr val="FFFFFF"/>
+                </a:solidFill>
+              </a:rPr>
+              <a:t>Scatter</a:t>
+            </a:r>
+          </a:p>
+        </p:txBody>
+      </p:sp>
+      <p:sp>
+        <p:nvSpPr>
+          <p:cNvPr id="13" name="">
+            <a:extLst xmlns:a="http://schemas.openxmlformats.org/drawingml/2006/main">
+              <a:ext uri="{FF2B5EF4-FFF2-40B4-BE49-F238E27FC236}">
+                <a16:creationId xmlns:a16="http://schemas.microsoft.com/office/drawing/2014/main" id="{D4309AF5-8584-46C8-8963-A56F27819BC6}"/>
+              </a:ext>
+            </a:extLst>
+          </p:cNvPr>
+          <p:cNvSpPr>
+            <a:spLocks xmlns:a="http://schemas.openxmlformats.org/drawingml/2006/main" noGrp="1"/>
+          </p:cNvSpPr>
+          <p:nvPr/>
+        </p:nvSpPr>
+        <p:spPr>
+          <a:xfrm xmlns:a="http://schemas.openxmlformats.org/drawingml/2006/main">
+            <a:off x="3295650" y="2609850"/>
+            <a:ext cx="1219200" cy="266700"/>
+          </a:xfrm>
+          <a:prstGeom xmlns:a="http://schemas.openxmlformats.org/drawingml/2006/main" prst="rect">
+            <a:avLst/>
+          </a:prstGeom>
+          <a:noFill xmlns:a="http://schemas.openxmlformats.org/drawingml/2006/main"/>
+          <a:ln xmlns:a="http://schemas.openxmlformats.org/drawingml/2006/main" w="0">
+            <a:noFill/>
+            <a:prstDash val="solid"/>
+          </a:ln>
+        </p:spPr>
+        <p:txBody>
+          <a:bodyPr xmlns:a="http://schemas.openxmlformats.org/drawingml/2006/main"/>
+          <a:lstStyle xmlns:a="http://schemas.openxmlformats.org/drawingml/2006/main"/>
+          <a:p xmlns:a="http://schemas.openxmlformats.org/drawingml/2006/main">
+            <a:pPr algn="ctr">
+              <a:buNone/>
+              <a:defRPr sz="1500" b="1">
+                <a:solidFill>
+                  <a:srgbClr val="020618"/>
+                </a:solidFill>
+              </a:defRPr>
+            </a:pPr>
+            <a:r>
+              <a:rPr sz="1500" b="1">
+                <a:solidFill>
+                  <a:srgbClr val="020618"/>
+                </a:solidFill>
+              </a:rPr>
+              <a:t>sendBuf</a:t>
+            </a:r>
+          </a:p>
+        </p:txBody>
+      </p:sp>
+      <p:sp>
+        <p:nvSpPr>
+          <p:cNvPr id="14" name="">
+            <a:extLst xmlns:a="http://schemas.openxmlformats.org/drawingml/2006/main">
+              <a:ext uri="{FF2B5EF4-FFF2-40B4-BE49-F238E27FC236}">
+                <a16:creationId xmlns:a16="http://schemas.microsoft.com/office/drawing/2014/main" id="{8EC4F442-6992-4F70-945A-81DC6C833C52}"/>
+              </a:ext>
+            </a:extLst>
+          </p:cNvPr>
+          <p:cNvSpPr>
+            <a:spLocks xmlns:a="http://schemas.openxmlformats.org/drawingml/2006/main" noGrp="1"/>
+          </p:cNvSpPr>
+          <p:nvPr/>
+        </p:nvSpPr>
+        <p:spPr>
+          <a:xfrm xmlns:a="http://schemas.openxmlformats.org/drawingml/2006/main">
+            <a:off x="4800600" y="2381250"/>
+            <a:ext cx="400050" cy="247650"/>
+          </a:xfrm>
+          <a:prstGeom xmlns:a="http://schemas.openxmlformats.org/drawingml/2006/main" prst="rightArrow">
+            <a:avLst/>
+          </a:prstGeom>
+          <a:solidFill xmlns:a="http://schemas.openxmlformats.org/drawingml/2006/main">
+            <a:srgbClr val="CAD5E2"/>
+          </a:solidFill>
+          <a:ln xmlns:a="http://schemas.openxmlformats.org/drawingml/2006/main" w="0">
+            <a:solidFill>
+              <a:srgbClr val="CAD5E2"/>
+            </a:solidFill>
+            <a:prstDash val="solid"/>
+          </a:ln>
+        </p:spPr>
+      </p:sp>
+      <p:sp>
+        <p:nvSpPr>
+          <p:cNvPr id="15" name="">
+            <a:extLst xmlns:a="http://schemas.openxmlformats.org/drawingml/2006/main">
+              <a:ext uri="{FF2B5EF4-FFF2-40B4-BE49-F238E27FC236}">
+                <a16:creationId xmlns:a16="http://schemas.microsoft.com/office/drawing/2014/main" id="{9CCF9698-7D21-435F-B237-FAF99A110CE1}"/>
+              </a:ext>
+            </a:extLst>
+          </p:cNvPr>
+          <p:cNvSpPr>
+            <a:spLocks xmlns:a="http://schemas.openxmlformats.org/drawingml/2006/main" noGrp="1"/>
+          </p:cNvSpPr>
+          <p:nvPr/>
+        </p:nvSpPr>
+        <p:spPr>
+          <a:xfrm xmlns:a="http://schemas.openxmlformats.org/drawingml/2006/main">
+            <a:off x="5295900" y="1981200"/>
+            <a:ext cx="1600200" cy="1066800"/>
+          </a:xfrm>
+          <a:prstGeom xmlns:a="http://schemas.openxmlformats.org/drawingml/2006/main" prst="roundRect">
+            <a:avLst>
+              <a:gd name="adj" fmla="val 7143"/>
+            </a:avLst>
+          </a:prstGeom>
+          <a:solidFill xmlns:a="http://schemas.openxmlformats.org/drawingml/2006/main">
+            <a:srgbClr val="FFFFFF"/>
+          </a:solidFill>
+          <a:ln xmlns:a="http://schemas.openxmlformats.org/drawingml/2006/main" w="9525">
+            <a:solidFill>
+              <a:srgbClr val="E2E8F0"/>
+            </a:solidFill>
+            <a:prstDash val="solid"/>
+          </a:ln>
+        </p:spPr>
+      </p:sp>
+      <p:sp>
+        <p:nvSpPr>
+          <p:cNvPr id="16" name="">
+            <a:extLst xmlns:a="http://schemas.openxmlformats.org/drawingml/2006/main">
+              <a:ext uri="{FF2B5EF4-FFF2-40B4-BE49-F238E27FC236}">
+                <a16:creationId xmlns:a16="http://schemas.microsoft.com/office/drawing/2014/main" id="{9CE8850F-04E6-4C9A-9FDE-991336117B8A}"/>
+              </a:ext>
+            </a:extLst>
+          </p:cNvPr>
+          <p:cNvSpPr>
+            <a:spLocks xmlns:a="http://schemas.openxmlformats.org/drawingml/2006/main" noGrp="1"/>
+          </p:cNvSpPr>
+          <p:nvPr/>
+        </p:nvSpPr>
+        <p:spPr>
+          <a:xfrm xmlns:a="http://schemas.openxmlformats.org/drawingml/2006/main">
+            <a:off x="5524500" y="2171700"/>
+            <a:ext cx="914400" cy="304800"/>
+          </a:xfrm>
+          <a:prstGeom xmlns:a="http://schemas.openxmlformats.org/drawingml/2006/main" prst="roundRect">
+            <a:avLst>
+              <a:gd name="adj" fmla="val 25000"/>
+            </a:avLst>
+          </a:prstGeom>
+          <a:solidFill xmlns:a="http://schemas.openxmlformats.org/drawingml/2006/main">
+            <a:srgbClr val="D97706"/>
+          </a:solidFill>
+          <a:ln xmlns:a="http://schemas.openxmlformats.org/drawingml/2006/main" w="0">
+            <a:solidFill>
+              <a:srgbClr val="D97706"/>
+            </a:solidFill>
+            <a:prstDash val="solid"/>
+          </a:ln>
+        </p:spPr>
+      </p:sp>
+      <p:sp>
+        <p:nvSpPr>
+          <p:cNvPr id="17" name="">
+            <a:extLst xmlns:a="http://schemas.openxmlformats.org/drawingml/2006/main">
+              <a:ext uri="{FF2B5EF4-FFF2-40B4-BE49-F238E27FC236}">
+                <a16:creationId xmlns:a16="http://schemas.microsoft.com/office/drawing/2014/main" id="{0F9380AA-620B-4779-81B1-7EE8EE26DF57}"/>
+              </a:ext>
+            </a:extLst>
+          </p:cNvPr>
+          <p:cNvSpPr>
+            <a:spLocks xmlns:a="http://schemas.openxmlformats.org/drawingml/2006/main" noGrp="1"/>
+          </p:cNvSpPr>
+          <p:nvPr/>
+        </p:nvSpPr>
+        <p:spPr>
+          <a:xfrm xmlns:a="http://schemas.openxmlformats.org/drawingml/2006/main">
+            <a:off x="5600700" y="2219325"/>
+            <a:ext cx="762000" cy="228600"/>
+          </a:xfrm>
+          <a:prstGeom xmlns:a="http://schemas.openxmlformats.org/drawingml/2006/main" prst="rect">
+            <a:avLst/>
+          </a:prstGeom>
+          <a:noFill xmlns:a="http://schemas.openxmlformats.org/drawingml/2006/main"/>
+          <a:ln xmlns:a="http://schemas.openxmlformats.org/drawingml/2006/main" w="0">
+            <a:noFill/>
+            <a:prstDash val="solid"/>
+          </a:ln>
+        </p:spPr>
+        <p:txBody>
+          <a:bodyPr xmlns:a="http://schemas.openxmlformats.org/drawingml/2006/main"/>
+          <a:lstStyle xmlns:a="http://schemas.openxmlformats.org/drawingml/2006/main"/>
+          <a:p xmlns:a="http://schemas.openxmlformats.org/drawingml/2006/main">
+            <a:pPr algn="ctr">
+              <a:buNone/>
+              <a:defRPr sz="1200" b="1">
+                <a:solidFill>
+                  <a:srgbClr val="FFFFFF"/>
+                </a:solidFill>
+              </a:defRPr>
+            </a:pPr>
+            <a:r>
+              <a:rPr sz="1200" b="1">
+                <a:solidFill>
+                  <a:srgbClr val="FFFFFF"/>
+                </a:solidFill>
+              </a:rPr>
+              <a:t>CCU</a:t>
+            </a:r>
+          </a:p>
+        </p:txBody>
+      </p:sp>
+      <p:sp>
+        <p:nvSpPr>
+          <p:cNvPr id="18" name="">
+            <a:extLst xmlns:a="http://schemas.openxmlformats.org/drawingml/2006/main">
+              <a:ext uri="{FF2B5EF4-FFF2-40B4-BE49-F238E27FC236}">
+                <a16:creationId xmlns:a16="http://schemas.microsoft.com/office/drawing/2014/main" id="{FDFC9B59-43B1-4D30-B133-708CA1B56C2A}"/>
+              </a:ext>
+            </a:extLst>
+          </p:cNvPr>
+          <p:cNvSpPr>
+            <a:spLocks xmlns:a="http://schemas.openxmlformats.org/drawingml/2006/main" noGrp="1"/>
+          </p:cNvSpPr>
+          <p:nvPr/>
+        </p:nvSpPr>
+        <p:spPr>
+          <a:xfrm xmlns:a="http://schemas.openxmlformats.org/drawingml/2006/main">
+            <a:off x="5486400" y="2609850"/>
+            <a:ext cx="1219200" cy="266700"/>
+          </a:xfrm>
+          <a:prstGeom xmlns:a="http://schemas.openxmlformats.org/drawingml/2006/main" prst="rect">
+            <a:avLst/>
+          </a:prstGeom>
+          <a:noFill xmlns:a="http://schemas.openxmlformats.org/drawingml/2006/main"/>
+          <a:ln xmlns:a="http://schemas.openxmlformats.org/drawingml/2006/main" w="0">
+            <a:noFill/>
+            <a:prstDash val="solid"/>
+          </a:ln>
+        </p:spPr>
+        <p:txBody>
+          <a:bodyPr xmlns:a="http://schemas.openxmlformats.org/drawingml/2006/main"/>
+          <a:lstStyle xmlns:a="http://schemas.openxmlformats.org/drawingml/2006/main"/>
+          <a:p xmlns:a="http://schemas.openxmlformats.org/drawingml/2006/main">
+            <a:pPr algn="ctr">
+              <a:buNone/>
+              <a:defRPr sz="1500" b="1">
+                <a:solidFill>
+                  <a:srgbClr val="020618"/>
+                </a:solidFill>
+              </a:defRPr>
+            </a:pPr>
+            <a:r>
+              <a:rPr sz="1500" b="1">
+                <a:solidFill>
+                  <a:srgbClr val="020618"/>
+                </a:solidFill>
+              </a:rPr>
+              <a:t>AlltoAllv</a:t>
+            </a:r>
+          </a:p>
+        </p:txBody>
+      </p:sp>
+      <p:sp>
+        <p:nvSpPr>
+          <p:cNvPr id="19" name="">
+            <a:extLst xmlns:a="http://schemas.openxmlformats.org/drawingml/2006/main">
+              <a:ext uri="{FF2B5EF4-FFF2-40B4-BE49-F238E27FC236}">
+                <a16:creationId xmlns:a16="http://schemas.microsoft.com/office/drawing/2014/main" id="{83E53867-7BF8-426F-A66E-993A9F60C12A}"/>
+              </a:ext>
+            </a:extLst>
+          </p:cNvPr>
+          <p:cNvSpPr>
+            <a:spLocks xmlns:a="http://schemas.openxmlformats.org/drawingml/2006/main" noGrp="1"/>
+          </p:cNvSpPr>
+          <p:nvPr/>
+        </p:nvSpPr>
+        <p:spPr>
+          <a:xfrm xmlns:a="http://schemas.openxmlformats.org/drawingml/2006/main">
+            <a:off x="6991350" y="2381250"/>
+            <a:ext cx="400050" cy="247650"/>
+          </a:xfrm>
+          <a:prstGeom xmlns:a="http://schemas.openxmlformats.org/drawingml/2006/main" prst="rightArrow">
+            <a:avLst/>
+          </a:prstGeom>
+          <a:solidFill xmlns:a="http://schemas.openxmlformats.org/drawingml/2006/main">
+            <a:srgbClr val="CAD5E2"/>
+          </a:solidFill>
+          <a:ln xmlns:a="http://schemas.openxmlformats.org/drawingml/2006/main" w="0">
+            <a:solidFill>
+              <a:srgbClr val="CAD5E2"/>
+            </a:solidFill>
+            <a:prstDash val="solid"/>
+          </a:ln>
+        </p:spPr>
+      </p:sp>
+      <p:sp>
+        <p:nvSpPr>
+          <p:cNvPr id="20" name="">
+            <a:extLst xmlns:a="http://schemas.openxmlformats.org/drawingml/2006/main">
+              <a:ext uri="{FF2B5EF4-FFF2-40B4-BE49-F238E27FC236}">
+                <a16:creationId xmlns:a16="http://schemas.microsoft.com/office/drawing/2014/main" id="{AD15D556-A0AA-48E7-BEB2-E117D872A04D}"/>
+              </a:ext>
+            </a:extLst>
+          </p:cNvPr>
+          <p:cNvSpPr>
+            <a:spLocks xmlns:a="http://schemas.openxmlformats.org/drawingml/2006/main" noGrp="1"/>
+          </p:cNvSpPr>
+          <p:nvPr/>
+        </p:nvSpPr>
+        <p:spPr>
+          <a:xfrm xmlns:a="http://schemas.openxmlformats.org/drawingml/2006/main">
+            <a:off x="7486650" y="1981200"/>
+            <a:ext cx="1600200" cy="1066800"/>
+          </a:xfrm>
+          <a:prstGeom xmlns:a="http://schemas.openxmlformats.org/drawingml/2006/main" prst="roundRect">
+            <a:avLst>
+              <a:gd name="adj" fmla="val 7143"/>
+            </a:avLst>
+          </a:prstGeom>
+          <a:solidFill xmlns:a="http://schemas.openxmlformats.org/drawingml/2006/main">
+            <a:srgbClr val="FFFFFF"/>
+          </a:solidFill>
+          <a:ln xmlns:a="http://schemas.openxmlformats.org/drawingml/2006/main" w="9525">
+            <a:solidFill>
+              <a:srgbClr val="E2E8F0"/>
+            </a:solidFill>
+            <a:prstDash val="solid"/>
+          </a:ln>
+        </p:spPr>
+      </p:sp>
+      <p:sp>
+        <p:nvSpPr>
+          <p:cNvPr id="21" name="">
+            <a:extLst xmlns:a="http://schemas.openxmlformats.org/drawingml/2006/main">
+              <a:ext uri="{FF2B5EF4-FFF2-40B4-BE49-F238E27FC236}">
+                <a16:creationId xmlns:a16="http://schemas.microsoft.com/office/drawing/2014/main" id="{8D58E697-F635-4E69-813B-A5855EF7B0B6}"/>
+              </a:ext>
+            </a:extLst>
+          </p:cNvPr>
+          <p:cNvSpPr>
+            <a:spLocks xmlns:a="http://schemas.openxmlformats.org/drawingml/2006/main" noGrp="1"/>
+          </p:cNvSpPr>
+          <p:nvPr/>
+        </p:nvSpPr>
+        <p:spPr>
+          <a:xfrm xmlns:a="http://schemas.openxmlformats.org/drawingml/2006/main">
+            <a:off x="7715250" y="2171700"/>
+            <a:ext cx="914400" cy="304800"/>
+          </a:xfrm>
+          <a:prstGeom xmlns:a="http://schemas.openxmlformats.org/drawingml/2006/main" prst="roundRect">
+            <a:avLst>
+              <a:gd name="adj" fmla="val 25000"/>
+            </a:avLst>
+          </a:prstGeom>
+          <a:solidFill xmlns:a="http://schemas.openxmlformats.org/drawingml/2006/main">
+            <a:srgbClr val="059669"/>
+          </a:solidFill>
+          <a:ln xmlns:a="http://schemas.openxmlformats.org/drawingml/2006/main" w="0">
+            <a:solidFill>
+              <a:srgbClr val="059669"/>
+            </a:solidFill>
+            <a:prstDash val="solid"/>
+          </a:ln>
+        </p:spPr>
+      </p:sp>
+      <p:sp>
+        <p:nvSpPr>
+          <p:cNvPr id="22" name="">
+            <a:extLst xmlns:a="http://schemas.openxmlformats.org/drawingml/2006/main">
+              <a:ext uri="{FF2B5EF4-FFF2-40B4-BE49-F238E27FC236}">
+                <a16:creationId xmlns:a16="http://schemas.microsoft.com/office/drawing/2014/main" id="{DB0BAA4B-CD5B-4848-A7AE-D15081B77615}"/>
+              </a:ext>
+            </a:extLst>
+          </p:cNvPr>
+          <p:cNvSpPr>
+            <a:spLocks xmlns:a="http://schemas.openxmlformats.org/drawingml/2006/main" noGrp="1"/>
+          </p:cNvSpPr>
+          <p:nvPr/>
+        </p:nvSpPr>
+        <p:spPr>
+          <a:xfrm xmlns:a="http://schemas.openxmlformats.org/drawingml/2006/main">
+            <a:off x="7791450" y="2219325"/>
+            <a:ext cx="762000" cy="228600"/>
+          </a:xfrm>
+          <a:prstGeom xmlns:a="http://schemas.openxmlformats.org/drawingml/2006/main" prst="rect">
+            <a:avLst/>
+          </a:prstGeom>
+          <a:noFill xmlns:a="http://schemas.openxmlformats.org/drawingml/2006/main"/>
+          <a:ln xmlns:a="http://schemas.openxmlformats.org/drawingml/2006/main" w="0">
+            <a:noFill/>
+            <a:prstDash val="solid"/>
+          </a:ln>
+        </p:spPr>
+        <p:txBody>
+          <a:bodyPr xmlns:a="http://schemas.openxmlformats.org/drawingml/2006/main"/>
+          <a:lstStyle xmlns:a="http://schemas.openxmlformats.org/drawingml/2006/main"/>
+          <a:p xmlns:a="http://schemas.openxmlformats.org/drawingml/2006/main">
+            <a:pPr algn="ctr">
+              <a:buNone/>
+              <a:defRPr sz="1200" b="1">
+                <a:solidFill>
+                  <a:srgbClr val="FFFFFF"/>
+                </a:solidFill>
+              </a:defRPr>
+            </a:pPr>
+            <a:r>
+              <a:rPr sz="1200" b="1">
+                <a:solidFill>
+                  <a:srgbClr val="FFFFFF"/>
+                </a:solidFill>
+              </a:rPr>
+              <a:t>Gather</a:t>
+            </a:r>
+          </a:p>
+        </p:txBody>
+      </p:sp>
+      <p:sp>
+        <p:nvSpPr>
+          <p:cNvPr id="23" name="">
+            <a:extLst xmlns:a="http://schemas.openxmlformats.org/drawingml/2006/main">
+              <a:ext uri="{FF2B5EF4-FFF2-40B4-BE49-F238E27FC236}">
+                <a16:creationId xmlns:a16="http://schemas.microsoft.com/office/drawing/2014/main" id="{1D1BF53F-5EE8-4092-9FB1-F7D25AFDBB54}"/>
+              </a:ext>
+            </a:extLst>
+          </p:cNvPr>
+          <p:cNvSpPr>
+            <a:spLocks xmlns:a="http://schemas.openxmlformats.org/drawingml/2006/main" noGrp="1"/>
+          </p:cNvSpPr>
+          <p:nvPr/>
+        </p:nvSpPr>
+        <p:spPr>
+          <a:xfrm xmlns:a="http://schemas.openxmlformats.org/drawingml/2006/main">
+            <a:off x="7677150" y="2609850"/>
+            <a:ext cx="1219200" cy="266700"/>
+          </a:xfrm>
+          <a:prstGeom xmlns:a="http://schemas.openxmlformats.org/drawingml/2006/main" prst="rect">
+            <a:avLst/>
+          </a:prstGeom>
+          <a:noFill xmlns:a="http://schemas.openxmlformats.org/drawingml/2006/main"/>
+          <a:ln xmlns:a="http://schemas.openxmlformats.org/drawingml/2006/main" w="0">
+            <a:noFill/>
+            <a:prstDash val="solid"/>
+          </a:ln>
+        </p:spPr>
+        <p:txBody>
+          <a:bodyPr xmlns:a="http://schemas.openxmlformats.org/drawingml/2006/main"/>
+          <a:lstStyle xmlns:a="http://schemas.openxmlformats.org/drawingml/2006/main"/>
+          <a:p xmlns:a="http://schemas.openxmlformats.org/drawingml/2006/main">
+            <a:pPr algn="ctr">
+              <a:buNone/>
+              <a:defRPr sz="1500" b="1">
+                <a:solidFill>
+                  <a:srgbClr val="020618"/>
+                </a:solidFill>
+              </a:defRPr>
+            </a:pPr>
+            <a:r>
+              <a:rPr sz="1500" b="1">
+                <a:solidFill>
+                  <a:srgbClr val="020618"/>
+                </a:solidFill>
+              </a:rPr>
+              <a:t>expand_x</a:t>
+            </a:r>
+          </a:p>
+        </p:txBody>
+      </p:sp>
+      <p:sp>
+        <p:nvSpPr>
+          <p:cNvPr id="24" name="">
+            <a:extLst xmlns:a="http://schemas.openxmlformats.org/drawingml/2006/main">
+              <a:ext uri="{FF2B5EF4-FFF2-40B4-BE49-F238E27FC236}">
+                <a16:creationId xmlns:a16="http://schemas.microsoft.com/office/drawing/2014/main" id="{4BC38609-0634-48BE-9D5A-CA28318B5301}"/>
+              </a:ext>
+            </a:extLst>
+          </p:cNvPr>
+          <p:cNvSpPr>
+            <a:spLocks xmlns:a="http://schemas.openxmlformats.org/drawingml/2006/main" noGrp="1"/>
+          </p:cNvSpPr>
+          <p:nvPr/>
+        </p:nvSpPr>
+        <p:spPr>
+          <a:xfrm xmlns:a="http://schemas.openxmlformats.org/drawingml/2006/main">
+            <a:off x="9182100" y="2381250"/>
+            <a:ext cx="400050" cy="247650"/>
+          </a:xfrm>
+          <a:prstGeom xmlns:a="http://schemas.openxmlformats.org/drawingml/2006/main" prst="rightArrow">
+            <a:avLst/>
+          </a:prstGeom>
+          <a:solidFill xmlns:a="http://schemas.openxmlformats.org/drawingml/2006/main">
+            <a:srgbClr val="CAD5E2"/>
+          </a:solidFill>
+          <a:ln xmlns:a="http://schemas.openxmlformats.org/drawingml/2006/main" w="0">
+            <a:solidFill>
+              <a:srgbClr val="CAD5E2"/>
+            </a:solidFill>
+            <a:prstDash val="solid"/>
+          </a:ln>
+        </p:spPr>
+      </p:sp>
+      <p:sp>
+        <p:nvSpPr>
+          <p:cNvPr id="25" name="">
+            <a:extLst xmlns:a="http://schemas.openxmlformats.org/drawingml/2006/main">
+              <a:ext uri="{FF2B5EF4-FFF2-40B4-BE49-F238E27FC236}">
+                <a16:creationId xmlns:a16="http://schemas.microsoft.com/office/drawing/2014/main" id="{4DB80B3C-7457-4F3E-8883-E727D60FD971}"/>
+              </a:ext>
+            </a:extLst>
+          </p:cNvPr>
+          <p:cNvSpPr>
+            <a:spLocks xmlns:a="http://schemas.openxmlformats.org/drawingml/2006/main" noGrp="1"/>
+          </p:cNvSpPr>
+          <p:nvPr/>
+        </p:nvSpPr>
+        <p:spPr>
+          <a:xfrm xmlns:a="http://schemas.openxmlformats.org/drawingml/2006/main">
+            <a:off x="9677400" y="1981200"/>
+            <a:ext cx="1600200" cy="1066800"/>
+          </a:xfrm>
+          <a:prstGeom xmlns:a="http://schemas.openxmlformats.org/drawingml/2006/main" prst="roundRect">
+            <a:avLst>
+              <a:gd name="adj" fmla="val 7143"/>
+            </a:avLst>
+          </a:prstGeom>
+          <a:solidFill xmlns:a="http://schemas.openxmlformats.org/drawingml/2006/main">
+            <a:srgbClr val="FFFFFF"/>
+          </a:solidFill>
+          <a:ln xmlns:a="http://schemas.openxmlformats.org/drawingml/2006/main" w="9525">
+            <a:solidFill>
+              <a:srgbClr val="E2E8F0"/>
+            </a:solidFill>
+            <a:prstDash val="solid"/>
+          </a:ln>
+        </p:spPr>
+      </p:sp>
+      <p:sp>
+        <p:nvSpPr>
+          <p:cNvPr id="26" name="">
+            <a:extLst xmlns:a="http://schemas.openxmlformats.org/drawingml/2006/main">
+              <a:ext uri="{FF2B5EF4-FFF2-40B4-BE49-F238E27FC236}">
+                <a16:creationId xmlns:a16="http://schemas.microsoft.com/office/drawing/2014/main" id="{37B99722-D90A-40E9-89B4-BA6EF2163671}"/>
+              </a:ext>
+            </a:extLst>
+          </p:cNvPr>
+          <p:cNvSpPr>
+            <a:spLocks xmlns:a="http://schemas.openxmlformats.org/drawingml/2006/main" noGrp="1"/>
+          </p:cNvSpPr>
+          <p:nvPr/>
+        </p:nvSpPr>
+        <p:spPr>
+          <a:xfrm xmlns:a="http://schemas.openxmlformats.org/drawingml/2006/main">
+            <a:off x="9906000" y="2171700"/>
+            <a:ext cx="914400" cy="304800"/>
+          </a:xfrm>
+          <a:prstGeom xmlns:a="http://schemas.openxmlformats.org/drawingml/2006/main" prst="roundRect">
+            <a:avLst>
+              <a:gd name="adj" fmla="val 25000"/>
+            </a:avLst>
+          </a:prstGeom>
+          <a:solidFill xmlns:a="http://schemas.openxmlformats.org/drawingml/2006/main">
+            <a:srgbClr val="DC2626"/>
+          </a:solidFill>
+          <a:ln xmlns:a="http://schemas.openxmlformats.org/drawingml/2006/main" w="0">
+            <a:solidFill>
+              <a:srgbClr val="DC2626"/>
+            </a:solidFill>
+            <a:prstDash val="solid"/>
+          </a:ln>
+        </p:spPr>
+      </p:sp>
+      <p:sp>
+        <p:nvSpPr>
+          <p:cNvPr id="27" name="">
+            <a:extLst xmlns:a="http://schemas.openxmlformats.org/drawingml/2006/main">
+              <a:ext uri="{FF2B5EF4-FFF2-40B4-BE49-F238E27FC236}">
+                <a16:creationId xmlns:a16="http://schemas.microsoft.com/office/drawing/2014/main" id="{2C96D399-FB35-4D17-AE3A-5DB580140B26}"/>
+              </a:ext>
+            </a:extLst>
+          </p:cNvPr>
+          <p:cNvSpPr>
+            <a:spLocks xmlns:a="http://schemas.openxmlformats.org/drawingml/2006/main" noGrp="1"/>
+          </p:cNvSpPr>
+          <p:nvPr/>
+        </p:nvSpPr>
+        <p:spPr>
+          <a:xfrm xmlns:a="http://schemas.openxmlformats.org/drawingml/2006/main">
+            <a:off x="9982200" y="2219325"/>
+            <a:ext cx="762000" cy="228600"/>
+          </a:xfrm>
+          <a:prstGeom xmlns:a="http://schemas.openxmlformats.org/drawingml/2006/main" prst="rect">
+            <a:avLst/>
+          </a:prstGeom>
+          <a:noFill xmlns:a="http://schemas.openxmlformats.org/drawingml/2006/main"/>
+          <a:ln xmlns:a="http://schemas.openxmlformats.org/drawingml/2006/main" w="0">
+            <a:noFill/>
+            <a:prstDash val="solid"/>
+          </a:ln>
+        </p:spPr>
+        <p:txBody>
+          <a:bodyPr xmlns:a="http://schemas.openxmlformats.org/drawingml/2006/main"/>
+          <a:lstStyle xmlns:a="http://schemas.openxmlformats.org/drawingml/2006/main"/>
+          <a:p xmlns:a="http://schemas.openxmlformats.org/drawingml/2006/main">
+            <a:pPr algn="ctr">
+              <a:buNone/>
+              <a:defRPr sz="1200" b="1">
+                <a:solidFill>
+                  <a:srgbClr val="FFFFFF"/>
+                </a:solidFill>
+              </a:defRPr>
+            </a:pPr>
+            <a:r>
+              <a:rPr sz="1200" b="1">
+                <a:solidFill>
+                  <a:srgbClr val="FFFFFF"/>
+                </a:solidFill>
+              </a:rPr>
+              <a:t>Done</a:t>
+            </a:r>
+          </a:p>
+        </p:txBody>
+      </p:sp>
+      <p:sp>
+        <p:nvSpPr>
+          <p:cNvPr id="28" name="">
+            <a:extLst xmlns:a="http://schemas.openxmlformats.org/drawingml/2006/main">
+              <a:ext uri="{FF2B5EF4-FFF2-40B4-BE49-F238E27FC236}">
+                <a16:creationId xmlns:a16="http://schemas.microsoft.com/office/drawing/2014/main" id="{22E33EF4-A63D-42D4-87DE-D05766683490}"/>
+              </a:ext>
+            </a:extLst>
+          </p:cNvPr>
+          <p:cNvSpPr>
+            <a:spLocks xmlns:a="http://schemas.openxmlformats.org/drawingml/2006/main" noGrp="1"/>
+          </p:cNvSpPr>
+          <p:nvPr/>
+        </p:nvSpPr>
+        <p:spPr>
+          <a:xfrm xmlns:a="http://schemas.openxmlformats.org/drawingml/2006/main">
+            <a:off x="9867900" y="2609850"/>
+            <a:ext cx="1219200" cy="266700"/>
+          </a:xfrm>
+          <a:prstGeom xmlns:a="http://schemas.openxmlformats.org/drawingml/2006/main" prst="rect">
+            <a:avLst/>
+          </a:prstGeom>
+          <a:noFill xmlns:a="http://schemas.openxmlformats.org/drawingml/2006/main"/>
+          <a:ln xmlns:a="http://schemas.openxmlformats.org/drawingml/2006/main" w="0">
+            <a:noFill/>
+            <a:prstDash val="solid"/>
+          </a:ln>
+        </p:spPr>
+        <p:txBody>
+          <a:bodyPr xmlns:a="http://schemas.openxmlformats.org/drawingml/2006/main"/>
+          <a:lstStyle xmlns:a="http://schemas.openxmlformats.org/drawingml/2006/main"/>
+          <a:p xmlns:a="http://schemas.openxmlformats.org/drawingml/2006/main">
+            <a:pPr algn="ctr">
+              <a:buNone/>
+              <a:defRPr sz="1500" b="1">
+                <a:solidFill>
+                  <a:srgbClr val="020618"/>
+                </a:solidFill>
+              </a:defRPr>
+            </a:pPr>
+            <a:r>
+              <a:rPr sz="1500" b="1">
+                <a:solidFill>
+                  <a:srgbClr val="020618"/>
+                </a:solidFill>
+              </a:rPr>
+              <a:t>finalize</a:t>
+            </a:r>
+          </a:p>
+        </p:txBody>
+      </p:sp>
+      <p:sp>
+        <p:nvSpPr>
+          <p:cNvPr id="29" name="">
+            <a:extLst xmlns:a="http://schemas.openxmlformats.org/drawingml/2006/main">
+              <a:ext uri="{FF2B5EF4-FFF2-40B4-BE49-F238E27FC236}">
+                <a16:creationId xmlns:a16="http://schemas.microsoft.com/office/drawing/2014/main" id="{E9B3CC1E-63D8-498F-9298-FFEF8464C713}"/>
+              </a:ext>
+            </a:extLst>
+          </p:cNvPr>
+          <p:cNvSpPr>
+            <a:spLocks xmlns:a="http://schemas.openxmlformats.org/drawingml/2006/main" noGrp="1"/>
+          </p:cNvSpPr>
+          <p:nvPr/>
+        </p:nvSpPr>
+        <p:spPr>
+          <a:xfrm xmlns:a="http://schemas.openxmlformats.org/drawingml/2006/main">
+            <a:off x="781050" y="3886200"/>
+            <a:ext cx="3219450" cy="1504950"/>
+          </a:xfrm>
+          <a:prstGeom xmlns:a="http://schemas.openxmlformats.org/drawingml/2006/main" prst="roundRect">
+            <a:avLst>
+              <a:gd name="adj" fmla="val 5063"/>
+            </a:avLst>
+          </a:prstGeom>
+          <a:solidFill xmlns:a="http://schemas.openxmlformats.org/drawingml/2006/main">
+            <a:srgbClr val="FFFFFF"/>
+          </a:solidFill>
+          <a:ln xmlns:a="http://schemas.openxmlformats.org/drawingml/2006/main" w="9525">
+            <a:solidFill>
+              <a:srgbClr val="E2E8F0"/>
+            </a:solidFill>
+            <a:prstDash val="solid"/>
+          </a:ln>
+        </p:spPr>
+      </p:sp>
+      <p:sp>
+        <p:nvSpPr>
+          <p:cNvPr id="30" name="">
+            <a:extLst xmlns:a="http://schemas.openxmlformats.org/drawingml/2006/main">
+              <a:ext uri="{FF2B5EF4-FFF2-40B4-BE49-F238E27FC236}">
+                <a16:creationId xmlns:a16="http://schemas.microsoft.com/office/drawing/2014/main" id="{FF5B00C5-8D99-438B-9919-1E90ED9B0E21}"/>
+              </a:ext>
+            </a:extLst>
+          </p:cNvPr>
+          <p:cNvSpPr>
+            <a:spLocks xmlns:a="http://schemas.openxmlformats.org/drawingml/2006/main" noGrp="1"/>
+          </p:cNvSpPr>
+          <p:nvPr/>
+        </p:nvSpPr>
+        <p:spPr>
+          <a:xfrm xmlns:a="http://schemas.openxmlformats.org/drawingml/2006/main">
+            <a:off x="1066800" y="4114800"/>
+            <a:ext cx="1714500" cy="266700"/>
+          </a:xfrm>
+          <a:prstGeom xmlns:a="http://schemas.openxmlformats.org/drawingml/2006/main" prst="rect">
+            <a:avLst/>
+          </a:prstGeom>
+          <a:noFill xmlns:a="http://schemas.openxmlformats.org/drawingml/2006/main"/>
+          <a:ln xmlns:a="http://schemas.openxmlformats.org/drawingml/2006/main" w="0">
+            <a:noFill/>
+            <a:prstDash val="solid"/>
+          </a:ln>
+        </p:spPr>
+        <p:txBody>
+          <a:bodyPr xmlns:a="http://schemas.openxmlformats.org/drawingml/2006/main"/>
+          <a:lstStyle xmlns:a="http://schemas.openxmlformats.org/drawingml/2006/main"/>
+          <a:p xmlns:a="http://schemas.openxmlformats.org/drawingml/2006/main">
+            <a:pPr algn="l">
+              <a:buNone/>
+              <a:defRPr sz="1650" b="1">
+                <a:solidFill>
+                  <a:srgbClr val="020618"/>
+                </a:solidFill>
+              </a:defRPr>
+            </a:pPr>
+            <a:r>
+              <a:rPr sz="1650" b="1">
+                <a:solidFill>
+                  <a:srgbClr val="020618"/>
+                </a:solidFill>
+              </a:rPr>
+              <a:t>Scatter</a:t>
+            </a:r>
+          </a:p>
+        </p:txBody>
+      </p:sp>
+      <p:sp>
+        <p:nvSpPr>
+          <p:cNvPr id="31" name="">
+            <a:extLst xmlns:a="http://schemas.openxmlformats.org/drawingml/2006/main">
+              <a:ext uri="{FF2B5EF4-FFF2-40B4-BE49-F238E27FC236}">
+                <a16:creationId xmlns:a16="http://schemas.microsoft.com/office/drawing/2014/main" id="{17EC6BBD-F82E-45F1-9C4E-1E2D905A44E1}"/>
+              </a:ext>
+            </a:extLst>
+          </p:cNvPr>
+          <p:cNvSpPr>
+            <a:spLocks xmlns:a="http://schemas.openxmlformats.org/drawingml/2006/main" noGrp="1"/>
+          </p:cNvSpPr>
+          <p:nvPr/>
+        </p:nvSpPr>
+        <p:spPr>
+          <a:xfrm xmlns:a="http://schemas.openxmlformats.org/drawingml/2006/main">
+            <a:off x="1066800" y="4533900"/>
+            <a:ext cx="2381250" cy="666750"/>
+          </a:xfrm>
+          <a:prstGeom xmlns:a="http://schemas.openxmlformats.org/drawingml/2006/main" prst="rect">
+            <a:avLst/>
+          </a:prstGeom>
+          <a:noFill xmlns:a="http://schemas.openxmlformats.org/drawingml/2006/main"/>
+          <a:ln xmlns:a="http://schemas.openxmlformats.org/drawingml/2006/main" w="0">
+            <a:noFill/>
+            <a:prstDash val="solid"/>
+          </a:ln>
+        </p:spPr>
+        <p:txBody>
+          <a:bodyPr xmlns:a="http://schemas.openxmlformats.org/drawingml/2006/main"/>
+          <a:lstStyle xmlns:a="http://schemas.openxmlformats.org/drawingml/2006/main"/>
+          <a:p xmlns:a="http://schemas.openxmlformats.org/drawingml/2006/main">
+            <a:pPr algn="l">
+              <a:buNone/>
+              <a:defRPr sz="1350" b="0">
+                <a:solidFill>
+                  <a:srgbClr val="45556C"/>
+                </a:solidFill>
+              </a:defRPr>
+            </a:pPr>
+            <a:r>
+              <a:rPr sz="1350" b="0">
+                <a:solidFill>
+                  <a:srgbClr val="45556C"/>
+                </a:solidFill>
+              </a:rPr>
+              <a:t>sort expert_ids</a:t>
+            </a:r>
+          </a:p>
+          <a:p xmlns:a="http://schemas.openxmlformats.org/drawingml/2006/main">
+            <a:pPr algn="l">
+              <a:buNone/>
+              <a:defRPr sz="1350" b="0">
+                <a:solidFill>
+                  <a:srgbClr val="45556C"/>
+                </a:solidFill>
+              </a:defRPr>
+            </a:pPr>
+            <a:r>
+              <a:rPr sz="1350" b="0">
+                <a:solidFill>
+                  <a:srgbClr val="45556C"/>
+                </a:solidFill>
+              </a:rPr>
+              <a:t>freq / cumsum</a:t>
+            </a:r>
+          </a:p>
+          <a:p xmlns:a="http://schemas.openxmlformats.org/drawingml/2006/main">
+            <a:pPr algn="l">
+              <a:buNone/>
+              <a:defRPr sz="1350" b="0">
+                <a:solidFill>
+                  <a:srgbClr val="45556C"/>
+                </a:solidFill>
+              </a:defRPr>
+            </a:pPr>
+            <a:r>
+              <a:rPr sz="1350" b="0">
+                <a:solidFill>
+                  <a:srgbClr val="45556C"/>
+                </a:solidFill>
+              </a:rPr>
+              <a:t>按目标 rank 打包 token</a:t>
+            </a:r>
+          </a:p>
+        </p:txBody>
+      </p:sp>
+      <p:sp>
+        <p:nvSpPr>
+          <p:cNvPr id="32" name="">
+            <a:extLst xmlns:a="http://schemas.openxmlformats.org/drawingml/2006/main">
+              <a:ext uri="{FF2B5EF4-FFF2-40B4-BE49-F238E27FC236}">
+                <a16:creationId xmlns:a16="http://schemas.microsoft.com/office/drawing/2014/main" id="{4883D523-7606-47A5-B348-F3A6E748E277}"/>
+              </a:ext>
+            </a:extLst>
+          </p:cNvPr>
+          <p:cNvSpPr>
+            <a:spLocks xmlns:a="http://schemas.openxmlformats.org/drawingml/2006/main" noGrp="1"/>
+          </p:cNvSpPr>
+          <p:nvPr/>
+        </p:nvSpPr>
+        <p:spPr>
+          <a:xfrm xmlns:a="http://schemas.openxmlformats.org/drawingml/2006/main">
+            <a:off x="4476750" y="3886200"/>
+            <a:ext cx="3219450" cy="1504950"/>
+          </a:xfrm>
+          <a:prstGeom xmlns:a="http://schemas.openxmlformats.org/drawingml/2006/main" prst="roundRect">
+            <a:avLst>
+              <a:gd name="adj" fmla="val 5063"/>
+            </a:avLst>
+          </a:prstGeom>
+          <a:solidFill xmlns:a="http://schemas.openxmlformats.org/drawingml/2006/main">
+            <a:srgbClr val="FFFFFF"/>
+          </a:solidFill>
+          <a:ln xmlns:a="http://schemas.openxmlformats.org/drawingml/2006/main" w="9525">
+            <a:solidFill>
+              <a:srgbClr val="E2E8F0"/>
+            </a:solidFill>
+            <a:prstDash val="solid"/>
+          </a:ln>
+        </p:spPr>
+      </p:sp>
+      <p:sp>
+        <p:nvSpPr>
+          <p:cNvPr id="33" name="">
+            <a:extLst xmlns:a="http://schemas.openxmlformats.org/drawingml/2006/main">
+              <a:ext uri="{FF2B5EF4-FFF2-40B4-BE49-F238E27FC236}">
+                <a16:creationId xmlns:a16="http://schemas.microsoft.com/office/drawing/2014/main" id="{5D917E78-81A4-4EC5-92E2-DCD332F09603}"/>
+              </a:ext>
+            </a:extLst>
+          </p:cNvPr>
+          <p:cNvSpPr>
+            <a:spLocks xmlns:a="http://schemas.openxmlformats.org/drawingml/2006/main" noGrp="1"/>
+          </p:cNvSpPr>
+          <p:nvPr/>
+        </p:nvSpPr>
+        <p:spPr>
+          <a:xfrm xmlns:a="http://schemas.openxmlformats.org/drawingml/2006/main">
+            <a:off x="4762500" y="4114800"/>
+            <a:ext cx="2095500" cy="266700"/>
+          </a:xfrm>
+          <a:prstGeom xmlns:a="http://schemas.openxmlformats.org/drawingml/2006/main" prst="rect">
+            <a:avLst/>
+          </a:prstGeom>
+          <a:noFill xmlns:a="http://schemas.openxmlformats.org/drawingml/2006/main"/>
+          <a:ln xmlns:a="http://schemas.openxmlformats.org/drawingml/2006/main" w="0">
+            <a:noFill/>
+            <a:prstDash val="solid"/>
+          </a:ln>
+        </p:spPr>
+        <p:txBody>
+          <a:bodyPr xmlns:a="http://schemas.openxmlformats.org/drawingml/2006/main"/>
+          <a:lstStyle xmlns:a="http://schemas.openxmlformats.org/drawingml/2006/main"/>
+          <a:p xmlns:a="http://schemas.openxmlformats.org/drawingml/2006/main">
+            <a:pPr algn="l">
+              <a:buNone/>
+              <a:defRPr sz="1650" b="1">
+                <a:solidFill>
+                  <a:srgbClr val="020618"/>
+                </a:solidFill>
+              </a:defRPr>
+            </a:pPr>
+            <a:r>
+              <a:rPr sz="1650" b="1">
+                <a:solidFill>
+                  <a:srgbClr val="020618"/>
+                </a:solidFill>
+              </a:rPr>
+              <a:t>Communication</a:t>
+            </a:r>
+          </a:p>
+        </p:txBody>
+      </p:sp>
+      <p:sp>
+        <p:nvSpPr>
+          <p:cNvPr id="34" name="">
+            <a:extLst xmlns:a="http://schemas.openxmlformats.org/drawingml/2006/main">
+              <a:ext uri="{FF2B5EF4-FFF2-40B4-BE49-F238E27FC236}">
+                <a16:creationId xmlns:a16="http://schemas.microsoft.com/office/drawing/2014/main" id="{B39B58E7-CDE9-41C6-A526-A79095125137}"/>
+              </a:ext>
+            </a:extLst>
+          </p:cNvPr>
+          <p:cNvSpPr>
+            <a:spLocks xmlns:a="http://schemas.openxmlformats.org/drawingml/2006/main" noGrp="1"/>
+          </p:cNvSpPr>
+          <p:nvPr/>
+        </p:nvSpPr>
+        <p:spPr>
+          <a:xfrm xmlns:a="http://schemas.openxmlformats.org/drawingml/2006/main">
+            <a:off x="4762500" y="4533900"/>
+            <a:ext cx="2476500" cy="666750"/>
+          </a:xfrm>
+          <a:prstGeom xmlns:a="http://schemas.openxmlformats.org/drawingml/2006/main" prst="rect">
+            <a:avLst/>
+          </a:prstGeom>
+          <a:noFill xmlns:a="http://schemas.openxmlformats.org/drawingml/2006/main"/>
+          <a:ln xmlns:a="http://schemas.openxmlformats.org/drawingml/2006/main" w="0">
+            <a:noFill/>
+            <a:prstDash val="solid"/>
+          </a:ln>
+        </p:spPr>
+        <p:txBody>
+          <a:bodyPr xmlns:a="http://schemas.openxmlformats.org/drawingml/2006/main"/>
+          <a:lstStyle xmlns:a="http://schemas.openxmlformats.org/drawingml/2006/main"/>
+          <a:p xmlns:a="http://schemas.openxmlformats.org/drawingml/2006/main">
+            <a:pPr algn="l">
+              <a:buNone/>
+              <a:defRPr sz="1350" b="0">
+                <a:solidFill>
+                  <a:srgbClr val="45556C"/>
+                </a:solidFill>
+              </a:defRPr>
+            </a:pPr>
+            <a:r>
+              <a:rPr sz="1350" b="0">
+                <a:solidFill>
+                  <a:srgbClr val="45556C"/>
+                </a:solidFill>
+              </a:rPr>
+              <a:t>AIV0 发起 HCCL</a:t>
+            </a:r>
+          </a:p>
+          <a:p xmlns:a="http://schemas.openxmlformats.org/drawingml/2006/main">
+            <a:pPr algn="l">
+              <a:buNone/>
+              <a:defRPr sz="1350" b="0">
+                <a:solidFill>
+                  <a:srgbClr val="45556C"/>
+                </a:solidFill>
+              </a:defRPr>
+            </a:pPr>
+            <a:r>
+              <a:rPr sz="1350" b="0">
+                <a:solidFill>
+                  <a:srgbClr val="45556C"/>
+                </a:solidFill>
+              </a:rPr>
+              <a:t>其他 AIV 生成 expandIdx</a:t>
+            </a:r>
+          </a:p>
+          <a:p xmlns:a="http://schemas.openxmlformats.org/drawingml/2006/main">
+            <a:pPr algn="l">
+              <a:buNone/>
+              <a:defRPr sz="1350" b="0">
+                <a:solidFill>
+                  <a:srgbClr val="45556C"/>
+                </a:solidFill>
+              </a:defRPr>
+            </a:pPr>
+            <a:r>
+              <a:rPr sz="1350" b="0">
+                <a:solidFill>
+                  <a:srgbClr val="45556C"/>
+                </a:solidFill>
+              </a:rPr>
+              <a:t>并初始化 gather buffer</a:t>
+            </a:r>
+          </a:p>
+        </p:txBody>
+      </p:sp>
+      <p:sp>
+        <p:nvSpPr>
+          <p:cNvPr id="35" name="">
+            <a:extLst xmlns:a="http://schemas.openxmlformats.org/drawingml/2006/main">
+              <a:ext uri="{FF2B5EF4-FFF2-40B4-BE49-F238E27FC236}">
+                <a16:creationId xmlns:a16="http://schemas.microsoft.com/office/drawing/2014/main" id="{AC1B554D-29C0-4933-AE88-7C75B5D350BB}"/>
+              </a:ext>
+            </a:extLst>
+          </p:cNvPr>
+          <p:cNvSpPr>
+            <a:spLocks xmlns:a="http://schemas.openxmlformats.org/drawingml/2006/main" noGrp="1"/>
+          </p:cNvSpPr>
+          <p:nvPr/>
+        </p:nvSpPr>
+        <p:spPr>
+          <a:xfrm xmlns:a="http://schemas.openxmlformats.org/drawingml/2006/main">
+            <a:off x="8172450" y="3886200"/>
+            <a:ext cx="3219450" cy="1504950"/>
+          </a:xfrm>
+          <a:prstGeom xmlns:a="http://schemas.openxmlformats.org/drawingml/2006/main" prst="roundRect">
+            <a:avLst>
+              <a:gd name="adj" fmla="val 5063"/>
+            </a:avLst>
+          </a:prstGeom>
+          <a:solidFill xmlns:a="http://schemas.openxmlformats.org/drawingml/2006/main">
+            <a:srgbClr val="FFFFFF"/>
+          </a:solidFill>
+          <a:ln xmlns:a="http://schemas.openxmlformats.org/drawingml/2006/main" w="9525">
+            <a:solidFill>
+              <a:srgbClr val="E2E8F0"/>
+            </a:solidFill>
+            <a:prstDash val="solid"/>
+          </a:ln>
+        </p:spPr>
+      </p:sp>
+      <p:sp>
+        <p:nvSpPr>
+          <p:cNvPr id="36" name="">
+            <a:extLst xmlns:a="http://schemas.openxmlformats.org/drawingml/2006/main">
+              <a:ext uri="{FF2B5EF4-FFF2-40B4-BE49-F238E27FC236}">
+                <a16:creationId xmlns:a16="http://schemas.microsoft.com/office/drawing/2014/main" id="{3DFCDC08-9D4E-4BA3-99A6-C4539928633E}"/>
+              </a:ext>
+            </a:extLst>
+          </p:cNvPr>
+          <p:cNvSpPr>
+            <a:spLocks xmlns:a="http://schemas.openxmlformats.org/drawingml/2006/main" noGrp="1"/>
+          </p:cNvSpPr>
+          <p:nvPr/>
+        </p:nvSpPr>
+        <p:spPr>
+          <a:xfrm xmlns:a="http://schemas.openxmlformats.org/drawingml/2006/main">
+            <a:off x="8458200" y="4114800"/>
+            <a:ext cx="1714500" cy="266700"/>
+          </a:xfrm>
+          <a:prstGeom xmlns:a="http://schemas.openxmlformats.org/drawingml/2006/main" prst="rect">
+            <a:avLst/>
+          </a:prstGeom>
+          <a:noFill xmlns:a="http://schemas.openxmlformats.org/drawingml/2006/main"/>
+          <a:ln xmlns:a="http://schemas.openxmlformats.org/drawingml/2006/main" w="0">
+            <a:noFill/>
+            <a:prstDash val="solid"/>
+          </a:ln>
+        </p:spPr>
+        <p:txBody>
+          <a:bodyPr xmlns:a="http://schemas.openxmlformats.org/drawingml/2006/main"/>
+          <a:lstStyle xmlns:a="http://schemas.openxmlformats.org/drawingml/2006/main"/>
+          <a:p xmlns:a="http://schemas.openxmlformats.org/drawingml/2006/main">
+            <a:pPr algn="l">
+              <a:buNone/>
+              <a:defRPr sz="1650" b="1">
+                <a:solidFill>
+                  <a:srgbClr val="020618"/>
+                </a:solidFill>
+              </a:defRPr>
+            </a:pPr>
+            <a:r>
+              <a:rPr sz="1650" b="1">
+                <a:solidFill>
+                  <a:srgbClr val="020618"/>
+                </a:solidFill>
+              </a:rPr>
+              <a:t>Gather</a:t>
+            </a:r>
+          </a:p>
+        </p:txBody>
+      </p:sp>
+      <p:sp>
+        <p:nvSpPr>
+          <p:cNvPr id="37" name="">
+            <a:extLst xmlns:a="http://schemas.openxmlformats.org/drawingml/2006/main">
+              <a:ext uri="{FF2B5EF4-FFF2-40B4-BE49-F238E27FC236}">
+                <a16:creationId xmlns:a16="http://schemas.microsoft.com/office/drawing/2014/main" id="{242FA092-CE11-4CA5-91A0-9F2C053A6968}"/>
+              </a:ext>
+            </a:extLst>
+          </p:cNvPr>
+          <p:cNvSpPr>
+            <a:spLocks xmlns:a="http://schemas.openxmlformats.org/drawingml/2006/main" noGrp="1"/>
+          </p:cNvSpPr>
+          <p:nvPr/>
+        </p:nvSpPr>
+        <p:spPr>
+          <a:xfrm xmlns:a="http://schemas.openxmlformats.org/drawingml/2006/main">
+            <a:off x="8458200" y="4533900"/>
+            <a:ext cx="2476500" cy="666750"/>
+          </a:xfrm>
+          <a:prstGeom xmlns:a="http://schemas.openxmlformats.org/drawingml/2006/main" prst="rect">
+            <a:avLst/>
+          </a:prstGeom>
+          <a:noFill xmlns:a="http://schemas.openxmlformats.org/drawingml/2006/main"/>
+          <a:ln xmlns:a="http://schemas.openxmlformats.org/drawingml/2006/main" w="0">
+            <a:noFill/>
+            <a:prstDash val="solid"/>
+          </a:ln>
+        </p:spPr>
+        <p:txBody>
+          <a:bodyPr xmlns:a="http://schemas.openxmlformats.org/drawingml/2006/main"/>
+          <a:lstStyle xmlns:a="http://schemas.openxmlformats.org/drawingml/2006/main"/>
+          <a:p xmlns:a="http://schemas.openxmlformats.org/drawingml/2006/main">
+            <a:pPr algn="l">
+              <a:buNone/>
+              <a:defRPr sz="1350" b="0">
+                <a:solidFill>
+                  <a:srgbClr val="45556C"/>
+                </a:solidFill>
+              </a:defRPr>
+            </a:pPr>
+            <a:r>
+              <a:rPr sz="1350" b="0">
+                <a:solidFill>
+                  <a:srgbClr val="45556C"/>
+                </a:solidFill>
+              </a:rPr>
+              <a:t>recvBuf -&gt; expand_x</a:t>
+            </a:r>
+          </a:p>
+          <a:p xmlns:a="http://schemas.openxmlformats.org/drawingml/2006/main">
+            <a:pPr algn="l">
+              <a:buNone/>
+              <a:defRPr sz="1350" b="0">
+                <a:solidFill>
+                  <a:srgbClr val="45556C"/>
+                </a:solidFill>
+              </a:defRPr>
+            </a:pPr>
+            <a:r>
+              <a:rPr sz="1350" b="0">
+                <a:solidFill>
+                  <a:srgbClr val="45556C"/>
+                </a:solidFill>
+              </a:rPr>
+              <a:t>scale tail -&gt; dynamic_scales</a:t>
+            </a:r>
+          </a:p>
+          <a:p xmlns:a="http://schemas.openxmlformats.org/drawingml/2006/main">
+            <a:pPr algn="l">
+              <a:buNone/>
+              <a:defRPr sz="1350" b="0">
+                <a:solidFill>
+                  <a:srgbClr val="45556C"/>
+                </a:solidFill>
+              </a:defRPr>
+            </a:pPr>
+            <a:r>
+              <a:rPr sz="1350" b="0">
+                <a:solidFill>
+                  <a:srgbClr val="45556C"/>
+                </a:solidFill>
+              </a:rPr>
+              <a:t>统计 expert_token_nums</a:t>
+            </a:r>
+          </a:p>
+        </p:txBody>
+      </p:sp>
+    </p:spTree>
+    <p:extLst>
+      <p:ext uri="{BB962C8B-B14F-4D97-AF65-F5344CB8AC3E}">
+        <p14:creationId xmlns:p14="http://schemas.microsoft.com/office/powerpoint/2010/main" val="1614286625"/>
       </p:ext>
     </p:extLst>
   </p:cSld>
@@ -3517,6 +7081,7 @@
           <a:lstStyle xmlns:a="http://schemas.openxmlformats.org/drawingml/2006/main"/>
           <a:p xmlns:a="http://schemas.openxmlformats.org/drawingml/2006/main">
             <a:pPr algn="l">
+              <a:buNone/>
               <a:defRPr sz="2550" b="1">
                 <a:solidFill>
                   <a:srgbClr val="111827"/>
@@ -3573,6 +7138,7 @@
           <a:lstStyle xmlns:a="http://schemas.openxmlformats.org/drawingml/2006/main"/>
           <a:p xmlns:a="http://schemas.openxmlformats.org/drawingml/2006/main">
             <a:pPr algn="l">
+              <a:buNone/>
               <a:defRPr sz="1050" b="0">
                 <a:solidFill>
                   <a:srgbClr val="5B6472"/>
@@ -3629,6 +7195,7 @@
           <a:lstStyle xmlns:a="http://schemas.openxmlformats.org/drawingml/2006/main"/>
           <a:p xmlns:a="http://schemas.openxmlformats.org/drawingml/2006/main">
             <a:pPr algn="r">
+              <a:buNone/>
               <a:defRPr sz="900" b="0">
                 <a:solidFill>
                   <a:srgbClr val="5B6472"/>
@@ -3720,6 +7287,7 @@
           <a:lstStyle xmlns:a="http://schemas.openxmlformats.org/drawingml/2006/main"/>
           <a:p xmlns:a="http://schemas.openxmlformats.org/drawingml/2006/main">
             <a:pPr algn="l">
+              <a:buNone/>
               <a:defRPr sz="1800" b="1">
                 <a:solidFill>
                   <a:srgbClr val="0F766E"/>
@@ -3776,6 +7344,7 @@
           <a:lstStyle xmlns:a="http://schemas.openxmlformats.org/drawingml/2006/main"/>
           <a:p xmlns:a="http://schemas.openxmlformats.org/drawingml/2006/main">
             <a:pPr algn="l">
+              <a:buNone/>
               <a:defRPr sz="1575" b="0">
                 <a:solidFill>
                   <a:srgbClr val="111827"/>
@@ -3867,6 +7436,7 @@
           <a:lstStyle xmlns:a="http://schemas.openxmlformats.org/drawingml/2006/main"/>
           <a:p xmlns:a="http://schemas.openxmlformats.org/drawingml/2006/main">
             <a:pPr algn="l">
+              <a:buNone/>
               <a:defRPr sz="1800" b="1">
                 <a:solidFill>
                   <a:srgbClr val="2563EB"/>
@@ -3923,6 +7493,7 @@
           <a:lstStyle xmlns:a="http://schemas.openxmlformats.org/drawingml/2006/main"/>
           <a:p xmlns:a="http://schemas.openxmlformats.org/drawingml/2006/main">
             <a:pPr algn="l">
+              <a:buNone/>
               <a:defRPr sz="1575" b="0">
                 <a:solidFill>
                   <a:srgbClr val="111827"/>
@@ -4014,6 +7585,7 @@
           <a:lstStyle xmlns:a="http://schemas.openxmlformats.org/drawingml/2006/main"/>
           <a:p xmlns:a="http://schemas.openxmlformats.org/drawingml/2006/main">
             <a:pPr algn="l">
+              <a:buNone/>
               <a:defRPr sz="1800" b="1">
                 <a:solidFill>
                   <a:srgbClr val="B7791F"/>
@@ -4070,6 +7642,7 @@
           <a:lstStyle xmlns:a="http://schemas.openxmlformats.org/drawingml/2006/main"/>
           <a:p xmlns:a="http://schemas.openxmlformats.org/drawingml/2006/main">
             <a:pPr algn="l">
+              <a:buNone/>
               <a:defRPr sz="1575" b="0">
                 <a:solidFill>
                   <a:srgbClr val="111827"/>
@@ -4161,6 +7734,7 @@
           <a:lstStyle xmlns:a="http://schemas.openxmlformats.org/drawingml/2006/main"/>
           <a:p xmlns:a="http://schemas.openxmlformats.org/drawingml/2006/main">
             <a:pPr algn="l">
+              <a:buNone/>
               <a:defRPr sz="1800" b="1">
                 <a:solidFill>
                   <a:srgbClr val="BE3455"/>
@@ -4217,6 +7791,7 @@
           <a:lstStyle xmlns:a="http://schemas.openxmlformats.org/drawingml/2006/main"/>
           <a:p xmlns:a="http://schemas.openxmlformats.org/drawingml/2006/main">
             <a:pPr algn="l">
+              <a:buNone/>
               <a:defRPr sz="1575" b="0">
                 <a:solidFill>
                   <a:srgbClr val="111827"/>
@@ -4273,6 +7848,7 @@
           <a:lstStyle xmlns:a="http://schemas.openxmlformats.org/drawingml/2006/main"/>
           <a:p xmlns:a="http://schemas.openxmlformats.org/drawingml/2006/main">
             <a:pPr algn="r">
+              <a:buNone/>
               <a:defRPr sz="900" b="0">
                 <a:solidFill>
                   <a:srgbClr val="5B6472"/>
@@ -4358,6 +7934,7 @@
           <a:lstStyle xmlns:a="http://schemas.openxmlformats.org/drawingml/2006/main"/>
           <a:p xmlns:a="http://schemas.openxmlformats.org/drawingml/2006/main">
             <a:pPr algn="l">
+              <a:buNone/>
               <a:defRPr sz="2550" b="1">
                 <a:solidFill>
                   <a:srgbClr val="111827"/>
@@ -4414,6 +7991,7 @@
           <a:lstStyle xmlns:a="http://schemas.openxmlformats.org/drawingml/2006/main"/>
           <a:p xmlns:a="http://schemas.openxmlformats.org/drawingml/2006/main">
             <a:pPr algn="l">
+              <a:buNone/>
               <a:defRPr sz="1050" b="0">
                 <a:solidFill>
                   <a:srgbClr val="5B6472"/>
@@ -4470,6 +8048,7 @@
           <a:lstStyle xmlns:a="http://schemas.openxmlformats.org/drawingml/2006/main"/>
           <a:p xmlns:a="http://schemas.openxmlformats.org/drawingml/2006/main">
             <a:pPr algn="r">
+              <a:buNone/>
               <a:defRPr sz="900" b="0">
                 <a:solidFill>
                   <a:srgbClr val="5B6472"/>
@@ -4561,6 +8140,7 @@
           <a:lstStyle xmlns:a="http://schemas.openxmlformats.org/drawingml/2006/main"/>
           <a:p xmlns:a="http://schemas.openxmlformats.org/drawingml/2006/main">
             <a:pPr algn="ctr">
+              <a:buNone/>
               <a:defRPr sz="1575" b="1">
                 <a:solidFill>
                   <a:srgbClr val="0F766E"/>
@@ -4617,6 +8197,7 @@
           <a:lstStyle xmlns:a="http://schemas.openxmlformats.org/drawingml/2006/main"/>
           <a:p xmlns:a="http://schemas.openxmlformats.org/drawingml/2006/main">
             <a:pPr algn="ctr">
+              <a:buNone/>
               <a:defRPr sz="1050" b="0">
                 <a:solidFill>
                   <a:srgbClr val="5B6472"/>
@@ -4708,6 +8289,7 @@
           <a:lstStyle xmlns:a="http://schemas.openxmlformats.org/drawingml/2006/main"/>
           <a:p xmlns:a="http://schemas.openxmlformats.org/drawingml/2006/main">
             <a:pPr algn="ctr">
+              <a:buNone/>
               <a:defRPr sz="1575" b="1">
                 <a:solidFill>
                   <a:srgbClr val="2563EB"/>
@@ -4764,6 +8346,7 @@
           <a:lstStyle xmlns:a="http://schemas.openxmlformats.org/drawingml/2006/main"/>
           <a:p xmlns:a="http://schemas.openxmlformats.org/drawingml/2006/main">
             <a:pPr algn="ctr">
+              <a:buNone/>
               <a:defRPr sz="1050" b="0">
                 <a:solidFill>
                   <a:srgbClr val="5B6472"/>
@@ -4855,6 +8438,7 @@
           <a:lstStyle xmlns:a="http://schemas.openxmlformats.org/drawingml/2006/main"/>
           <a:p xmlns:a="http://schemas.openxmlformats.org/drawingml/2006/main">
             <a:pPr algn="ctr">
+              <a:buNone/>
               <a:defRPr sz="1575" b="1">
                 <a:solidFill>
                   <a:srgbClr val="B7791F"/>
@@ -4911,6 +8495,7 @@
           <a:lstStyle xmlns:a="http://schemas.openxmlformats.org/drawingml/2006/main"/>
           <a:p xmlns:a="http://schemas.openxmlformats.org/drawingml/2006/main">
             <a:pPr algn="ctr">
+              <a:buNone/>
               <a:defRPr sz="1050" b="0">
                 <a:solidFill>
                   <a:srgbClr val="5B6472"/>
@@ -5002,6 +8587,7 @@
           <a:lstStyle xmlns:a="http://schemas.openxmlformats.org/drawingml/2006/main"/>
           <a:p xmlns:a="http://schemas.openxmlformats.org/drawingml/2006/main">
             <a:pPr algn="ctr">
+              <a:buNone/>
               <a:defRPr sz="1575" b="1">
                 <a:solidFill>
                   <a:srgbClr val="2F855A"/>
@@ -5058,6 +8644,7 @@
           <a:lstStyle xmlns:a="http://schemas.openxmlformats.org/drawingml/2006/main"/>
           <a:p xmlns:a="http://schemas.openxmlformats.org/drawingml/2006/main">
             <a:pPr algn="ctr">
+              <a:buNone/>
               <a:defRPr sz="1050" b="0">
                 <a:solidFill>
                   <a:srgbClr val="5B6472"/>
@@ -5149,6 +8736,7 @@
           <a:lstStyle xmlns:a="http://schemas.openxmlformats.org/drawingml/2006/main"/>
           <a:p xmlns:a="http://schemas.openxmlformats.org/drawingml/2006/main">
             <a:pPr algn="ctr">
+              <a:buNone/>
               <a:defRPr sz="1575" b="1">
                 <a:solidFill>
                   <a:srgbClr val="BE3455"/>
@@ -5205,6 +8793,7 @@
           <a:lstStyle xmlns:a="http://schemas.openxmlformats.org/drawingml/2006/main"/>
           <a:p xmlns:a="http://schemas.openxmlformats.org/drawingml/2006/main">
             <a:pPr algn="ctr">
+              <a:buNone/>
               <a:defRPr sz="1050" b="0">
                 <a:solidFill>
                   <a:srgbClr val="5B6472"/>
@@ -5428,6 +9017,7 @@
           <a:lstStyle xmlns:a="http://schemas.openxmlformats.org/drawingml/2006/main"/>
           <a:p xmlns:a="http://schemas.openxmlformats.org/drawingml/2006/main">
             <a:pPr algn="l">
+              <a:buNone/>
               <a:defRPr sz="1650" b="1">
                 <a:solidFill>
                   <a:srgbClr val="0F766E"/>
@@ -5484,6 +9074,7 @@
           <a:lstStyle xmlns:a="http://schemas.openxmlformats.org/drawingml/2006/main"/>
           <a:p xmlns:a="http://schemas.openxmlformats.org/drawingml/2006/main">
             <a:pPr algn="l">
+              <a:buNone/>
               <a:defRPr sz="1650" b="1">
                 <a:solidFill>
                   <a:srgbClr val="BE3455"/>
@@ -5540,6 +9131,7 @@
           <a:lstStyle xmlns:a="http://schemas.openxmlformats.org/drawingml/2006/main"/>
           <a:p xmlns:a="http://schemas.openxmlformats.org/drawingml/2006/main">
             <a:pPr algn="r">
+              <a:buNone/>
               <a:defRPr sz="900" b="0">
                 <a:solidFill>
                   <a:srgbClr val="5B6472"/>
@@ -5625,6 +9217,7 @@
           <a:lstStyle xmlns:a="http://schemas.openxmlformats.org/drawingml/2006/main"/>
           <a:p xmlns:a="http://schemas.openxmlformats.org/drawingml/2006/main">
             <a:pPr algn="l">
+              <a:buNone/>
               <a:defRPr sz="2550" b="1">
                 <a:solidFill>
                   <a:srgbClr val="111827"/>
@@ -5681,6 +9274,7 @@
           <a:lstStyle xmlns:a="http://schemas.openxmlformats.org/drawingml/2006/main"/>
           <a:p xmlns:a="http://schemas.openxmlformats.org/drawingml/2006/main">
             <a:pPr algn="l">
+              <a:buNone/>
               <a:defRPr sz="1050" b="0">
                 <a:solidFill>
                   <a:srgbClr val="5B6472"/>
@@ -5737,6 +9331,7 @@
           <a:lstStyle xmlns:a="http://schemas.openxmlformats.org/drawingml/2006/main"/>
           <a:p xmlns:a="http://schemas.openxmlformats.org/drawingml/2006/main">
             <a:pPr algn="r">
+              <a:buNone/>
               <a:defRPr sz="900" b="0">
                 <a:solidFill>
                   <a:srgbClr val="5B6472"/>
@@ -5828,6 +9423,7 @@
           <a:lstStyle xmlns:a="http://schemas.openxmlformats.org/drawingml/2006/main"/>
           <a:p xmlns:a="http://schemas.openxmlformats.org/drawingml/2006/main">
             <a:pPr algn="l">
+              <a:buNone/>
               <a:defRPr sz="1275" b="1">
                 <a:solidFill>
                   <a:srgbClr val="5B6472"/>
@@ -5884,6 +9480,7 @@
           <a:lstStyle xmlns:a="http://schemas.openxmlformats.org/drawingml/2006/main"/>
           <a:p xmlns:a="http://schemas.openxmlformats.org/drawingml/2006/main">
             <a:pPr algn="l">
+              <a:buNone/>
               <a:defRPr sz="1275" b="1">
                 <a:solidFill>
                   <a:srgbClr val="5B6472"/>
@@ -5940,6 +9537,7 @@
           <a:lstStyle xmlns:a="http://schemas.openxmlformats.org/drawingml/2006/main"/>
           <a:p xmlns:a="http://schemas.openxmlformats.org/drawingml/2006/main">
             <a:pPr algn="l">
+              <a:buNone/>
               <a:defRPr sz="1275" b="1">
                 <a:solidFill>
                   <a:srgbClr val="5B6472"/>
@@ -6031,6 +9629,7 @@
           <a:lstStyle xmlns:a="http://schemas.openxmlformats.org/drawingml/2006/main"/>
           <a:p xmlns:a="http://schemas.openxmlformats.org/drawingml/2006/main">
             <a:pPr algn="l">
+              <a:buNone/>
               <a:defRPr sz="1350" b="0">
                 <a:solidFill>
                   <a:srgbClr val="111827"/>
@@ -6087,6 +9686,7 @@
           <a:lstStyle xmlns:a="http://schemas.openxmlformats.org/drawingml/2006/main"/>
           <a:p xmlns:a="http://schemas.openxmlformats.org/drawingml/2006/main">
             <a:pPr algn="l">
+              <a:buNone/>
               <a:defRPr sz="1350" b="0">
                 <a:solidFill>
                   <a:srgbClr val="0F766E"/>
@@ -6143,6 +9743,7 @@
           <a:lstStyle xmlns:a="http://schemas.openxmlformats.org/drawingml/2006/main"/>
           <a:p xmlns:a="http://schemas.openxmlformats.org/drawingml/2006/main">
             <a:pPr algn="l">
+              <a:buNone/>
               <a:defRPr sz="1350" b="0">
                 <a:solidFill>
                   <a:srgbClr val="111827"/>
@@ -6199,6 +9800,7 @@
           <a:lstStyle xmlns:a="http://schemas.openxmlformats.org/drawingml/2006/main"/>
           <a:p xmlns:a="http://schemas.openxmlformats.org/drawingml/2006/main">
             <a:pPr algn="l">
+              <a:buNone/>
               <a:defRPr sz="1350" b="0">
                 <a:solidFill>
                   <a:srgbClr val="111827"/>
@@ -6255,6 +9857,7 @@
           <a:lstStyle xmlns:a="http://schemas.openxmlformats.org/drawingml/2006/main"/>
           <a:p xmlns:a="http://schemas.openxmlformats.org/drawingml/2006/main">
             <a:pPr algn="l">
+              <a:buNone/>
               <a:defRPr sz="1350" b="0">
                 <a:solidFill>
                   <a:srgbClr val="0F766E"/>
@@ -6311,6 +9914,7 @@
           <a:lstStyle xmlns:a="http://schemas.openxmlformats.org/drawingml/2006/main"/>
           <a:p xmlns:a="http://schemas.openxmlformats.org/drawingml/2006/main">
             <a:pPr algn="l">
+              <a:buNone/>
               <a:defRPr sz="1350" b="0">
                 <a:solidFill>
                   <a:srgbClr val="111827"/>
@@ -6402,6 +10006,7 @@
           <a:lstStyle xmlns:a="http://schemas.openxmlformats.org/drawingml/2006/main"/>
           <a:p xmlns:a="http://schemas.openxmlformats.org/drawingml/2006/main">
             <a:pPr algn="l">
+              <a:buNone/>
               <a:defRPr sz="1350" b="0">
                 <a:solidFill>
                   <a:srgbClr val="111827"/>
@@ -6458,6 +10063,7 @@
           <a:lstStyle xmlns:a="http://schemas.openxmlformats.org/drawingml/2006/main"/>
           <a:p xmlns:a="http://schemas.openxmlformats.org/drawingml/2006/main">
             <a:pPr algn="l">
+              <a:buNone/>
               <a:defRPr sz="1350" b="0">
                 <a:solidFill>
                   <a:srgbClr val="0F766E"/>
@@ -6514,6 +10120,7 @@
           <a:lstStyle xmlns:a="http://schemas.openxmlformats.org/drawingml/2006/main"/>
           <a:p xmlns:a="http://schemas.openxmlformats.org/drawingml/2006/main">
             <a:pPr algn="l">
+              <a:buNone/>
               <a:defRPr sz="1350" b="0">
                 <a:solidFill>
                   <a:srgbClr val="111827"/>
@@ -6570,6 +10177,7 @@
           <a:lstStyle xmlns:a="http://schemas.openxmlformats.org/drawingml/2006/main"/>
           <a:p xmlns:a="http://schemas.openxmlformats.org/drawingml/2006/main">
             <a:pPr algn="l">
+              <a:buNone/>
               <a:defRPr sz="1350" b="0">
                 <a:solidFill>
                   <a:srgbClr val="111827"/>
@@ -6626,6 +10234,7 @@
           <a:lstStyle xmlns:a="http://schemas.openxmlformats.org/drawingml/2006/main"/>
           <a:p xmlns:a="http://schemas.openxmlformats.org/drawingml/2006/main">
             <a:pPr algn="l">
+              <a:buNone/>
               <a:defRPr sz="1350" b="0">
                 <a:solidFill>
                   <a:srgbClr val="0F766E"/>
@@ -6682,6 +10291,7 @@
           <a:lstStyle xmlns:a="http://schemas.openxmlformats.org/drawingml/2006/main"/>
           <a:p xmlns:a="http://schemas.openxmlformats.org/drawingml/2006/main">
             <a:pPr algn="l">
+              <a:buNone/>
               <a:defRPr sz="1350" b="0">
                 <a:solidFill>
                   <a:srgbClr val="111827"/>
@@ -6773,6 +10383,7 @@
           <a:lstStyle xmlns:a="http://schemas.openxmlformats.org/drawingml/2006/main"/>
           <a:p xmlns:a="http://schemas.openxmlformats.org/drawingml/2006/main">
             <a:pPr algn="l">
+              <a:buNone/>
               <a:defRPr sz="1350" b="0">
                 <a:solidFill>
                   <a:srgbClr val="111827"/>
@@ -6829,6 +10440,7 @@
           <a:lstStyle xmlns:a="http://schemas.openxmlformats.org/drawingml/2006/main"/>
           <a:p xmlns:a="http://schemas.openxmlformats.org/drawingml/2006/main">
             <a:pPr algn="l">
+              <a:buNone/>
               <a:defRPr sz="1350" b="0">
                 <a:solidFill>
                   <a:srgbClr val="0F766E"/>
@@ -6885,6 +10497,7 @@
           <a:lstStyle xmlns:a="http://schemas.openxmlformats.org/drawingml/2006/main"/>
           <a:p xmlns:a="http://schemas.openxmlformats.org/drawingml/2006/main">
             <a:pPr algn="l">
+              <a:buNone/>
               <a:defRPr sz="1350" b="0">
                 <a:solidFill>
                   <a:srgbClr val="111827"/>
@@ -6941,6 +10554,7 @@
           <a:lstStyle xmlns:a="http://schemas.openxmlformats.org/drawingml/2006/main"/>
           <a:p xmlns:a="http://schemas.openxmlformats.org/drawingml/2006/main">
             <a:pPr algn="l">
+              <a:buNone/>
               <a:defRPr sz="1350" b="0">
                 <a:solidFill>
                   <a:srgbClr val="111827"/>
@@ -6997,6 +10611,7 @@
           <a:lstStyle xmlns:a="http://schemas.openxmlformats.org/drawingml/2006/main"/>
           <a:p xmlns:a="http://schemas.openxmlformats.org/drawingml/2006/main">
             <a:pPr algn="l">
+              <a:buNone/>
               <a:defRPr sz="1350" b="0">
                 <a:solidFill>
                   <a:srgbClr val="0F766E"/>
@@ -7053,6 +10668,7 @@
           <a:lstStyle xmlns:a="http://schemas.openxmlformats.org/drawingml/2006/main"/>
           <a:p xmlns:a="http://schemas.openxmlformats.org/drawingml/2006/main">
             <a:pPr algn="l">
+              <a:buNone/>
               <a:defRPr sz="1350" b="0">
                 <a:solidFill>
                   <a:srgbClr val="111827"/>
@@ -7144,6 +10760,7 @@
           <a:lstStyle xmlns:a="http://schemas.openxmlformats.org/drawingml/2006/main"/>
           <a:p xmlns:a="http://schemas.openxmlformats.org/drawingml/2006/main">
             <a:pPr algn="l">
+              <a:buNone/>
               <a:defRPr sz="1350" b="0">
                 <a:solidFill>
                   <a:srgbClr val="111827"/>
@@ -7200,6 +10817,7 @@
           <a:lstStyle xmlns:a="http://schemas.openxmlformats.org/drawingml/2006/main"/>
           <a:p xmlns:a="http://schemas.openxmlformats.org/drawingml/2006/main">
             <a:pPr algn="l">
+              <a:buNone/>
               <a:defRPr sz="1350" b="0">
                 <a:solidFill>
                   <a:srgbClr val="0F766E"/>
@@ -7256,6 +10874,7 @@
           <a:lstStyle xmlns:a="http://schemas.openxmlformats.org/drawingml/2006/main"/>
           <a:p xmlns:a="http://schemas.openxmlformats.org/drawingml/2006/main">
             <a:pPr algn="l">
+              <a:buNone/>
               <a:defRPr sz="1350" b="0">
                 <a:solidFill>
                   <a:srgbClr val="111827"/>
@@ -7312,6 +10931,7 @@
           <a:lstStyle xmlns:a="http://schemas.openxmlformats.org/drawingml/2006/main"/>
           <a:p xmlns:a="http://schemas.openxmlformats.org/drawingml/2006/main">
             <a:pPr algn="l">
+              <a:buNone/>
               <a:defRPr sz="1350" b="0">
                 <a:solidFill>
                   <a:srgbClr val="111827"/>
@@ -7368,6 +10988,7 @@
           <a:lstStyle xmlns:a="http://schemas.openxmlformats.org/drawingml/2006/main"/>
           <a:p xmlns:a="http://schemas.openxmlformats.org/drawingml/2006/main">
             <a:pPr algn="l">
+              <a:buNone/>
               <a:defRPr sz="1350" b="0">
                 <a:solidFill>
                   <a:srgbClr val="0F766E"/>
@@ -7424,6 +11045,7 @@
           <a:lstStyle xmlns:a="http://schemas.openxmlformats.org/drawingml/2006/main"/>
           <a:p xmlns:a="http://schemas.openxmlformats.org/drawingml/2006/main">
             <a:pPr algn="l">
+              <a:buNone/>
               <a:defRPr sz="1350" b="0">
                 <a:solidFill>
                   <a:srgbClr val="111827"/>
@@ -7480,6 +11102,7 @@
           <a:lstStyle xmlns:a="http://schemas.openxmlformats.org/drawingml/2006/main"/>
           <a:p xmlns:a="http://schemas.openxmlformats.org/drawingml/2006/main">
             <a:pPr algn="r">
+              <a:buNone/>
               <a:defRPr sz="900" b="0">
                 <a:solidFill>
                   <a:srgbClr val="5B6472"/>
@@ -7565,6 +11188,7 @@
           <a:lstStyle xmlns:a="http://schemas.openxmlformats.org/drawingml/2006/main"/>
           <a:p xmlns:a="http://schemas.openxmlformats.org/drawingml/2006/main">
             <a:pPr algn="l">
+              <a:buNone/>
               <a:defRPr sz="2550" b="1">
                 <a:solidFill>
                   <a:srgbClr val="111827"/>
@@ -7621,6 +11245,7 @@
           <a:lstStyle xmlns:a="http://schemas.openxmlformats.org/drawingml/2006/main"/>
           <a:p xmlns:a="http://schemas.openxmlformats.org/drawingml/2006/main">
             <a:pPr algn="l">
+              <a:buNone/>
               <a:defRPr sz="1050" b="0">
                 <a:solidFill>
                   <a:srgbClr val="5B6472"/>
@@ -7677,6 +11302,7 @@
           <a:lstStyle xmlns:a="http://schemas.openxmlformats.org/drawingml/2006/main"/>
           <a:p xmlns:a="http://schemas.openxmlformats.org/drawingml/2006/main">
             <a:pPr algn="r">
+              <a:buNone/>
               <a:defRPr sz="900" b="0">
                 <a:solidFill>
                   <a:srgbClr val="5B6472"/>
@@ -7803,6 +11429,7 @@
           <a:lstStyle xmlns:a="http://schemas.openxmlformats.org/drawingml/2006/main"/>
           <a:p xmlns:a="http://schemas.openxmlformats.org/drawingml/2006/main">
             <a:pPr algn="ctr">
+              <a:buNone/>
               <a:defRPr sz="1050" b="1">
                 <a:solidFill>
                   <a:srgbClr val="FFFFFF"/>
@@ -7859,6 +11486,7 @@
           <a:lstStyle xmlns:a="http://schemas.openxmlformats.org/drawingml/2006/main"/>
           <a:p xmlns:a="http://schemas.openxmlformats.org/drawingml/2006/main">
             <a:pPr algn="l">
+              <a:buNone/>
               <a:defRPr sz="1500" b="0">
                 <a:solidFill>
                   <a:srgbClr val="111827"/>
@@ -7915,6 +11543,7 @@
           <a:lstStyle xmlns:a="http://schemas.openxmlformats.org/drawingml/2006/main"/>
           <a:p xmlns:a="http://schemas.openxmlformats.org/drawingml/2006/main">
             <a:pPr algn="l">
+              <a:buNone/>
               <a:defRPr sz="1200" b="0">
                 <a:solidFill>
                   <a:srgbClr val="5B6472"/>
@@ -8041,6 +11670,7 @@
           <a:lstStyle xmlns:a="http://schemas.openxmlformats.org/drawingml/2006/main"/>
           <a:p xmlns:a="http://schemas.openxmlformats.org/drawingml/2006/main">
             <a:pPr algn="ctr">
+              <a:buNone/>
               <a:defRPr sz="1050" b="1">
                 <a:solidFill>
                   <a:srgbClr val="FFFFFF"/>
@@ -8097,6 +11727,7 @@
           <a:lstStyle xmlns:a="http://schemas.openxmlformats.org/drawingml/2006/main"/>
           <a:p xmlns:a="http://schemas.openxmlformats.org/drawingml/2006/main">
             <a:pPr algn="l">
+              <a:buNone/>
               <a:defRPr sz="1500" b="0">
                 <a:solidFill>
                   <a:srgbClr val="111827"/>
@@ -8153,6 +11784,7 @@
           <a:lstStyle xmlns:a="http://schemas.openxmlformats.org/drawingml/2006/main"/>
           <a:p xmlns:a="http://schemas.openxmlformats.org/drawingml/2006/main">
             <a:pPr algn="l">
+              <a:buNone/>
               <a:defRPr sz="1200" b="0">
                 <a:solidFill>
                   <a:srgbClr val="5B6472"/>
@@ -8279,6 +11911,7 @@
           <a:lstStyle xmlns:a="http://schemas.openxmlformats.org/drawingml/2006/main"/>
           <a:p xmlns:a="http://schemas.openxmlformats.org/drawingml/2006/main">
             <a:pPr algn="ctr">
+              <a:buNone/>
               <a:defRPr sz="1050" b="1">
                 <a:solidFill>
                   <a:srgbClr val="FFFFFF"/>
@@ -8335,6 +11968,7 @@
           <a:lstStyle xmlns:a="http://schemas.openxmlformats.org/drawingml/2006/main"/>
           <a:p xmlns:a="http://schemas.openxmlformats.org/drawingml/2006/main">
             <a:pPr algn="l">
+              <a:buNone/>
               <a:defRPr sz="1500" b="0">
                 <a:solidFill>
                   <a:srgbClr val="111827"/>
@@ -8391,6 +12025,7 @@
           <a:lstStyle xmlns:a="http://schemas.openxmlformats.org/drawingml/2006/main"/>
           <a:p xmlns:a="http://schemas.openxmlformats.org/drawingml/2006/main">
             <a:pPr algn="l">
+              <a:buNone/>
               <a:defRPr sz="1200" b="0">
                 <a:solidFill>
                   <a:srgbClr val="5B6472"/>
@@ -8517,6 +12152,7 @@
           <a:lstStyle xmlns:a="http://schemas.openxmlformats.org/drawingml/2006/main"/>
           <a:p xmlns:a="http://schemas.openxmlformats.org/drawingml/2006/main">
             <a:pPr algn="ctr">
+              <a:buNone/>
               <a:defRPr sz="1050" b="1">
                 <a:solidFill>
                   <a:srgbClr val="FFFFFF"/>
@@ -8573,6 +12209,7 @@
           <a:lstStyle xmlns:a="http://schemas.openxmlformats.org/drawingml/2006/main"/>
           <a:p xmlns:a="http://schemas.openxmlformats.org/drawingml/2006/main">
             <a:pPr algn="l">
+              <a:buNone/>
               <a:defRPr sz="1500" b="0">
                 <a:solidFill>
                   <a:srgbClr val="111827"/>
@@ -8629,6 +12266,7 @@
           <a:lstStyle xmlns:a="http://schemas.openxmlformats.org/drawingml/2006/main"/>
           <a:p xmlns:a="http://schemas.openxmlformats.org/drawingml/2006/main">
             <a:pPr algn="l">
+              <a:buNone/>
               <a:defRPr sz="1200" b="0">
                 <a:solidFill>
                   <a:srgbClr val="5B6472"/>
@@ -8685,6 +12323,7 @@
           <a:lstStyle xmlns:a="http://schemas.openxmlformats.org/drawingml/2006/main"/>
           <a:p xmlns:a="http://schemas.openxmlformats.org/drawingml/2006/main">
             <a:pPr algn="r">
+              <a:buNone/>
               <a:defRPr sz="900" b="0">
                 <a:solidFill>
                   <a:srgbClr val="5B6472"/>
@@ -8770,6 +12409,7 @@
           <a:lstStyle xmlns:a="http://schemas.openxmlformats.org/drawingml/2006/main"/>
           <a:p xmlns:a="http://schemas.openxmlformats.org/drawingml/2006/main">
             <a:pPr algn="l">
+              <a:buNone/>
               <a:defRPr sz="2550" b="1">
                 <a:solidFill>
                   <a:srgbClr val="111827"/>
@@ -8826,6 +12466,7 @@
           <a:lstStyle xmlns:a="http://schemas.openxmlformats.org/drawingml/2006/main"/>
           <a:p xmlns:a="http://schemas.openxmlformats.org/drawingml/2006/main">
             <a:pPr algn="l">
+              <a:buNone/>
               <a:defRPr sz="1050" b="0">
                 <a:solidFill>
                   <a:srgbClr val="5B6472"/>
@@ -8882,6 +12523,7 @@
           <a:lstStyle xmlns:a="http://schemas.openxmlformats.org/drawingml/2006/main"/>
           <a:p xmlns:a="http://schemas.openxmlformats.org/drawingml/2006/main">
             <a:pPr algn="r">
+              <a:buNone/>
               <a:defRPr sz="900" b="0">
                 <a:solidFill>
                   <a:srgbClr val="5B6472"/>
@@ -8973,6 +12615,7 @@
           <a:lstStyle xmlns:a="http://schemas.openxmlformats.org/drawingml/2006/main"/>
           <a:p xmlns:a="http://schemas.openxmlformats.org/drawingml/2006/main">
             <a:pPr algn="ctr">
+              <a:buNone/>
               <a:defRPr sz="1800" b="1">
                 <a:solidFill>
                   <a:srgbClr val="0F766E"/>
@@ -9029,6 +12672,7 @@
           <a:lstStyle xmlns:a="http://schemas.openxmlformats.org/drawingml/2006/main"/>
           <a:p xmlns:a="http://schemas.openxmlformats.org/drawingml/2006/main">
             <a:pPr algn="ctr">
+              <a:buNone/>
               <a:defRPr sz="1350" b="0">
                 <a:solidFill>
                   <a:srgbClr val="111827"/>
@@ -9052,6 +12696,7 @@
           </a:p>
           <a:p xmlns:a="http://schemas.openxmlformats.org/drawingml/2006/main">
             <a:pPr algn="ctr">
+              <a:buNone/>
               <a:defRPr sz="1350" b="0">
                 <a:solidFill>
                   <a:srgbClr val="111827"/>
@@ -9075,6 +12720,7 @@
           </a:p>
           <a:p xmlns:a="http://schemas.openxmlformats.org/drawingml/2006/main">
             <a:pPr algn="ctr">
+              <a:buNone/>
               <a:defRPr sz="1350" b="0">
                 <a:solidFill>
                   <a:srgbClr val="111827"/>
@@ -9131,6 +12777,7 @@
           <a:lstStyle xmlns:a="http://schemas.openxmlformats.org/drawingml/2006/main"/>
           <a:p xmlns:a="http://schemas.openxmlformats.org/drawingml/2006/main">
             <a:pPr algn="ctr">
+              <a:buNone/>
               <a:defRPr sz="1350" b="0">
                 <a:solidFill>
                   <a:srgbClr val="5B6472"/>
@@ -9222,6 +12869,7 @@
           <a:lstStyle xmlns:a="http://schemas.openxmlformats.org/drawingml/2006/main"/>
           <a:p xmlns:a="http://schemas.openxmlformats.org/drawingml/2006/main">
             <a:pPr algn="ctr">
+              <a:buNone/>
               <a:defRPr sz="1800" b="1">
                 <a:solidFill>
                   <a:srgbClr val="B7791F"/>
@@ -9278,6 +12926,7 @@
           <a:lstStyle xmlns:a="http://schemas.openxmlformats.org/drawingml/2006/main"/>
           <a:p xmlns:a="http://schemas.openxmlformats.org/drawingml/2006/main">
             <a:pPr algn="ctr">
+              <a:buNone/>
               <a:defRPr sz="1350" b="0">
                 <a:solidFill>
                   <a:srgbClr val="111827"/>
@@ -9301,6 +12950,7 @@
           </a:p>
           <a:p xmlns:a="http://schemas.openxmlformats.org/drawingml/2006/main">
             <a:pPr algn="ctr">
+              <a:buNone/>
               <a:defRPr sz="1350" b="0">
                 <a:solidFill>
                   <a:srgbClr val="111827"/>
@@ -9324,6 +12974,7 @@
           </a:p>
           <a:p xmlns:a="http://schemas.openxmlformats.org/drawingml/2006/main">
             <a:pPr algn="ctr">
+              <a:buNone/>
               <a:defRPr sz="1350" b="0">
                 <a:solidFill>
                   <a:srgbClr val="111827"/>
@@ -9380,6 +13031,7 @@
           <a:lstStyle xmlns:a="http://schemas.openxmlformats.org/drawingml/2006/main"/>
           <a:p xmlns:a="http://schemas.openxmlformats.org/drawingml/2006/main">
             <a:pPr algn="ctr">
+              <a:buNone/>
               <a:defRPr sz="1350" b="0">
                 <a:solidFill>
                   <a:srgbClr val="5B6472"/>
@@ -9471,6 +13123,7 @@
           <a:lstStyle xmlns:a="http://schemas.openxmlformats.org/drawingml/2006/main"/>
           <a:p xmlns:a="http://schemas.openxmlformats.org/drawingml/2006/main">
             <a:pPr algn="ctr">
+              <a:buNone/>
               <a:defRPr sz="1800" b="1">
                 <a:solidFill>
                   <a:srgbClr val="2563EB"/>
@@ -9527,6 +13180,7 @@
           <a:lstStyle xmlns:a="http://schemas.openxmlformats.org/drawingml/2006/main"/>
           <a:p xmlns:a="http://schemas.openxmlformats.org/drawingml/2006/main">
             <a:pPr algn="ctr">
+              <a:buNone/>
               <a:defRPr sz="1350" b="0">
                 <a:solidFill>
                   <a:srgbClr val="111827"/>
@@ -9550,6 +13204,7 @@
           </a:p>
           <a:p xmlns:a="http://schemas.openxmlformats.org/drawingml/2006/main">
             <a:pPr algn="ctr">
+              <a:buNone/>
               <a:defRPr sz="1350" b="0">
                 <a:solidFill>
                   <a:srgbClr val="111827"/>
@@ -9573,6 +13228,7 @@
           </a:p>
           <a:p xmlns:a="http://schemas.openxmlformats.org/drawingml/2006/main">
             <a:pPr algn="ctr">
+              <a:buNone/>
               <a:defRPr sz="1350" b="0">
                 <a:solidFill>
                   <a:srgbClr val="111827"/>
@@ -9629,6 +13285,7 @@
           <a:lstStyle xmlns:a="http://schemas.openxmlformats.org/drawingml/2006/main"/>
           <a:p xmlns:a="http://schemas.openxmlformats.org/drawingml/2006/main">
             <a:pPr algn="ctr">
+              <a:buNone/>
               <a:defRPr sz="1350" b="0">
                 <a:solidFill>
                   <a:srgbClr val="5B6472"/>
@@ -9720,6 +13377,7 @@
           <a:lstStyle xmlns:a="http://schemas.openxmlformats.org/drawingml/2006/main"/>
           <a:p xmlns:a="http://schemas.openxmlformats.org/drawingml/2006/main">
             <a:pPr algn="ctr">
+              <a:buNone/>
               <a:defRPr sz="1800" b="1">
                 <a:solidFill>
                   <a:srgbClr val="BE3455"/>
@@ -9776,6 +13434,7 @@
           <a:lstStyle xmlns:a="http://schemas.openxmlformats.org/drawingml/2006/main"/>
           <a:p xmlns:a="http://schemas.openxmlformats.org/drawingml/2006/main">
             <a:pPr algn="ctr">
+              <a:buNone/>
               <a:defRPr sz="1350" b="0">
                 <a:solidFill>
                   <a:srgbClr val="111827"/>
@@ -9799,6 +13458,7 @@
           </a:p>
           <a:p xmlns:a="http://schemas.openxmlformats.org/drawingml/2006/main">
             <a:pPr algn="ctr">
+              <a:buNone/>
               <a:defRPr sz="1350" b="0">
                 <a:solidFill>
                   <a:srgbClr val="111827"/>
@@ -9822,6 +13482,7 @@
           </a:p>
           <a:p xmlns:a="http://schemas.openxmlformats.org/drawingml/2006/main">
             <a:pPr algn="ctr">
+              <a:buNone/>
               <a:defRPr sz="1350" b="0">
                 <a:solidFill>
                   <a:srgbClr val="111827"/>
@@ -9878,6 +13539,7 @@
           <a:lstStyle xmlns:a="http://schemas.openxmlformats.org/drawingml/2006/main"/>
           <a:p xmlns:a="http://schemas.openxmlformats.org/drawingml/2006/main">
             <a:pPr algn="ctr">
+              <a:buNone/>
               <a:defRPr sz="1350" b="0">
                 <a:solidFill>
                   <a:srgbClr val="5B6472"/>
@@ -9934,6 +13596,7 @@
           <a:lstStyle xmlns:a="http://schemas.openxmlformats.org/drawingml/2006/main"/>
           <a:p xmlns:a="http://schemas.openxmlformats.org/drawingml/2006/main">
             <a:pPr algn="r">
+              <a:buNone/>
               <a:defRPr sz="900" b="0">
                 <a:solidFill>
                   <a:srgbClr val="5B6472"/>
@@ -10019,6 +13682,7 @@
           <a:lstStyle xmlns:a="http://schemas.openxmlformats.org/drawingml/2006/main"/>
           <a:p xmlns:a="http://schemas.openxmlformats.org/drawingml/2006/main">
             <a:pPr algn="l">
+              <a:buNone/>
               <a:defRPr sz="2550" b="1">
                 <a:solidFill>
                   <a:srgbClr val="111827"/>
@@ -10075,6 +13739,7 @@
           <a:lstStyle xmlns:a="http://schemas.openxmlformats.org/drawingml/2006/main"/>
           <a:p xmlns:a="http://schemas.openxmlformats.org/drawingml/2006/main">
             <a:pPr algn="l">
+              <a:buNone/>
               <a:defRPr sz="1050" b="0">
                 <a:solidFill>
                   <a:srgbClr val="5B6472"/>
@@ -10131,6 +13796,7 @@
           <a:lstStyle xmlns:a="http://schemas.openxmlformats.org/drawingml/2006/main"/>
           <a:p xmlns:a="http://schemas.openxmlformats.org/drawingml/2006/main">
             <a:pPr algn="r">
+              <a:buNone/>
               <a:defRPr sz="900" b="0">
                 <a:solidFill>
                   <a:srgbClr val="5B6472"/>
@@ -10187,6 +13853,7 @@
           <a:lstStyle xmlns:a="http://schemas.openxmlformats.org/drawingml/2006/main"/>
           <a:p xmlns:a="http://schemas.openxmlformats.org/drawingml/2006/main">
             <a:pPr algn="l">
+              <a:buNone/>
               <a:defRPr sz="1350" b="0">
                 <a:solidFill>
                   <a:srgbClr val="111827"/>
@@ -10313,6 +13980,7 @@
           <a:lstStyle xmlns:a="http://schemas.openxmlformats.org/drawingml/2006/main"/>
           <a:p xmlns:a="http://schemas.openxmlformats.org/drawingml/2006/main">
             <a:pPr algn="l">
+              <a:buNone/>
               <a:defRPr sz="1200" b="0">
                 <a:solidFill>
                   <a:srgbClr val="5B6472"/>
@@ -10369,6 +14037,7 @@
           <a:lstStyle xmlns:a="http://schemas.openxmlformats.org/drawingml/2006/main"/>
           <a:p xmlns:a="http://schemas.openxmlformats.org/drawingml/2006/main">
             <a:pPr algn="l">
+              <a:buNone/>
               <a:defRPr sz="1350" b="0">
                 <a:solidFill>
                   <a:srgbClr val="111827"/>
@@ -10495,6 +14164,7 @@
           <a:lstStyle xmlns:a="http://schemas.openxmlformats.org/drawingml/2006/main"/>
           <a:p xmlns:a="http://schemas.openxmlformats.org/drawingml/2006/main">
             <a:pPr algn="l">
+              <a:buNone/>
               <a:defRPr sz="1200" b="0">
                 <a:solidFill>
                   <a:srgbClr val="5B6472"/>
@@ -10551,6 +14221,7 @@
           <a:lstStyle xmlns:a="http://schemas.openxmlformats.org/drawingml/2006/main"/>
           <a:p xmlns:a="http://schemas.openxmlformats.org/drawingml/2006/main">
             <a:pPr algn="l">
+              <a:buNone/>
               <a:defRPr sz="1350" b="0">
                 <a:solidFill>
                   <a:srgbClr val="111827"/>
@@ -10677,6 +14348,7 @@
           <a:lstStyle xmlns:a="http://schemas.openxmlformats.org/drawingml/2006/main"/>
           <a:p xmlns:a="http://schemas.openxmlformats.org/drawingml/2006/main">
             <a:pPr algn="l">
+              <a:buNone/>
               <a:defRPr sz="1200" b="0">
                 <a:solidFill>
                   <a:srgbClr val="5B6472"/>
@@ -10733,6 +14405,7 @@
           <a:lstStyle xmlns:a="http://schemas.openxmlformats.org/drawingml/2006/main"/>
           <a:p xmlns:a="http://schemas.openxmlformats.org/drawingml/2006/main">
             <a:pPr algn="l">
+              <a:buNone/>
               <a:defRPr sz="1350" b="0">
                 <a:solidFill>
                   <a:srgbClr val="111827"/>
@@ -10859,6 +14532,7 @@
           <a:lstStyle xmlns:a="http://schemas.openxmlformats.org/drawingml/2006/main"/>
           <a:p xmlns:a="http://schemas.openxmlformats.org/drawingml/2006/main">
             <a:pPr algn="l">
+              <a:buNone/>
               <a:defRPr sz="1200" b="0">
                 <a:solidFill>
                   <a:srgbClr val="5B6472"/>
@@ -10915,6 +14589,7 @@
           <a:lstStyle xmlns:a="http://schemas.openxmlformats.org/drawingml/2006/main"/>
           <a:p xmlns:a="http://schemas.openxmlformats.org/drawingml/2006/main">
             <a:pPr algn="l">
+              <a:buNone/>
               <a:defRPr sz="1350" b="0">
                 <a:solidFill>
                   <a:srgbClr val="111827"/>
@@ -11041,6 +14716,7 @@
           <a:lstStyle xmlns:a="http://schemas.openxmlformats.org/drawingml/2006/main"/>
           <a:p xmlns:a="http://schemas.openxmlformats.org/drawingml/2006/main">
             <a:pPr algn="l">
+              <a:buNone/>
               <a:defRPr sz="1200" b="0">
                 <a:solidFill>
                   <a:srgbClr val="5B6472"/>
@@ -11097,6 +14773,7 @@
           <a:lstStyle xmlns:a="http://schemas.openxmlformats.org/drawingml/2006/main"/>
           <a:p xmlns:a="http://schemas.openxmlformats.org/drawingml/2006/main">
             <a:pPr algn="l">
+              <a:buNone/>
               <a:defRPr sz="1350" b="0">
                 <a:solidFill>
                   <a:srgbClr val="111827"/>
@@ -11223,6 +14900,7 @@
           <a:lstStyle xmlns:a="http://schemas.openxmlformats.org/drawingml/2006/main"/>
           <a:p xmlns:a="http://schemas.openxmlformats.org/drawingml/2006/main">
             <a:pPr algn="l">
+              <a:buNone/>
               <a:defRPr sz="1200" b="0">
                 <a:solidFill>
                   <a:srgbClr val="5B6472"/>
@@ -11279,6 +14957,7 @@
           <a:lstStyle xmlns:a="http://schemas.openxmlformats.org/drawingml/2006/main"/>
           <a:p xmlns:a="http://schemas.openxmlformats.org/drawingml/2006/main">
             <a:pPr algn="l">
+              <a:buNone/>
               <a:defRPr sz="1350" b="0">
                 <a:solidFill>
                   <a:srgbClr val="111827"/>
@@ -11405,6 +15084,7 @@
           <a:lstStyle xmlns:a="http://schemas.openxmlformats.org/drawingml/2006/main"/>
           <a:p xmlns:a="http://schemas.openxmlformats.org/drawingml/2006/main">
             <a:pPr algn="l">
+              <a:buNone/>
               <a:defRPr sz="1200" b="0">
                 <a:solidFill>
                   <a:srgbClr val="5B6472"/>
@@ -11461,6 +15141,7 @@
           <a:lstStyle xmlns:a="http://schemas.openxmlformats.org/drawingml/2006/main"/>
           <a:p xmlns:a="http://schemas.openxmlformats.org/drawingml/2006/main">
             <a:pPr algn="l">
+              <a:buNone/>
               <a:defRPr sz="1200" b="0">
                 <a:solidFill>
                   <a:srgbClr val="5B6472"/>
@@ -11517,6 +15198,7 @@
           <a:lstStyle xmlns:a="http://schemas.openxmlformats.org/drawingml/2006/main"/>
           <a:p xmlns:a="http://schemas.openxmlformats.org/drawingml/2006/main">
             <a:pPr algn="r">
+              <a:buNone/>
               <a:defRPr sz="900" b="0">
                 <a:solidFill>
                   <a:srgbClr val="5B6472"/>
@@ -11602,6 +15284,7 @@
           <a:lstStyle xmlns:a="http://schemas.openxmlformats.org/drawingml/2006/main"/>
           <a:p xmlns:a="http://schemas.openxmlformats.org/drawingml/2006/main">
             <a:pPr algn="l">
+              <a:buNone/>
               <a:defRPr sz="2550" b="1">
                 <a:solidFill>
                   <a:srgbClr val="111827"/>
@@ -11658,6 +15341,7 @@
           <a:lstStyle xmlns:a="http://schemas.openxmlformats.org/drawingml/2006/main"/>
           <a:p xmlns:a="http://schemas.openxmlformats.org/drawingml/2006/main">
             <a:pPr algn="l">
+              <a:buNone/>
               <a:defRPr sz="1050" b="0">
                 <a:solidFill>
                   <a:srgbClr val="5B6472"/>
@@ -11714,6 +15398,7 @@
           <a:lstStyle xmlns:a="http://schemas.openxmlformats.org/drawingml/2006/main"/>
           <a:p xmlns:a="http://schemas.openxmlformats.org/drawingml/2006/main">
             <a:pPr algn="r">
+              <a:buNone/>
               <a:defRPr sz="900" b="0">
                 <a:solidFill>
                   <a:srgbClr val="5B6472"/>
@@ -11805,6 +15490,7 @@
           <a:lstStyle xmlns:a="http://schemas.openxmlformats.org/drawingml/2006/main"/>
           <a:p xmlns:a="http://schemas.openxmlformats.org/drawingml/2006/main">
             <a:pPr algn="ctr">
+              <a:buNone/>
               <a:defRPr sz="1650" b="1">
                 <a:solidFill>
                   <a:srgbClr val="0F766E"/>
@@ -11861,6 +15547,7 @@
           <a:lstStyle xmlns:a="http://schemas.openxmlformats.org/drawingml/2006/main"/>
           <a:p xmlns:a="http://schemas.openxmlformats.org/drawingml/2006/main">
             <a:pPr algn="ctr">
+              <a:buNone/>
               <a:defRPr sz="1050" b="0">
                 <a:solidFill>
                   <a:srgbClr val="5B6472"/>
@@ -11985,6 +15672,7 @@
           <a:lstStyle xmlns:a="http://schemas.openxmlformats.org/drawingml/2006/main"/>
           <a:p xmlns:a="http://schemas.openxmlformats.org/drawingml/2006/main">
             <a:pPr algn="ctr">
+              <a:buNone/>
               <a:defRPr sz="1650" b="1">
                 <a:solidFill>
                   <a:srgbClr val="0F766E"/>
@@ -12041,6 +15729,7 @@
           <a:lstStyle xmlns:a="http://schemas.openxmlformats.org/drawingml/2006/main"/>
           <a:p xmlns:a="http://schemas.openxmlformats.org/drawingml/2006/main">
             <a:pPr algn="ctr">
+              <a:buNone/>
               <a:defRPr sz="1050" b="0">
                 <a:solidFill>
                   <a:srgbClr val="5B6472"/>
@@ -12165,6 +15854,7 @@
           <a:lstStyle xmlns:a="http://schemas.openxmlformats.org/drawingml/2006/main"/>
           <a:p xmlns:a="http://schemas.openxmlformats.org/drawingml/2006/main">
             <a:pPr algn="ctr">
+              <a:buNone/>
               <a:defRPr sz="1650" b="1">
                 <a:solidFill>
                   <a:srgbClr val="0F766E"/>
@@ -12221,6 +15911,7 @@
           <a:lstStyle xmlns:a="http://schemas.openxmlformats.org/drawingml/2006/main"/>
           <a:p xmlns:a="http://schemas.openxmlformats.org/drawingml/2006/main">
             <a:pPr algn="ctr">
+              <a:buNone/>
               <a:defRPr sz="1050" b="0">
                 <a:solidFill>
                   <a:srgbClr val="5B6472"/>
@@ -12345,6 +16036,7 @@
           <a:lstStyle xmlns:a="http://schemas.openxmlformats.org/drawingml/2006/main"/>
           <a:p xmlns:a="http://schemas.openxmlformats.org/drawingml/2006/main">
             <a:pPr algn="ctr">
+              <a:buNone/>
               <a:defRPr sz="1650" b="1">
                 <a:solidFill>
                   <a:srgbClr val="BE3455"/>
@@ -12401,6 +16093,7 @@
           <a:lstStyle xmlns:a="http://schemas.openxmlformats.org/drawingml/2006/main"/>
           <a:p xmlns:a="http://schemas.openxmlformats.org/drawingml/2006/main">
             <a:pPr algn="ctr">
+              <a:buNone/>
               <a:defRPr sz="1050" b="0">
                 <a:solidFill>
                   <a:srgbClr val="5B6472"/>
@@ -12525,6 +16218,7 @@
           <a:lstStyle xmlns:a="http://schemas.openxmlformats.org/drawingml/2006/main"/>
           <a:p xmlns:a="http://schemas.openxmlformats.org/drawingml/2006/main">
             <a:pPr algn="ctr">
+              <a:buNone/>
               <a:defRPr sz="1650" b="1">
                 <a:solidFill>
                   <a:srgbClr val="0F766E"/>
@@ -12581,6 +16275,7 @@
           <a:lstStyle xmlns:a="http://schemas.openxmlformats.org/drawingml/2006/main"/>
           <a:p xmlns:a="http://schemas.openxmlformats.org/drawingml/2006/main">
             <a:pPr algn="ctr">
+              <a:buNone/>
               <a:defRPr sz="1050" b="0">
                 <a:solidFill>
                   <a:srgbClr val="5B6472"/>
@@ -12637,6 +16332,7 @@
           <a:lstStyle xmlns:a="http://schemas.openxmlformats.org/drawingml/2006/main"/>
           <a:p xmlns:a="http://schemas.openxmlformats.org/drawingml/2006/main">
             <a:pPr algn="l">
+              <a:buNone/>
               <a:defRPr sz="1575" b="0">
                 <a:solidFill>
                   <a:srgbClr val="111827"/>
@@ -12660,6 +16356,7 @@
           </a:p>
           <a:p xmlns:a="http://schemas.openxmlformats.org/drawingml/2006/main">
             <a:pPr algn="l">
+              <a:buNone/>
               <a:defRPr sz="1575" b="0">
                 <a:solidFill>
                   <a:srgbClr val="111827"/>
@@ -12683,6 +16380,7 @@
           </a:p>
           <a:p xmlns:a="http://schemas.openxmlformats.org/drawingml/2006/main">
             <a:pPr algn="l">
+              <a:buNone/>
               <a:defRPr sz="1575" b="0">
                 <a:solidFill>
                   <a:srgbClr val="111827"/>
@@ -12739,6 +16437,7 @@
           <a:lstStyle xmlns:a="http://schemas.openxmlformats.org/drawingml/2006/main"/>
           <a:p xmlns:a="http://schemas.openxmlformats.org/drawingml/2006/main">
             <a:pPr algn="r">
+              <a:buNone/>
               <a:defRPr sz="900" b="0">
                 <a:solidFill>
                   <a:srgbClr val="5B6472"/>
@@ -12824,6 +16523,7 @@
           <a:lstStyle xmlns:a="http://schemas.openxmlformats.org/drawingml/2006/main"/>
           <a:p xmlns:a="http://schemas.openxmlformats.org/drawingml/2006/main">
             <a:pPr algn="l">
+              <a:buNone/>
               <a:defRPr sz="2550" b="1">
                 <a:solidFill>
                   <a:srgbClr val="111827"/>
@@ -12880,6 +16580,7 @@
           <a:lstStyle xmlns:a="http://schemas.openxmlformats.org/drawingml/2006/main"/>
           <a:p xmlns:a="http://schemas.openxmlformats.org/drawingml/2006/main">
             <a:pPr algn="l">
+              <a:buNone/>
               <a:defRPr sz="1050" b="0">
                 <a:solidFill>
                   <a:srgbClr val="5B6472"/>
@@ -12936,6 +16637,7 @@
           <a:lstStyle xmlns:a="http://schemas.openxmlformats.org/drawingml/2006/main"/>
           <a:p xmlns:a="http://schemas.openxmlformats.org/drawingml/2006/main">
             <a:pPr algn="r">
+              <a:buNone/>
               <a:defRPr sz="900" b="0">
                 <a:solidFill>
                   <a:srgbClr val="5B6472"/>
@@ -13027,6 +16729,7 @@
           <a:lstStyle xmlns:a="http://schemas.openxmlformats.org/drawingml/2006/main"/>
           <a:p xmlns:a="http://schemas.openxmlformats.org/drawingml/2006/main">
             <a:pPr algn="l">
+              <a:buNone/>
               <a:defRPr sz="1800" b="1">
                 <a:solidFill>
                   <a:srgbClr val="2563EB"/>
@@ -13083,6 +16786,7 @@
           <a:lstStyle xmlns:a="http://schemas.openxmlformats.org/drawingml/2006/main"/>
           <a:p xmlns:a="http://schemas.openxmlformats.org/drawingml/2006/main">
             <a:pPr algn="l">
+              <a:buNone/>
               <a:defRPr sz="1425" b="0">
                 <a:solidFill>
                   <a:srgbClr val="111827"/>
@@ -13106,6 +16810,7 @@
           </a:p>
           <a:p xmlns:a="http://schemas.openxmlformats.org/drawingml/2006/main">
             <a:pPr algn="l">
+              <a:buNone/>
               <a:defRPr sz="1425" b="0">
                 <a:solidFill>
                   <a:srgbClr val="111827"/>
@@ -13129,6 +16834,7 @@
           </a:p>
           <a:p xmlns:a="http://schemas.openxmlformats.org/drawingml/2006/main">
             <a:pPr algn="l">
+              <a:buNone/>
               <a:defRPr sz="1425" b="0">
                 <a:solidFill>
                   <a:srgbClr val="111827"/>
@@ -13152,6 +16858,7 @@
           </a:p>
           <a:p xmlns:a="http://schemas.openxmlformats.org/drawingml/2006/main">
             <a:pPr algn="l">
+              <a:buNone/>
               <a:defRPr sz="1425" b="0">
                 <a:solidFill>
                   <a:srgbClr val="111827"/>
@@ -13175,6 +16882,7 @@
           </a:p>
           <a:p xmlns:a="http://schemas.openxmlformats.org/drawingml/2006/main">
             <a:pPr algn="l">
+              <a:buNone/>
               <a:defRPr sz="1425" b="0">
                 <a:solidFill>
                   <a:srgbClr val="111827"/>
@@ -13266,6 +16974,7 @@
           <a:lstStyle xmlns:a="http://schemas.openxmlformats.org/drawingml/2006/main"/>
           <a:p xmlns:a="http://schemas.openxmlformats.org/drawingml/2006/main">
             <a:pPr algn="l">
+              <a:buNone/>
               <a:defRPr sz="1800" b="1">
                 <a:solidFill>
                   <a:srgbClr val="BE3455"/>
@@ -13322,6 +17031,7 @@
           <a:lstStyle xmlns:a="http://schemas.openxmlformats.org/drawingml/2006/main"/>
           <a:p xmlns:a="http://schemas.openxmlformats.org/drawingml/2006/main">
             <a:pPr algn="l">
+              <a:buNone/>
               <a:defRPr sz="1425" b="0">
                 <a:solidFill>
                   <a:srgbClr val="111827"/>
@@ -13345,6 +17055,7 @@
           </a:p>
           <a:p xmlns:a="http://schemas.openxmlformats.org/drawingml/2006/main">
             <a:pPr algn="l">
+              <a:buNone/>
               <a:defRPr sz="1425" b="0">
                 <a:solidFill>
                   <a:srgbClr val="111827"/>
@@ -13368,6 +17079,7 @@
           </a:p>
           <a:p xmlns:a="http://schemas.openxmlformats.org/drawingml/2006/main">
             <a:pPr algn="l">
+              <a:buNone/>
               <a:defRPr sz="1425" b="0">
                 <a:solidFill>
                   <a:srgbClr val="111827"/>
@@ -13391,6 +17103,7 @@
           </a:p>
           <a:p xmlns:a="http://schemas.openxmlformats.org/drawingml/2006/main">
             <a:pPr algn="l">
+              <a:buNone/>
               <a:defRPr sz="1425" b="0">
                 <a:solidFill>
                   <a:srgbClr val="111827"/>
@@ -13414,6 +17127,7 @@
           </a:p>
           <a:p xmlns:a="http://schemas.openxmlformats.org/drawingml/2006/main">
             <a:pPr algn="l">
+              <a:buNone/>
               <a:defRPr sz="1425" b="0">
                 <a:solidFill>
                   <a:srgbClr val="111827"/>
@@ -13470,6 +17184,7 @@
           <a:lstStyle xmlns:a="http://schemas.openxmlformats.org/drawingml/2006/main"/>
           <a:p xmlns:a="http://schemas.openxmlformats.org/drawingml/2006/main">
             <a:pPr algn="r">
+              <a:buNone/>
               <a:defRPr sz="900" b="0">
                 <a:solidFill>
                   <a:srgbClr val="5B6472"/>

--- a/codex_output/04_moe_distribute_dispatch_v2代码分析/02_moe_distribute_dispatch_v2_A5_code_analysis_summary.pptx
+++ b/codex_output/04_moe_distribute_dispatch_v2代码分析/02_moe_distribute_dispatch_v2_A5_code_analysis_summary.pptx
@@ -2,24 +2,24 @@
 <file path=ppt/presentation.xml><?xml version="1.0" encoding="utf-8"?>
 <p:presentation xmlns:p="http://schemas.openxmlformats.org/presentationml/2006/main">
   <p:sldMasterIdLst>
-    <p:sldMasterId xmlns:r="http://schemas.openxmlformats.org/officeDocument/2006/relationships" id="2147483648" r:id="R3cee83c36e8f4cb2"/>
+    <p:sldMasterId xmlns:r="http://schemas.openxmlformats.org/officeDocument/2006/relationships" id="2147483648" r:id="R71506630f339423b"/>
   </p:sldMasterIdLst>
   <p:notesMasterIdLst>
-    <p:notesMasterId xmlns:r="http://schemas.openxmlformats.org/officeDocument/2006/relationships" r:id="R504fdd8e8ba84a46"/>
+    <p:notesMasterId xmlns:r="http://schemas.openxmlformats.org/officeDocument/2006/relationships" r:id="R003aa70750e540db"/>
   </p:notesMasterIdLst>
   <p:sldIdLst>
-    <p:sldId xmlns:r="http://schemas.openxmlformats.org/officeDocument/2006/relationships" id="256" r:id="Ra58e980c322c4b6b"/>
-    <p:sldId xmlns:r="http://schemas.openxmlformats.org/officeDocument/2006/relationships" id="257" r:id="R6a525641bada47f5"/>
-    <p:sldId xmlns:r="http://schemas.openxmlformats.org/officeDocument/2006/relationships" id="258" r:id="Rd0b490b86db74ab7"/>
-    <p:sldId xmlns:r="http://schemas.openxmlformats.org/officeDocument/2006/relationships" id="259" r:id="R8039371457b44fe2"/>
-    <p:sldId xmlns:r="http://schemas.openxmlformats.org/officeDocument/2006/relationships" id="260" r:id="R84a9b7f2c3e04053"/>
-    <p:sldId xmlns:r="http://schemas.openxmlformats.org/officeDocument/2006/relationships" id="261" r:id="Rb432ab190513435d"/>
-    <p:sldId xmlns:r="http://schemas.openxmlformats.org/officeDocument/2006/relationships" id="262" r:id="R6787b0469a844b95"/>
-    <p:sldId xmlns:r="http://schemas.openxmlformats.org/officeDocument/2006/relationships" id="263" r:id="R65f7ec49e71a4048"/>
-    <p:sldId xmlns:r="http://schemas.openxmlformats.org/officeDocument/2006/relationships" id="264" r:id="Rbe859feeead444fc"/>
-    <p:sldId xmlns:r="http://schemas.openxmlformats.org/officeDocument/2006/relationships" id="265" r:id="Rc216071bd9d54930"/>
-    <p:sldId xmlns:r="http://schemas.openxmlformats.org/officeDocument/2006/relationships" id="266" r:id="R5e58afa6d36e4b76"/>
-    <p:sldId xmlns:r="http://schemas.openxmlformats.org/officeDocument/2006/relationships" id="267" r:id="Rda6eebeeb0c54190"/>
+    <p:sldId xmlns:r="http://schemas.openxmlformats.org/officeDocument/2006/relationships" id="256" r:id="R38deb51c81044da5"/>
+    <p:sldId xmlns:r="http://schemas.openxmlformats.org/officeDocument/2006/relationships" id="257" r:id="Rac4052d2a1a444c7"/>
+    <p:sldId xmlns:r="http://schemas.openxmlformats.org/officeDocument/2006/relationships" id="258" r:id="R40c6132b9f544ecf"/>
+    <p:sldId xmlns:r="http://schemas.openxmlformats.org/officeDocument/2006/relationships" id="259" r:id="Ra05a8c962f174303"/>
+    <p:sldId xmlns:r="http://schemas.openxmlformats.org/officeDocument/2006/relationships" id="260" r:id="R55611633da4d4ab8"/>
+    <p:sldId xmlns:r="http://schemas.openxmlformats.org/officeDocument/2006/relationships" id="261" r:id="R31eb3e11b4e64364"/>
+    <p:sldId xmlns:r="http://schemas.openxmlformats.org/officeDocument/2006/relationships" id="262" r:id="Ra560550bc05e4231"/>
+    <p:sldId xmlns:r="http://schemas.openxmlformats.org/officeDocument/2006/relationships" id="263" r:id="R607bb4cf1ca44a7e"/>
+    <p:sldId xmlns:r="http://schemas.openxmlformats.org/officeDocument/2006/relationships" id="264" r:id="R721b4f9fda974fb4"/>
+    <p:sldId xmlns:r="http://schemas.openxmlformats.org/officeDocument/2006/relationships" id="265" r:id="R1c3f492791d1486a"/>
+    <p:sldId xmlns:r="http://schemas.openxmlformats.org/officeDocument/2006/relationships" id="266" r:id="R7e69e97ebae949d2"/>
+    <p:sldId xmlns:r="http://schemas.openxmlformats.org/officeDocument/2006/relationships" id="267" r:id="R6cc8b634cd26422f"/>
   </p:sldIdLst>
   <p:sldSz cx="12192000" cy="6858000"/>
   <p:notesSz cx="6858000" cy="9144000"/>
@@ -1338,7 +1338,7 @@
   </p:cSld>
   <p:clrMap bg1="lt1" tx1="dk1" bg2="lt2" tx2="dk2" accent1="accent1" accent2="accent2" accent3="accent3" accent4="accent4" accent5="accent5" accent6="accent6" hlink="hlink" folHlink="folHlink"/>
   <p:sldLayoutIdLst>
-    <p:sldLayoutId xmlns:r="http://schemas.openxmlformats.org/officeDocument/2006/relationships" id="2147483649" r:id="R5b79c83862d74909"/>
+    <p:sldLayoutId xmlns:r="http://schemas.openxmlformats.org/officeDocument/2006/relationships" id="2147483649" r:id="Re38521afd4fc43cb"/>
   </p:sldLayoutIdLst>
   <p:txStyles>
     <p:titleStyle>
@@ -2760,7 +2760,7 @@
                 <a:ea typeface="Aptos"/>
                 <a:cs typeface="Aptos"/>
               </a:rPr>
-              <a:t>本轮是静态代码分析，未执行 AICore 编译或硬件验证。</a:t>
+              <a:t>本轮是静态代码分析；HCCL/CCU 结论来自 kernel、host tiling 与 asc-devkit 实现链路。</a:t>
             </a:r>
           </a:p>
         </p:txBody>
@@ -3312,7 +3312,7 @@
                 <a:ea typeface="Aptos"/>
                 <a:cs typeface="Aptos"/>
               </a:rPr>
-              <a:t>TP 约束</a:t>
+              <a:t>HCCL window</a:t>
             </a:r>
           </a:p>
         </p:txBody>
@@ -3369,7 +3369,7 @@
                 <a:ea typeface="Aptos"/>
                 <a:cs typeface="Aptos"/>
               </a:rPr>
-              <a:t>A5 CCU 当前 tpWorldSize=1；MTE/fullmesh TP 能力依赖 A3 public tiling 约束。</a:t>
+              <a:t>CheckCommAttrs 对 window 容量按 HCCL_BUFFSIZE*2 检查；量化 payload 对齐需与 perTokenCommSize_ 复核。</a:t>
             </a:r>
           </a:p>
         </p:txBody>
@@ -3496,7 +3496,7 @@
                 <a:ea typeface="Aptos"/>
                 <a:cs typeface="Aptos"/>
               </a:rPr>
-              <a:t>验证缺口</a:t>
+              <a:t>硬件验证</a:t>
             </a:r>
           </a:p>
         </p:txBody>
@@ -3553,7 +3553,7 @@
                 <a:ea typeface="Aptos"/>
                 <a:cs typeface="Aptos"/>
               </a:rPr>
-              <a:t>建议补跑 op_host arch35 UT、op_api Ascend950 non-ccu、AICore 编译/仿真。</a:t>
+              <a:t>建议补跑 arch35 host UT、AICore 编译/仿真，并在 A5 环境验证 CCU HalfAlltoAllV window/status。</a:t>
             </a:r>
           </a:p>
         </p:txBody>
@@ -3792,7 +3792,7 @@
                   <a:srgbClr val="45556C"/>
                 </a:solidFill>
               </a:rPr>
-              <a:t>建立运行上下文：tiling、GM/UB、量化 payload、CCU 双缓冲</a:t>
+              <a:t>Init 在 AIV 上完成 tiling、UB、payload 与 CCU window 初始化；不执行跨 rank 通信。</a:t>
             </a:r>
           </a:p>
         </p:txBody>
@@ -4015,7 +4015,7 @@
                   <a:srgbClr val="020618"/>
                 </a:solidFill>
               </a:rPr>
-              <a:t>拓扑与规模</a:t>
+              <a:t>AIV scalar</a:t>
             </a:r>
           </a:p>
         </p:txBody>
@@ -4066,7 +4066,7 @@
                   <a:srgbClr val="45556C"/>
                 </a:solidFill>
               </a:rPr>
-              <a:t>bs/h/k、EP、expert</a:t>
+              <a:t>InitGlobalAttrs</a:t>
             </a:r>
           </a:p>
           <a:p xmlns:a="http://schemas.openxmlformats.org/drawingml/2006/main">
@@ -4084,7 +4084,7 @@
                   <a:srgbClr val="45556C"/>
                 </a:solidFill>
               </a:rPr>
-              <a:t>localExpertNum</a:t>
+              <a:t>rank/expert 拓扑</a:t>
             </a:r>
           </a:p>
           <a:p xmlns:a="http://schemas.openxmlformats.org/drawingml/2006/main">
@@ -4102,7 +4102,7 @@
                   <a:srgbClr val="45556C"/>
                 </a:solidFill>
               </a:rPr>
-              <a:t>AIV 分工</a:t>
+              <a:t>MoE/shared AIV 分工</a:t>
             </a:r>
           </a:p>
         </p:txBody>
@@ -4256,7 +4256,7 @@
                   <a:srgbClr val="FFFFFF"/>
                 </a:solidFill>
               </a:rPr>
-              <a:t>GM/UB</a:t>
+              <a:t>GM</a:t>
             </a:r>
           </a:p>
         </p:txBody>
@@ -4307,7 +4307,7 @@
                   <a:srgbClr val="020618"/>
                 </a:solidFill>
               </a:rPr>
-              <a:t>Tensor 绑定</a:t>
+              <a:t>UB + GM</a:t>
             </a:r>
           </a:p>
         </p:txBody>
@@ -4358,7 +4358,7 @@
                   <a:srgbClr val="45556C"/>
                 </a:solidFill>
               </a:rPr>
-              <a:t>x / expert_ids</a:t>
+              <a:t>InitBuf: sort/hist/cumsum</a:t>
             </a:r>
           </a:p>
           <a:p xmlns:a="http://schemas.openxmlformats.org/drawingml/2006/main">
@@ -4376,7 +4376,7 @@
                   <a:srgbClr val="45556C"/>
                 </a:solidFill>
               </a:rPr>
-              <a:t>expand_x / assist_info</a:t>
+              <a:t>绑定 x/expert_ids/outputs</a:t>
             </a:r>
           </a:p>
           <a:p xmlns:a="http://schemas.openxmlformats.org/drawingml/2006/main">
@@ -4394,7 +4394,7 @@
                   <a:srgbClr val="45556C"/>
                 </a:solidFill>
               </a:rPr>
-              <a:t>sort / hist / cumsum</a:t>
+              <a:t>UB 供 MTE/Vector 使用</a:t>
             </a:r>
           </a:p>
         </p:txBody>
@@ -4599,7 +4599,7 @@
                   <a:srgbClr val="020618"/>
                 </a:solidFill>
               </a:rPr>
-              <a:t>payload 布局</a:t>
+              <a:t>payload</a:t>
             </a:r>
           </a:p>
         </p:txBody>
@@ -4650,7 +4650,7 @@
                   <a:srgbClr val="45556C"/>
                 </a:solidFill>
               </a:rPr>
-              <a:t>data + scale tail</a:t>
+              <a:t>QuantInit: data+scale tail</a:t>
             </a:r>
           </a:p>
           <a:p xmlns:a="http://schemas.openxmlformats.org/drawingml/2006/main">
@@ -4668,7 +4668,7 @@
                   <a:srgbClr val="45556C"/>
                 </a:solidFill>
               </a:rPr>
-              <a:t>Align512 通信步长</a:t>
+              <a:t>Align512 token stride</a:t>
             </a:r>
           </a:p>
           <a:p xmlns:a="http://schemas.openxmlformats.org/drawingml/2006/main">
@@ -4686,7 +4686,7 @@
                   <a:srgbClr val="45556C"/>
                 </a:solidFill>
               </a:rPr>
-              <a:t>perRankDataSize</a:t>
+              <a:t>perRankDataSize_</a:t>
             </a:r>
           </a:p>
         </p:txBody>
@@ -4891,7 +4891,7 @@
                   <a:srgbClr val="020618"/>
                 </a:solidFill>
               </a:rPr>
-              <a:t>通信窗口</a:t>
+              <a:t>HCCL/CCU</a:t>
             </a:r>
           </a:p>
         </p:txBody>
@@ -4942,7 +4942,7 @@
                   <a:srgbClr val="45556C"/>
                 </a:solidFill>
               </a:rPr>
-              <a:t>sendBuf / size / offset</a:t>
+              <a:t>InitV2 + SetCcTilingV2</a:t>
             </a:r>
           </a:p>
           <a:p xmlns:a="http://schemas.openxmlformats.org/drawingml/2006/main">
@@ -4960,7 +4960,7 @@
                   <a:srgbClr val="45556C"/>
                 </a:solidFill>
               </a:rPr>
-              <a:t>windowsOut 双缓冲</a:t>
+              <a:t>sendBuf/size/offset</a:t>
             </a:r>
           </a:p>
           <a:p xmlns:a="http://schemas.openxmlformats.org/drawingml/2006/main">
@@ -4978,7 +4978,7 @@
                   <a:srgbClr val="45556C"/>
                 </a:solidFill>
               </a:rPr>
-              <a:t>status 0/1 翻转</a:t>
+              <a:t>status 双缓冲</a:t>
             </a:r>
           </a:p>
         </p:txBody>
@@ -5118,6 +5118,24 @@
               <a:t>InitGlobalAttrs -&gt; InitBuf -&gt; QuantInit -&gt; InitCommAndStatus</a:t>
             </a:r>
           </a:p>
+          <a:p xmlns:a="http://schemas.openxmlformats.org/drawingml/2006/main">
+            <a:pPr algn="l">
+              <a:buNone/>
+              <a:defRPr sz="1350" b="0">
+                <a:solidFill>
+                  <a:srgbClr val="45556C"/>
+                </a:solidFill>
+              </a:defRPr>
+            </a:pPr>
+            <a:r>
+              <a:rPr sz="1350" b="0">
+                <a:solidFill>
+                  <a:srgbClr val="45556C"/>
+                </a:solidFill>
+              </a:rPr>
+              <a:t>recvOffset_ 作为 AlltoAllvWrite remoteWinOffset</a:t>
+            </a:r>
+          </a:p>
         </p:txBody>
       </p:sp>
       <p:sp>
@@ -5252,7 +5270,7 @@
                   <a:srgbClr val="45556C"/>
                 </a:solidFill>
               </a:rPr>
-              <a:t>声明参数名顺序与定义/调用点不一致。</a:t>
+              <a:t>AIV0 后续作为 CCU client 提交；所有 AIV 共享 window/status。</a:t>
             </a:r>
           </a:p>
           <a:p xmlns:a="http://schemas.openxmlformats.org/drawingml/2006/main">
@@ -5270,7 +5288,7 @@
                   <a:srgbClr val="45556C"/>
                 </a:solidFill>
               </a:rPr>
-              <a:t>由于均为 GM_ADDR，维护时以定义和调用点为准。</a:t>
+              <a:t>声明参数名顺序与定义/调用点不一致，维护以定义和调用点为准。</a:t>
             </a:r>
           </a:p>
         </p:txBody>
@@ -5452,7 +5470,7 @@
                   <a:srgbClr val="45556C"/>
                 </a:solidFill>
               </a:rPr>
-              <a:t>执行链：mask -&gt; scatter -&gt; CCU AlltoAllvWrite -&gt; gather -&gt; finalize</a:t>
+              <a:t>执行链：mask -&gt; scatter/quant -&gt; AIV0 HCCL submit -&gt; CCU HalfAlltoAllV -&gt; gather/finalize</a:t>
             </a:r>
           </a:p>
         </p:txBody>
@@ -6085,7 +6103,7 @@
                   <a:srgbClr val="020618"/>
                 </a:solidFill>
               </a:rPr>
-              <a:t>AlltoAllv</a:t>
+              <a:t>XN/CKE</a:t>
             </a:r>
           </a:p>
         </p:txBody>
@@ -6290,7 +6308,7 @@
                   <a:srgbClr val="020618"/>
                 </a:solidFill>
               </a:rPr>
-              <a:t>expand_x</a:t>
+              <a:t>recvBuf</a:t>
             </a:r>
           </a:p>
         </p:txBody>
@@ -6632,7 +6650,7 @@
                   <a:srgbClr val="45556C"/>
                 </a:solidFill>
               </a:rPr>
-              <a:t>sort expert_ids</a:t>
+              <a:t>TokenScatter</a:t>
             </a:r>
           </a:p>
           <a:p xmlns:a="http://schemas.openxmlformats.org/drawingml/2006/main">
@@ -6650,7 +6668,7 @@
                   <a:srgbClr val="45556C"/>
                 </a:solidFill>
               </a:rPr>
-              <a:t>freq / cumsum</a:t>
+              <a:t>sort + freq/cumsum</a:t>
             </a:r>
           </a:p>
           <a:p xmlns:a="http://schemas.openxmlformats.org/drawingml/2006/main">
@@ -6668,7 +6686,25 @@
                   <a:srgbClr val="45556C"/>
                 </a:solidFill>
               </a:rPr>
-              <a:t>按目标 rank 打包 token</a:t>
+              <a:t>ProcessToken</a:t>
+            </a:r>
+          </a:p>
+          <a:p xmlns:a="http://schemas.openxmlformats.org/drawingml/2006/main">
+            <a:pPr algn="l">
+              <a:buNone/>
+              <a:defRPr sz="1350" b="0">
+                <a:solidFill>
+                  <a:srgbClr val="45556C"/>
+                </a:solidFill>
+              </a:defRPr>
+            </a:pPr>
+            <a:r>
+              <a:rPr sz="1350" b="0">
+                <a:solidFill>
+                  <a:srgbClr val="45556C"/>
+                </a:solidFill>
+              </a:rPr>
+              <a:t>sendBuf + size/offset</a:t>
             </a:r>
           </a:p>
         </p:txBody>
@@ -6805,7 +6841,7 @@
                   <a:srgbClr val="45556C"/>
                 </a:solidFill>
               </a:rPr>
-              <a:t>AIV0 发起 HCCL</a:t>
+              <a:t>AIV0 AlltoAllvWrite&lt;true&gt;</a:t>
             </a:r>
           </a:p>
           <a:p xmlns:a="http://schemas.openxmlformats.org/drawingml/2006/main">
@@ -6823,7 +6859,7 @@
                   <a:srgbClr val="45556C"/>
                 </a:solidFill>
               </a:rPr>
-              <a:t>其他 AIV 生成 expandIdx</a:t>
+              <a:t>CCU 按 byte 表写 window</a:t>
             </a:r>
           </a:p>
           <a:p xmlns:a="http://schemas.openxmlformats.org/drawingml/2006/main">
@@ -6841,7 +6877,7 @@
                   <a:srgbClr val="45556C"/>
                 </a:solidFill>
               </a:rPr>
-              <a:t>并初始化 gather buffer</a:t>
+              <a:t>重叠 expandIdx/init</a:t>
             </a:r>
           </a:p>
         </p:txBody>
@@ -6978,7 +7014,7 @@
                   <a:srgbClr val="45556C"/>
                 </a:solidFill>
               </a:rPr>
-              <a:t>recvBuf -&gt; expand_x</a:t>
+              <a:t>MoeGatherPrepare 读 count</a:t>
             </a:r>
           </a:p>
           <a:p xmlns:a="http://schemas.openxmlformats.org/drawingml/2006/main">
@@ -6996,7 +7032,7 @@
                   <a:srgbClr val="45556C"/>
                 </a:solidFill>
               </a:rPr>
-              <a:t>scale tail -&gt; dynamic_scales</a:t>
+              <a:t>recvBufGM_ -&gt; expand_x</a:t>
             </a:r>
           </a:p>
           <a:p xmlns:a="http://schemas.openxmlformats.org/drawingml/2006/main">
@@ -7014,7 +7050,7 @@
                   <a:srgbClr val="45556C"/>
                 </a:solidFill>
               </a:rPr>
-              <a:t>统计 expert_token_nums</a:t>
+              <a:t>scale/stat 输出</a:t>
             </a:r>
           </a:p>
         </p:txBody>
@@ -15360,7 +15396,7 @@
                 <a:ea typeface="Aptos"/>
                 <a:cs typeface="Aptos"/>
               </a:rPr>
-              <a:t>MoeDistributeDispatchA5 使用 CCU AlltoAllvWrite 完成跨 rank token 交换。</a:t>
+              <a:t>AIV 打包/解析 token；AIV0 提交 HCCL；CCU server 通过 XN/CKE 执行 HalfAlltoAllV 跨 rank 写。</a:t>
             </a:r>
           </a:p>
         </p:txBody>
@@ -15566,7 +15602,31 @@
                 <a:ea typeface="Aptos"/>
                 <a:cs typeface="Aptos"/>
               </a:rPr>
-              <a:t>tiling / buffer / HCCL</a:t>
+              <a:t>tiling/HCCL</a:t>
+            </a:r>
+          </a:p>
+          <a:p xmlns:a="http://schemas.openxmlformats.org/drawingml/2006/main">
+            <a:pPr algn="ctr">
+              <a:buNone/>
+              <a:defRPr sz="1050" b="0">
+                <a:solidFill>
+                  <a:srgbClr val="5B6472"/>
+                </a:solidFill>
+                <a:latin typeface="Aptos"/>
+                <a:ea typeface="Aptos"/>
+                <a:cs typeface="Aptos"/>
+              </a:defRPr>
+            </a:pPr>
+            <a:r>
+              <a:rPr sz="1050" b="0">
+                <a:solidFill>
+                  <a:srgbClr val="5B6472"/>
+                </a:solidFill>
+                <a:latin typeface="Aptos"/>
+                <a:ea typeface="Aptos"/>
+                <a:cs typeface="Aptos"/>
+              </a:rPr>
+              <a:t>window/status</a:t>
             </a:r>
           </a:p>
         </p:txBody>
@@ -15751,6 +15811,30 @@
               <a:t>x_active_mask</a:t>
             </a:r>
           </a:p>
+          <a:p xmlns:a="http://schemas.openxmlformats.org/drawingml/2006/main">
+            <a:pPr algn="ctr">
+              <a:buNone/>
+              <a:defRPr sz="1050" b="0">
+                <a:solidFill>
+                  <a:srgbClr val="5B6472"/>
+                </a:solidFill>
+                <a:latin typeface="Aptos"/>
+                <a:ea typeface="Aptos"/>
+                <a:cs typeface="Aptos"/>
+              </a:defRPr>
+            </a:pPr>
+            <a:r>
+              <a:rPr sz="1050" b="0">
+                <a:solidFill>
+                  <a:srgbClr val="5B6472"/>
+                </a:solidFill>
+                <a:latin typeface="Aptos"/>
+                <a:ea typeface="Aptos"/>
+                <a:cs typeface="Aptos"/>
+              </a:rPr>
+              <a:t>activeBs</a:t>
+            </a:r>
+          </a:p>
         </p:txBody>
       </p:sp>
       <p:sp>
@@ -15930,7 +16014,31 @@
                 <a:ea typeface="Aptos"/>
                 <a:cs typeface="Aptos"/>
               </a:rPr>
-              <a:t>sort ids / write send window</a:t>
+              <a:t>sort/freq/cumsum</a:t>
+            </a:r>
+          </a:p>
+          <a:p xmlns:a="http://schemas.openxmlformats.org/drawingml/2006/main">
+            <a:pPr algn="ctr">
+              <a:buNone/>
+              <a:defRPr sz="1050" b="0">
+                <a:solidFill>
+                  <a:srgbClr val="5B6472"/>
+                </a:solidFill>
+                <a:latin typeface="Aptos"/>
+                <a:ea typeface="Aptos"/>
+                <a:cs typeface="Aptos"/>
+              </a:defRPr>
+            </a:pPr>
+            <a:r>
+              <a:rPr sz="1050" b="0">
+                <a:solidFill>
+                  <a:srgbClr val="5B6472"/>
+                </a:solidFill>
+                <a:latin typeface="Aptos"/>
+                <a:ea typeface="Aptos"/>
+                <a:cs typeface="Aptos"/>
+              </a:rPr>
+              <a:t>sendBuf</a:t>
             </a:r>
           </a:p>
         </p:txBody>
@@ -16112,7 +16220,31 @@
                 <a:ea typeface="Aptos"/>
                 <a:cs typeface="Aptos"/>
               </a:rPr>
-              <a:t>CCU AlltoAllvWrite</a:t>
+              <a:t>AIV0 submit</a:t>
+            </a:r>
+          </a:p>
+          <a:p xmlns:a="http://schemas.openxmlformats.org/drawingml/2006/main">
+            <a:pPr algn="ctr">
+              <a:buNone/>
+              <a:defRPr sz="1050" b="0">
+                <a:solidFill>
+                  <a:srgbClr val="5B6472"/>
+                </a:solidFill>
+                <a:latin typeface="Aptos"/>
+                <a:ea typeface="Aptos"/>
+                <a:cs typeface="Aptos"/>
+              </a:defRPr>
+            </a:pPr>
+            <a:r>
+              <a:rPr sz="1050" b="0">
+                <a:solidFill>
+                  <a:srgbClr val="5B6472"/>
+                </a:solidFill>
+                <a:latin typeface="Aptos"/>
+                <a:ea typeface="Aptos"/>
+                <a:cs typeface="Aptos"/>
+              </a:rPr>
+              <a:t>CCU write</a:t>
             </a:r>
           </a:p>
         </p:txBody>
@@ -16294,7 +16426,31 @@
                 <a:ea typeface="Aptos"/>
                 <a:cs typeface="Aptos"/>
               </a:rPr>
-              <a:t>recv → expand_x</a:t>
+              <a:t>recvBuf</a:t>
+            </a:r>
+          </a:p>
+          <a:p xmlns:a="http://schemas.openxmlformats.org/drawingml/2006/main">
+            <a:pPr algn="ctr">
+              <a:buNone/>
+              <a:defRPr sz="1050" b="0">
+                <a:solidFill>
+                  <a:srgbClr val="5B6472"/>
+                </a:solidFill>
+                <a:latin typeface="Aptos"/>
+                <a:ea typeface="Aptos"/>
+                <a:cs typeface="Aptos"/>
+              </a:defRPr>
+            </a:pPr>
+            <a:r>
+              <a:rPr sz="1050" b="0">
+                <a:solidFill>
+                  <a:srgbClr val="5B6472"/>
+                </a:solidFill>
+                <a:latin typeface="Aptos"/>
+                <a:ea typeface="Aptos"/>
+                <a:cs typeface="Aptos"/>
+              </a:rPr>
+              <a:t>expand_x/stat</a:t>
             </a:r>
           </a:p>
         </p:txBody>
@@ -16351,7 +16507,7 @@
                 <a:ea typeface="Aptos"/>
                 <a:cs typeface="Aptos"/>
               </a:rPr>
-              <a:t>• 核心类：MoeDistributeDispatchA5</a:t>
+              <a:t>• send workspace：sendBufGM_ + sendSizeGM_ + sendOffsetGM_，size/offset 均为 byte 表</a:t>
             </a:r>
           </a:p>
           <a:p xmlns:a="http://schemas.openxmlformats.org/drawingml/2006/main">
@@ -16375,7 +16531,7 @@
                 <a:ea typeface="Aptos"/>
                 <a:cs typeface="Aptos"/>
               </a:rPr>
-              <a:t>• 通信窗口：sendBufGM / recvBufGM + 双 buffer status</a:t>
+              <a:t>• recv window：windowsOut[0] 头部 status，后接双 half-buffer；recvOffset_ 即 remoteWinOffset</a:t>
             </a:r>
           </a:p>
           <a:p xmlns:a="http://schemas.openxmlformats.org/drawingml/2006/main">

--- a/codex_output/04_moe_distribute_dispatch_v2代码分析/02_moe_distribute_dispatch_v2_A5_code_analysis_summary.pptx
+++ b/codex_output/04_moe_distribute_dispatch_v2代码分析/02_moe_distribute_dispatch_v2_A5_code_analysis_summary.pptx
@@ -2,24 +2,24 @@
 <file path=ppt/presentation.xml><?xml version="1.0" encoding="utf-8"?>
 <p:presentation xmlns:p="http://schemas.openxmlformats.org/presentationml/2006/main">
   <p:sldMasterIdLst>
-    <p:sldMasterId xmlns:r="http://schemas.openxmlformats.org/officeDocument/2006/relationships" id="2147483648" r:id="R71506630f339423b"/>
+    <p:sldMasterId xmlns:r="http://schemas.openxmlformats.org/officeDocument/2006/relationships" id="2147483648" r:id="R1bcbdda882534218"/>
   </p:sldMasterIdLst>
   <p:notesMasterIdLst>
-    <p:notesMasterId xmlns:r="http://schemas.openxmlformats.org/officeDocument/2006/relationships" r:id="R003aa70750e540db"/>
+    <p:notesMasterId xmlns:r="http://schemas.openxmlformats.org/officeDocument/2006/relationships" r:id="R701f003b0f674ed6"/>
   </p:notesMasterIdLst>
   <p:sldIdLst>
-    <p:sldId xmlns:r="http://schemas.openxmlformats.org/officeDocument/2006/relationships" id="256" r:id="R38deb51c81044da5"/>
-    <p:sldId xmlns:r="http://schemas.openxmlformats.org/officeDocument/2006/relationships" id="257" r:id="Rac4052d2a1a444c7"/>
-    <p:sldId xmlns:r="http://schemas.openxmlformats.org/officeDocument/2006/relationships" id="258" r:id="R40c6132b9f544ecf"/>
-    <p:sldId xmlns:r="http://schemas.openxmlformats.org/officeDocument/2006/relationships" id="259" r:id="Ra05a8c962f174303"/>
-    <p:sldId xmlns:r="http://schemas.openxmlformats.org/officeDocument/2006/relationships" id="260" r:id="R55611633da4d4ab8"/>
-    <p:sldId xmlns:r="http://schemas.openxmlformats.org/officeDocument/2006/relationships" id="261" r:id="R31eb3e11b4e64364"/>
-    <p:sldId xmlns:r="http://schemas.openxmlformats.org/officeDocument/2006/relationships" id="262" r:id="Ra560550bc05e4231"/>
-    <p:sldId xmlns:r="http://schemas.openxmlformats.org/officeDocument/2006/relationships" id="263" r:id="R607bb4cf1ca44a7e"/>
-    <p:sldId xmlns:r="http://schemas.openxmlformats.org/officeDocument/2006/relationships" id="264" r:id="R721b4f9fda974fb4"/>
-    <p:sldId xmlns:r="http://schemas.openxmlformats.org/officeDocument/2006/relationships" id="265" r:id="R1c3f492791d1486a"/>
-    <p:sldId xmlns:r="http://schemas.openxmlformats.org/officeDocument/2006/relationships" id="266" r:id="R7e69e97ebae949d2"/>
-    <p:sldId xmlns:r="http://schemas.openxmlformats.org/officeDocument/2006/relationships" id="267" r:id="R6cc8b634cd26422f"/>
+    <p:sldId xmlns:r="http://schemas.openxmlformats.org/officeDocument/2006/relationships" id="256" r:id="Rcfdaa9d36ecb4694"/>
+    <p:sldId xmlns:r="http://schemas.openxmlformats.org/officeDocument/2006/relationships" id="257" r:id="Rf5a6a152316f4c3e"/>
+    <p:sldId xmlns:r="http://schemas.openxmlformats.org/officeDocument/2006/relationships" id="258" r:id="R0aafed91e55e473c"/>
+    <p:sldId xmlns:r="http://schemas.openxmlformats.org/officeDocument/2006/relationships" id="259" r:id="Rfa65a7365f37421d"/>
+    <p:sldId xmlns:r="http://schemas.openxmlformats.org/officeDocument/2006/relationships" id="260" r:id="Rbb903a15949e47b8"/>
+    <p:sldId xmlns:r="http://schemas.openxmlformats.org/officeDocument/2006/relationships" id="261" r:id="Rfc530c8c230547d8"/>
+    <p:sldId xmlns:r="http://schemas.openxmlformats.org/officeDocument/2006/relationships" id="262" r:id="R59881e0501c24de9"/>
+    <p:sldId xmlns:r="http://schemas.openxmlformats.org/officeDocument/2006/relationships" id="263" r:id="R6279e45264c94921"/>
+    <p:sldId xmlns:r="http://schemas.openxmlformats.org/officeDocument/2006/relationships" id="264" r:id="Ra2f21752a96b4389"/>
+    <p:sldId xmlns:r="http://schemas.openxmlformats.org/officeDocument/2006/relationships" id="265" r:id="Rba8bfd46ea704783"/>
+    <p:sldId xmlns:r="http://schemas.openxmlformats.org/officeDocument/2006/relationships" id="266" r:id="R08d1e88f552649e5"/>
+    <p:sldId xmlns:r="http://schemas.openxmlformats.org/officeDocument/2006/relationships" id="267" r:id="R9ed31bf9a18945b1"/>
   </p:sldIdLst>
   <p:sldSz cx="12192000" cy="6858000"/>
   <p:notesSz cx="6858000" cy="9144000"/>
@@ -1338,7 +1338,7 @@
   </p:cSld>
   <p:clrMap bg1="lt1" tx1="dk1" bg2="lt2" tx2="dk2" accent1="accent1" accent2="accent2" accent3="accent3" accent4="accent4" accent5="accent5" accent6="accent6" hlink="hlink" folHlink="folHlink"/>
   <p:sldLayoutIdLst>
-    <p:sldLayoutId xmlns:r="http://schemas.openxmlformats.org/officeDocument/2006/relationships" id="2147483649" r:id="Re38521afd4fc43cb"/>
+    <p:sldLayoutId xmlns:r="http://schemas.openxmlformats.org/officeDocument/2006/relationships" id="2147483649" r:id="R11ec36f3557f472c"/>
   </p:sldLayoutIdLst>
   <p:txStyles>
     <p:titleStyle>
@@ -3128,7 +3128,7 @@
                 <a:ea typeface="Aptos"/>
                 <a:cs typeface="Aptos"/>
               </a:rPr>
-              <a:t>HostKfc</a:t>
+              <a:t>CCU 边界</a:t>
             </a:r>
           </a:p>
         </p:txBody>
@@ -3185,7 +3185,7 @@
                 <a:ea typeface="Aptos"/>
                 <a:cs typeface="Aptos"/>
               </a:rPr>
-              <a:t>arch35 HostKfc 逻辑完整但当前主 kernel 未直接派发，需用编译产物确认。</a:t>
+              <a:t>CCU 只覆盖 EP-only、tp=1、HalfAlltoAllV；不是 MTE/window/fullmesh 的统一替代。</a:t>
             </a:r>
           </a:p>
         </p:txBody>
@@ -3312,7 +3312,7 @@
                 <a:ea typeface="Aptos"/>
                 <a:cs typeface="Aptos"/>
               </a:rPr>
-              <a:t>HCCL window</a:t>
+              <a:t>资源约束</a:t>
             </a:r>
           </a:p>
         </p:txBody>
@@ -3369,7 +3369,7 @@
                 <a:ea typeface="Aptos"/>
                 <a:cs typeface="Aptos"/>
               </a:rPr>
-              <a:t>CheckCommAttrs 对 window 容量按 HCCL_BUFFSIZE*2 检查；量化 payload 对齐需与 perTokenCommSize_ 复核。</a:t>
+              <a:t>CCU 依赖 ccu server、XN/CKE 与双缓冲 HCCL window；MTE 是独立资源模型。</a:t>
             </a:r>
           </a:p>
         </p:txBody>
@@ -7548,7 +7548,7 @@
                 <a:ea typeface="Aptos"/>
                 <a:cs typeface="Aptos"/>
               </a:rPr>
-              <a:t>comm_alg=ccu 走 CCU 专用链路；空/fullmesh_v1/fullmesh_v2 走 MTE/window 链路。</a:t>
+              <a:t>A5 实际三分支：ccu 走 EP-only CCU；空/fullmesh_v1 走 MTE 默认；fullmesh_v2 走 MTE FullMesh。</a:t>
             </a:r>
           </a:p>
         </p:txBody>
@@ -7697,7 +7697,7 @@
                 <a:ea typeface="Aptos"/>
                 <a:cs typeface="Aptos"/>
               </a:rPr>
-              <a:t>A5 non-ccu 对外可叫 V2，但 API/graph 侧会转 Inner V3 或 V2-&gt;V3 节点。</a:t>
+              <a:t>CCU 是专用加速而非统一替代；MTE 两分支承接 V3/context、兼容与 fullmesh_v2。</a:t>
             </a:r>
           </a:p>
         </p:txBody>
@@ -9329,7 +9329,7 @@
                 <a:ea typeface="Aptos"/>
                 <a:cs typeface="Aptos"/>
               </a:rPr>
-              <a:t>同一个算子在 API、graph、tiling、kernel 的选择条件并不完全相同。</a:t>
+              <a:t>A5 分支由 comm_alg、V3/context、FullMesh tiling key 和 CCU server 资源共同决定。</a:t>
             </a:r>
           </a:p>
         </p:txBody>
@@ -10872,7 +10872,7 @@
                 <a:ea typeface="Aptos"/>
                 <a:cs typeface="Aptos"/>
               </a:rPr>
-              <a:t>空/fullmesh</a:t>
+              <a:t>空/fullmesh_v1/v2</a:t>
             </a:r>
           </a:p>
         </p:txBody>
@@ -10929,7 +10929,7 @@
                 <a:ea typeface="Aptos"/>
                 <a:cs typeface="Aptos"/>
               </a:rPr>
-              <a:t>A3 public tiling + ARCH=A5</a:t>
+              <a:t>空/fullmesh_v1 -&gt; no-fullmesh；fullmesh_v2 -&gt; FullMesh</a:t>
             </a:r>
           </a:p>
         </p:txBody>
@@ -11043,7 +11043,7 @@
                 <a:ea typeface="Aptos"/>
                 <a:cs typeface="Aptos"/>
               </a:rPr>
-              <a:t>ccu / MTE</a:t>
+              <a:t>ccu / non-ccu</a:t>
             </a:r>
           </a:p>
         </p:txBody>
@@ -11100,7 +11100,7 @@
                 <a:ea typeface="Aptos"/>
                 <a:cs typeface="Aptos"/>
               </a:rPr>
-              <a:t>A5 / V2 / FullMesh</a:t>
+              <a:t>ccu -&gt; A5；空/v1 -&gt; V2；v2 -&gt; FullMesh</a:t>
             </a:r>
           </a:p>
         </p:txBody>
